--- a/RoboteQ/Final.pptx
+++ b/RoboteQ/Final.pptx
@@ -2,14 +2,20 @@
 <file path=ppt/presentation.xml><?xml version="1.0" encoding="utf-8"?>
 <p:presentation xmlns:a="http://schemas.openxmlformats.org/drawingml/2006/main" xmlns:r="http://schemas.openxmlformats.org/officeDocument/2006/relationships" xmlns:p="http://schemas.openxmlformats.org/presentationml/2006/main" saveSubsetFonts="1" autoCompressPictures="0">
   <p:sldMasterIdLst>
-    <p:sldMasterId id="2147483648" r:id="rId1"/>
+    <p:sldMasterId id="2147483799" r:id="rId1"/>
   </p:sldMasterIdLst>
   <p:sldIdLst>
     <p:sldId id="264" r:id="rId2"/>
     <p:sldId id="258" r:id="rId3"/>
     <p:sldId id="261" r:id="rId4"/>
-    <p:sldId id="262" r:id="rId5"/>
-    <p:sldId id="263" r:id="rId6"/>
+    <p:sldId id="271" r:id="rId5"/>
+    <p:sldId id="272" r:id="rId6"/>
+    <p:sldId id="273" r:id="rId7"/>
+    <p:sldId id="262" r:id="rId8"/>
+    <p:sldId id="274" r:id="rId9"/>
+    <p:sldId id="275" r:id="rId10"/>
+    <p:sldId id="276" r:id="rId11"/>
+    <p:sldId id="277" r:id="rId12"/>
   </p:sldIdLst>
   <p:sldSz cx="12192000" cy="6858000"/>
   <p:notesSz cx="6858000" cy="9144000"/>
@@ -108,6 +114,11 @@
       </a:defRPr>
     </a:lvl9pPr>
   </p:defaultTextStyle>
+  <p:extLst>
+    <p:ext uri="{EFAFB233-063F-42B5-8137-9DF3F51BA10A}">
+      <p15:sldGuideLst xmlns:p15="http://schemas.microsoft.com/office/powerpoint/2012/main"/>
+    </p:ext>
+  </p:extLst>
 </p:presentation>
 </file>
 
@@ -133,7 +144,7 @@
           <p:cNvPr id="2" name="Title 1">
             <a:extLst>
               <a:ext uri="{FF2B5EF4-FFF2-40B4-BE49-F238E27FC236}">
-                <a16:creationId xmlns:a16="http://schemas.microsoft.com/office/drawing/2014/main" id="{E7C0BF4C-28EE-46AC-1EB9-95F1C809165D}"/>
+                <a16:creationId xmlns:a16="http://schemas.microsoft.com/office/drawing/2014/main" id="{AA40AEA5-B49D-9DBE-3909-20B4834C09E3}"/>
               </a:ext>
             </a:extLst>
           </p:cNvPr>
@@ -171,7 +182,7 @@
           <p:cNvPr id="3" name="Subtitle 2">
             <a:extLst>
               <a:ext uri="{FF2B5EF4-FFF2-40B4-BE49-F238E27FC236}">
-                <a16:creationId xmlns:a16="http://schemas.microsoft.com/office/drawing/2014/main" id="{1AC2EA69-2842-69F1-E59F-4E641F9CD2C4}"/>
+                <a16:creationId xmlns:a16="http://schemas.microsoft.com/office/drawing/2014/main" id="{FE9E5E35-95AA-E0B5-D776-A978DD53D9E6}"/>
               </a:ext>
             </a:extLst>
           </p:cNvPr>
@@ -242,7 +253,7 @@
           <p:cNvPr id="4" name="Date Placeholder 3">
             <a:extLst>
               <a:ext uri="{FF2B5EF4-FFF2-40B4-BE49-F238E27FC236}">
-                <a16:creationId xmlns:a16="http://schemas.microsoft.com/office/drawing/2014/main" id="{3CFB00E1-6813-6551-F778-67FC89DFBBFD}"/>
+                <a16:creationId xmlns:a16="http://schemas.microsoft.com/office/drawing/2014/main" id="{28D001F3-170B-84BD-EA8E-84473C8E2778}"/>
               </a:ext>
             </a:extLst>
           </p:cNvPr>
@@ -271,7 +282,7 @@
           <p:cNvPr id="5" name="Footer Placeholder 4">
             <a:extLst>
               <a:ext uri="{FF2B5EF4-FFF2-40B4-BE49-F238E27FC236}">
-                <a16:creationId xmlns:a16="http://schemas.microsoft.com/office/drawing/2014/main" id="{74BE5689-196A-0C46-31C2-40722A50AE09}"/>
+                <a16:creationId xmlns:a16="http://schemas.microsoft.com/office/drawing/2014/main" id="{F577251B-6155-6141-C247-30ABA6D4A3B6}"/>
               </a:ext>
             </a:extLst>
           </p:cNvPr>
@@ -296,7 +307,7 @@
           <p:cNvPr id="6" name="Slide Number Placeholder 5">
             <a:extLst>
               <a:ext uri="{FF2B5EF4-FFF2-40B4-BE49-F238E27FC236}">
-                <a16:creationId xmlns:a16="http://schemas.microsoft.com/office/drawing/2014/main" id="{74739157-DDD5-6775-F28C-32DB06B20E67}"/>
+                <a16:creationId xmlns:a16="http://schemas.microsoft.com/office/drawing/2014/main" id="{F381402E-CC88-A769-FA1C-996BAECEBE50}"/>
               </a:ext>
             </a:extLst>
           </p:cNvPr>
@@ -323,7 +334,7 @@
     </p:spTree>
     <p:extLst>
       <p:ext uri="{BB962C8B-B14F-4D97-AF65-F5344CB8AC3E}">
-        <p14:creationId xmlns:p14="http://schemas.microsoft.com/office/powerpoint/2010/main" val="4190703791"/>
+        <p14:creationId xmlns:p14="http://schemas.microsoft.com/office/powerpoint/2010/main" val="3233686284"/>
       </p:ext>
     </p:extLst>
   </p:cSld>
@@ -355,7 +366,7 @@
           <p:cNvPr id="2" name="Title 1">
             <a:extLst>
               <a:ext uri="{FF2B5EF4-FFF2-40B4-BE49-F238E27FC236}">
-                <a16:creationId xmlns:a16="http://schemas.microsoft.com/office/drawing/2014/main" id="{DC741468-84C4-8626-2CBE-77F9DD23FCD7}"/>
+                <a16:creationId xmlns:a16="http://schemas.microsoft.com/office/drawing/2014/main" id="{A1C3B0B0-0BA6-2E53-745D-728DB1EBB284}"/>
               </a:ext>
             </a:extLst>
           </p:cNvPr>
@@ -384,7 +395,7 @@
           <p:cNvPr id="3" name="Vertical Text Placeholder 2">
             <a:extLst>
               <a:ext uri="{FF2B5EF4-FFF2-40B4-BE49-F238E27FC236}">
-                <a16:creationId xmlns:a16="http://schemas.microsoft.com/office/drawing/2014/main" id="{7257BD15-3D15-F0F4-5EE4-4D5A589E8AB5}"/>
+                <a16:creationId xmlns:a16="http://schemas.microsoft.com/office/drawing/2014/main" id="{6EBF1652-CBDC-67D0-B013-CAACEEDCABEF}"/>
               </a:ext>
             </a:extLst>
           </p:cNvPr>
@@ -442,7 +453,7 @@
           <p:cNvPr id="4" name="Date Placeholder 3">
             <a:extLst>
               <a:ext uri="{FF2B5EF4-FFF2-40B4-BE49-F238E27FC236}">
-                <a16:creationId xmlns:a16="http://schemas.microsoft.com/office/drawing/2014/main" id="{B903019D-A76F-A8AC-75D8-5706111C8A5D}"/>
+                <a16:creationId xmlns:a16="http://schemas.microsoft.com/office/drawing/2014/main" id="{2F462738-A78C-A0AF-0110-9C20D10B0D47}"/>
               </a:ext>
             </a:extLst>
           </p:cNvPr>
@@ -471,7 +482,7 @@
           <p:cNvPr id="5" name="Footer Placeholder 4">
             <a:extLst>
               <a:ext uri="{FF2B5EF4-FFF2-40B4-BE49-F238E27FC236}">
-                <a16:creationId xmlns:a16="http://schemas.microsoft.com/office/drawing/2014/main" id="{F812265A-395D-27E9-FAAB-A1D28B97123D}"/>
+                <a16:creationId xmlns:a16="http://schemas.microsoft.com/office/drawing/2014/main" id="{CEB0C229-AC4A-2142-6C9A-EF1AB7A906AC}"/>
               </a:ext>
             </a:extLst>
           </p:cNvPr>
@@ -496,7 +507,7 @@
           <p:cNvPr id="6" name="Slide Number Placeholder 5">
             <a:extLst>
               <a:ext uri="{FF2B5EF4-FFF2-40B4-BE49-F238E27FC236}">
-                <a16:creationId xmlns:a16="http://schemas.microsoft.com/office/drawing/2014/main" id="{F37C1402-4AC4-7448-A376-5455B456D370}"/>
+                <a16:creationId xmlns:a16="http://schemas.microsoft.com/office/drawing/2014/main" id="{64FF707A-645D-A89A-663F-9C4E2371884C}"/>
               </a:ext>
             </a:extLst>
           </p:cNvPr>
@@ -523,7 +534,7 @@
     </p:spTree>
     <p:extLst>
       <p:ext uri="{BB962C8B-B14F-4D97-AF65-F5344CB8AC3E}">
-        <p14:creationId xmlns:p14="http://schemas.microsoft.com/office/powerpoint/2010/main" val="3341631868"/>
+        <p14:creationId xmlns:p14="http://schemas.microsoft.com/office/powerpoint/2010/main" val="849992154"/>
       </p:ext>
     </p:extLst>
   </p:cSld>
@@ -555,7 +566,7 @@
           <p:cNvPr id="2" name="Vertical Title 1">
             <a:extLst>
               <a:ext uri="{FF2B5EF4-FFF2-40B4-BE49-F238E27FC236}">
-                <a16:creationId xmlns:a16="http://schemas.microsoft.com/office/drawing/2014/main" id="{85689744-4F54-7AE8-6030-EF8D64D72FCF}"/>
+                <a16:creationId xmlns:a16="http://schemas.microsoft.com/office/drawing/2014/main" id="{F09A4B28-E260-9083-6E15-4B6FCA80FB8E}"/>
               </a:ext>
             </a:extLst>
           </p:cNvPr>
@@ -589,7 +600,7 @@
           <p:cNvPr id="3" name="Vertical Text Placeholder 2">
             <a:extLst>
               <a:ext uri="{FF2B5EF4-FFF2-40B4-BE49-F238E27FC236}">
-                <a16:creationId xmlns:a16="http://schemas.microsoft.com/office/drawing/2014/main" id="{74784FD1-CA6E-877D-8F18-6C44DB3C3419}"/>
+                <a16:creationId xmlns:a16="http://schemas.microsoft.com/office/drawing/2014/main" id="{A49D633F-B762-EB54-F70E-8695D781E088}"/>
               </a:ext>
             </a:extLst>
           </p:cNvPr>
@@ -652,7 +663,7 @@
           <p:cNvPr id="4" name="Date Placeholder 3">
             <a:extLst>
               <a:ext uri="{FF2B5EF4-FFF2-40B4-BE49-F238E27FC236}">
-                <a16:creationId xmlns:a16="http://schemas.microsoft.com/office/drawing/2014/main" id="{16090CE9-D49F-F0D8-2537-996343D52DD7}"/>
+                <a16:creationId xmlns:a16="http://schemas.microsoft.com/office/drawing/2014/main" id="{8FD30401-FC6A-BBB2-7259-4C0342F24763}"/>
               </a:ext>
             </a:extLst>
           </p:cNvPr>
@@ -681,7 +692,7 @@
           <p:cNvPr id="5" name="Footer Placeholder 4">
             <a:extLst>
               <a:ext uri="{FF2B5EF4-FFF2-40B4-BE49-F238E27FC236}">
-                <a16:creationId xmlns:a16="http://schemas.microsoft.com/office/drawing/2014/main" id="{644068D9-63B8-593A-988E-225529BD63FE}"/>
+                <a16:creationId xmlns:a16="http://schemas.microsoft.com/office/drawing/2014/main" id="{135FA136-DF38-2059-9FF6-6ED70F22561B}"/>
               </a:ext>
             </a:extLst>
           </p:cNvPr>
@@ -706,7 +717,7 @@
           <p:cNvPr id="6" name="Slide Number Placeholder 5">
             <a:extLst>
               <a:ext uri="{FF2B5EF4-FFF2-40B4-BE49-F238E27FC236}">
-                <a16:creationId xmlns:a16="http://schemas.microsoft.com/office/drawing/2014/main" id="{C424FECB-0A4A-A774-9271-C25F4F38ECB0}"/>
+                <a16:creationId xmlns:a16="http://schemas.microsoft.com/office/drawing/2014/main" id="{0A449073-1CB1-063D-C826-41FB9A702F04}"/>
               </a:ext>
             </a:extLst>
           </p:cNvPr>
@@ -733,7 +744,7 @@
     </p:spTree>
     <p:extLst>
       <p:ext uri="{BB962C8B-B14F-4D97-AF65-F5344CB8AC3E}">
-        <p14:creationId xmlns:p14="http://schemas.microsoft.com/office/powerpoint/2010/main" val="4126349041"/>
+        <p14:creationId xmlns:p14="http://schemas.microsoft.com/office/powerpoint/2010/main" val="2851750671"/>
       </p:ext>
     </p:extLst>
   </p:cSld>
@@ -765,7 +776,7 @@
           <p:cNvPr id="2" name="Title 1">
             <a:extLst>
               <a:ext uri="{FF2B5EF4-FFF2-40B4-BE49-F238E27FC236}">
-                <a16:creationId xmlns:a16="http://schemas.microsoft.com/office/drawing/2014/main" id="{A43C612C-E67B-F10D-CD96-6084E81137ED}"/>
+                <a16:creationId xmlns:a16="http://schemas.microsoft.com/office/drawing/2014/main" id="{7B6ACD46-AAB8-B2A1-AC1E-15CC311D8BE9}"/>
               </a:ext>
             </a:extLst>
           </p:cNvPr>
@@ -794,7 +805,7 @@
           <p:cNvPr id="3" name="Content Placeholder 2">
             <a:extLst>
               <a:ext uri="{FF2B5EF4-FFF2-40B4-BE49-F238E27FC236}">
-                <a16:creationId xmlns:a16="http://schemas.microsoft.com/office/drawing/2014/main" id="{CDDE1AC5-54ED-0EE9-091C-7856B1A486C3}"/>
+                <a16:creationId xmlns:a16="http://schemas.microsoft.com/office/drawing/2014/main" id="{27880990-70EE-9693-C8B5-16A8131479E7}"/>
               </a:ext>
             </a:extLst>
           </p:cNvPr>
@@ -852,7 +863,7 @@
           <p:cNvPr id="4" name="Date Placeholder 3">
             <a:extLst>
               <a:ext uri="{FF2B5EF4-FFF2-40B4-BE49-F238E27FC236}">
-                <a16:creationId xmlns:a16="http://schemas.microsoft.com/office/drawing/2014/main" id="{E4FEB3E7-D845-0014-DA55-C1335442F59B}"/>
+                <a16:creationId xmlns:a16="http://schemas.microsoft.com/office/drawing/2014/main" id="{19D29A0F-9DBC-5300-8171-F0098C0D198A}"/>
               </a:ext>
             </a:extLst>
           </p:cNvPr>
@@ -881,7 +892,7 @@
           <p:cNvPr id="5" name="Footer Placeholder 4">
             <a:extLst>
               <a:ext uri="{FF2B5EF4-FFF2-40B4-BE49-F238E27FC236}">
-                <a16:creationId xmlns:a16="http://schemas.microsoft.com/office/drawing/2014/main" id="{0CC38FDD-D122-1ABE-8B13-BC254A9B6CFA}"/>
+                <a16:creationId xmlns:a16="http://schemas.microsoft.com/office/drawing/2014/main" id="{781D69B6-DC5B-803D-19A3-F6BAC5DBDC83}"/>
               </a:ext>
             </a:extLst>
           </p:cNvPr>
@@ -906,7 +917,7 @@
           <p:cNvPr id="6" name="Slide Number Placeholder 5">
             <a:extLst>
               <a:ext uri="{FF2B5EF4-FFF2-40B4-BE49-F238E27FC236}">
-                <a16:creationId xmlns:a16="http://schemas.microsoft.com/office/drawing/2014/main" id="{572E53C8-2B3C-C329-7937-99EE7E7A7F8B}"/>
+                <a16:creationId xmlns:a16="http://schemas.microsoft.com/office/drawing/2014/main" id="{D3390919-1D87-B174-4D8F-4E2DF551FB2F}"/>
               </a:ext>
             </a:extLst>
           </p:cNvPr>
@@ -933,7 +944,7 @@
     </p:spTree>
     <p:extLst>
       <p:ext uri="{BB962C8B-B14F-4D97-AF65-F5344CB8AC3E}">
-        <p14:creationId xmlns:p14="http://schemas.microsoft.com/office/powerpoint/2010/main" val="981912812"/>
+        <p14:creationId xmlns:p14="http://schemas.microsoft.com/office/powerpoint/2010/main" val="4159790917"/>
       </p:ext>
     </p:extLst>
   </p:cSld>
@@ -965,7 +976,7 @@
           <p:cNvPr id="2" name="Title 1">
             <a:extLst>
               <a:ext uri="{FF2B5EF4-FFF2-40B4-BE49-F238E27FC236}">
-                <a16:creationId xmlns:a16="http://schemas.microsoft.com/office/drawing/2014/main" id="{02768A62-E568-C54D-5E87-25FCF24D2939}"/>
+                <a16:creationId xmlns:a16="http://schemas.microsoft.com/office/drawing/2014/main" id="{20625E24-79F9-BAD5-170D-02D3C10E4C6C}"/>
               </a:ext>
             </a:extLst>
           </p:cNvPr>
@@ -1003,7 +1014,7 @@
           <p:cNvPr id="3" name="Text Placeholder 2">
             <a:extLst>
               <a:ext uri="{FF2B5EF4-FFF2-40B4-BE49-F238E27FC236}">
-                <a16:creationId xmlns:a16="http://schemas.microsoft.com/office/drawing/2014/main" id="{AAB9152D-2BBD-253F-5B32-9E027AF04930}"/>
+                <a16:creationId xmlns:a16="http://schemas.microsoft.com/office/drawing/2014/main" id="{1E0903DC-204E-0F86-417C-FAD68B29FBF8}"/>
               </a:ext>
             </a:extLst>
           </p:cNvPr>
@@ -1128,7 +1139,7 @@
           <p:cNvPr id="4" name="Date Placeholder 3">
             <a:extLst>
               <a:ext uri="{FF2B5EF4-FFF2-40B4-BE49-F238E27FC236}">
-                <a16:creationId xmlns:a16="http://schemas.microsoft.com/office/drawing/2014/main" id="{28B7829C-5A27-63C8-00ED-72802FB69175}"/>
+                <a16:creationId xmlns:a16="http://schemas.microsoft.com/office/drawing/2014/main" id="{3A38BD43-CEC1-5D61-1AE6-09102CFFDC45}"/>
               </a:ext>
             </a:extLst>
           </p:cNvPr>
@@ -1157,7 +1168,7 @@
           <p:cNvPr id="5" name="Footer Placeholder 4">
             <a:extLst>
               <a:ext uri="{FF2B5EF4-FFF2-40B4-BE49-F238E27FC236}">
-                <a16:creationId xmlns:a16="http://schemas.microsoft.com/office/drawing/2014/main" id="{1855EBF4-F555-7C16-EE74-68BAD139D0D8}"/>
+                <a16:creationId xmlns:a16="http://schemas.microsoft.com/office/drawing/2014/main" id="{DDDAB3C1-CE0B-D0DA-156E-EDDBBD1F29AD}"/>
               </a:ext>
             </a:extLst>
           </p:cNvPr>
@@ -1182,7 +1193,7 @@
           <p:cNvPr id="6" name="Slide Number Placeholder 5">
             <a:extLst>
               <a:ext uri="{FF2B5EF4-FFF2-40B4-BE49-F238E27FC236}">
-                <a16:creationId xmlns:a16="http://schemas.microsoft.com/office/drawing/2014/main" id="{9FCA7ECC-7780-A066-65C8-DE2E6BDA1BC5}"/>
+                <a16:creationId xmlns:a16="http://schemas.microsoft.com/office/drawing/2014/main" id="{BA93B02A-9B2C-5B46-B48F-4FA7DD56063B}"/>
               </a:ext>
             </a:extLst>
           </p:cNvPr>
@@ -1209,7 +1220,7 @@
     </p:spTree>
     <p:extLst>
       <p:ext uri="{BB962C8B-B14F-4D97-AF65-F5344CB8AC3E}">
-        <p14:creationId xmlns:p14="http://schemas.microsoft.com/office/powerpoint/2010/main" val="2797932470"/>
+        <p14:creationId xmlns:p14="http://schemas.microsoft.com/office/powerpoint/2010/main" val="2158315449"/>
       </p:ext>
     </p:extLst>
   </p:cSld>
@@ -1241,7 +1252,7 @@
           <p:cNvPr id="2" name="Title 1">
             <a:extLst>
               <a:ext uri="{FF2B5EF4-FFF2-40B4-BE49-F238E27FC236}">
-                <a16:creationId xmlns:a16="http://schemas.microsoft.com/office/drawing/2014/main" id="{4C6897C7-2877-5910-464A-C0A0860FE805}"/>
+                <a16:creationId xmlns:a16="http://schemas.microsoft.com/office/drawing/2014/main" id="{8E8E372C-CB63-F203-7766-3ABD9E21CF38}"/>
               </a:ext>
             </a:extLst>
           </p:cNvPr>
@@ -1270,7 +1281,7 @@
           <p:cNvPr id="3" name="Content Placeholder 2">
             <a:extLst>
               <a:ext uri="{FF2B5EF4-FFF2-40B4-BE49-F238E27FC236}">
-                <a16:creationId xmlns:a16="http://schemas.microsoft.com/office/drawing/2014/main" id="{B0520458-F1FF-A40C-A0B0-A94071DB9AE1}"/>
+                <a16:creationId xmlns:a16="http://schemas.microsoft.com/office/drawing/2014/main" id="{1CDAF93F-BE0F-935F-3B2C-CBED3CF27E43}"/>
               </a:ext>
             </a:extLst>
           </p:cNvPr>
@@ -1333,7 +1344,7 @@
           <p:cNvPr id="4" name="Content Placeholder 3">
             <a:extLst>
               <a:ext uri="{FF2B5EF4-FFF2-40B4-BE49-F238E27FC236}">
-                <a16:creationId xmlns:a16="http://schemas.microsoft.com/office/drawing/2014/main" id="{7C47904E-69B5-2310-7723-D157573E816F}"/>
+                <a16:creationId xmlns:a16="http://schemas.microsoft.com/office/drawing/2014/main" id="{43302CBE-A96D-DD74-98D5-1A419F5D135D}"/>
               </a:ext>
             </a:extLst>
           </p:cNvPr>
@@ -1396,7 +1407,7 @@
           <p:cNvPr id="5" name="Date Placeholder 4">
             <a:extLst>
               <a:ext uri="{FF2B5EF4-FFF2-40B4-BE49-F238E27FC236}">
-                <a16:creationId xmlns:a16="http://schemas.microsoft.com/office/drawing/2014/main" id="{2654F8B6-0DAD-B6E7-F2DB-73336ABBC111}"/>
+                <a16:creationId xmlns:a16="http://schemas.microsoft.com/office/drawing/2014/main" id="{FFE9ED0B-553F-D151-5CF1-707EB9D753BD}"/>
               </a:ext>
             </a:extLst>
           </p:cNvPr>
@@ -1425,7 +1436,7 @@
           <p:cNvPr id="6" name="Footer Placeholder 5">
             <a:extLst>
               <a:ext uri="{FF2B5EF4-FFF2-40B4-BE49-F238E27FC236}">
-                <a16:creationId xmlns:a16="http://schemas.microsoft.com/office/drawing/2014/main" id="{F5BEF3F4-9FF4-7418-AE43-6A35A8E8D230}"/>
+                <a16:creationId xmlns:a16="http://schemas.microsoft.com/office/drawing/2014/main" id="{D1A7F18F-19E4-6B71-4D35-F8A1DDAD9DB7}"/>
               </a:ext>
             </a:extLst>
           </p:cNvPr>
@@ -1450,7 +1461,7 @@
           <p:cNvPr id="7" name="Slide Number Placeholder 6">
             <a:extLst>
               <a:ext uri="{FF2B5EF4-FFF2-40B4-BE49-F238E27FC236}">
-                <a16:creationId xmlns:a16="http://schemas.microsoft.com/office/drawing/2014/main" id="{8E46D9BE-0E24-E457-BB9D-661894B36069}"/>
+                <a16:creationId xmlns:a16="http://schemas.microsoft.com/office/drawing/2014/main" id="{26B3FCA0-047A-C6AE-F181-7C980E837762}"/>
               </a:ext>
             </a:extLst>
           </p:cNvPr>
@@ -1477,7 +1488,7 @@
     </p:spTree>
     <p:extLst>
       <p:ext uri="{BB962C8B-B14F-4D97-AF65-F5344CB8AC3E}">
-        <p14:creationId xmlns:p14="http://schemas.microsoft.com/office/powerpoint/2010/main" val="2671822435"/>
+        <p14:creationId xmlns:p14="http://schemas.microsoft.com/office/powerpoint/2010/main" val="337757489"/>
       </p:ext>
     </p:extLst>
   </p:cSld>
@@ -1509,7 +1520,7 @@
           <p:cNvPr id="2" name="Title 1">
             <a:extLst>
               <a:ext uri="{FF2B5EF4-FFF2-40B4-BE49-F238E27FC236}">
-                <a16:creationId xmlns:a16="http://schemas.microsoft.com/office/drawing/2014/main" id="{823E5883-C994-AA5B-0E78-C15550785BAA}"/>
+                <a16:creationId xmlns:a16="http://schemas.microsoft.com/office/drawing/2014/main" id="{059097A0-3086-19FA-12A6-86298D6EEE87}"/>
               </a:ext>
             </a:extLst>
           </p:cNvPr>
@@ -1543,7 +1554,7 @@
           <p:cNvPr id="3" name="Text Placeholder 2">
             <a:extLst>
               <a:ext uri="{FF2B5EF4-FFF2-40B4-BE49-F238E27FC236}">
-                <a16:creationId xmlns:a16="http://schemas.microsoft.com/office/drawing/2014/main" id="{9D3F3BF2-5377-B914-4051-53C5148554F3}"/>
+                <a16:creationId xmlns:a16="http://schemas.microsoft.com/office/drawing/2014/main" id="{5B147AC3-E61E-DAB5-215D-8DBC3E536D8A}"/>
               </a:ext>
             </a:extLst>
           </p:cNvPr>
@@ -1614,7 +1625,7 @@
           <p:cNvPr id="4" name="Content Placeholder 3">
             <a:extLst>
               <a:ext uri="{FF2B5EF4-FFF2-40B4-BE49-F238E27FC236}">
-                <a16:creationId xmlns:a16="http://schemas.microsoft.com/office/drawing/2014/main" id="{54DA4294-0AAD-C664-A374-781133949641}"/>
+                <a16:creationId xmlns:a16="http://schemas.microsoft.com/office/drawing/2014/main" id="{622712A1-CFD4-3822-5DFA-D0BD18552776}"/>
               </a:ext>
             </a:extLst>
           </p:cNvPr>
@@ -1677,7 +1688,7 @@
           <p:cNvPr id="5" name="Text Placeholder 4">
             <a:extLst>
               <a:ext uri="{FF2B5EF4-FFF2-40B4-BE49-F238E27FC236}">
-                <a16:creationId xmlns:a16="http://schemas.microsoft.com/office/drawing/2014/main" id="{1857E9FF-7EBC-AE6C-5609-E884C503A1D8}"/>
+                <a16:creationId xmlns:a16="http://schemas.microsoft.com/office/drawing/2014/main" id="{D7C3E992-CBC3-4898-2D49-E4CE5835EE79}"/>
               </a:ext>
             </a:extLst>
           </p:cNvPr>
@@ -1748,7 +1759,7 @@
           <p:cNvPr id="6" name="Content Placeholder 5">
             <a:extLst>
               <a:ext uri="{FF2B5EF4-FFF2-40B4-BE49-F238E27FC236}">
-                <a16:creationId xmlns:a16="http://schemas.microsoft.com/office/drawing/2014/main" id="{1B34FAD9-555B-F7BE-45DC-AA2B71CB0860}"/>
+                <a16:creationId xmlns:a16="http://schemas.microsoft.com/office/drawing/2014/main" id="{D1CDF093-3581-5515-4B39-35B722743A79}"/>
               </a:ext>
             </a:extLst>
           </p:cNvPr>
@@ -1811,7 +1822,7 @@
           <p:cNvPr id="7" name="Date Placeholder 6">
             <a:extLst>
               <a:ext uri="{FF2B5EF4-FFF2-40B4-BE49-F238E27FC236}">
-                <a16:creationId xmlns:a16="http://schemas.microsoft.com/office/drawing/2014/main" id="{E95E5F78-85EF-DE0B-8868-CE27D55F606D}"/>
+                <a16:creationId xmlns:a16="http://schemas.microsoft.com/office/drawing/2014/main" id="{709AF830-8101-0845-8834-0DA005F854DA}"/>
               </a:ext>
             </a:extLst>
           </p:cNvPr>
@@ -1840,7 +1851,7 @@
           <p:cNvPr id="8" name="Footer Placeholder 7">
             <a:extLst>
               <a:ext uri="{FF2B5EF4-FFF2-40B4-BE49-F238E27FC236}">
-                <a16:creationId xmlns:a16="http://schemas.microsoft.com/office/drawing/2014/main" id="{8325BFD0-2C30-E0C4-86F0-7ADE98829C00}"/>
+                <a16:creationId xmlns:a16="http://schemas.microsoft.com/office/drawing/2014/main" id="{47B35385-5CC9-FC53-121C-66E4E18B7DCF}"/>
               </a:ext>
             </a:extLst>
           </p:cNvPr>
@@ -1865,7 +1876,7 @@
           <p:cNvPr id="9" name="Slide Number Placeholder 8">
             <a:extLst>
               <a:ext uri="{FF2B5EF4-FFF2-40B4-BE49-F238E27FC236}">
-                <a16:creationId xmlns:a16="http://schemas.microsoft.com/office/drawing/2014/main" id="{D17D44AE-D21A-FC17-79C6-A96E5CD35A07}"/>
+                <a16:creationId xmlns:a16="http://schemas.microsoft.com/office/drawing/2014/main" id="{C87BECA5-27E9-7D01-24F2-D62B3BD95012}"/>
               </a:ext>
             </a:extLst>
           </p:cNvPr>
@@ -1892,7 +1903,7 @@
     </p:spTree>
     <p:extLst>
       <p:ext uri="{BB962C8B-B14F-4D97-AF65-F5344CB8AC3E}">
-        <p14:creationId xmlns:p14="http://schemas.microsoft.com/office/powerpoint/2010/main" val="3720607534"/>
+        <p14:creationId xmlns:p14="http://schemas.microsoft.com/office/powerpoint/2010/main" val="7254322"/>
       </p:ext>
     </p:extLst>
   </p:cSld>
@@ -1924,7 +1935,7 @@
           <p:cNvPr id="2" name="Title 1">
             <a:extLst>
               <a:ext uri="{FF2B5EF4-FFF2-40B4-BE49-F238E27FC236}">
-                <a16:creationId xmlns:a16="http://schemas.microsoft.com/office/drawing/2014/main" id="{4AF5FCD2-1672-6293-ACED-49F26B8FB1AC}"/>
+                <a16:creationId xmlns:a16="http://schemas.microsoft.com/office/drawing/2014/main" id="{3C7CAB3D-4663-02BF-F583-0B3D9E7DD063}"/>
               </a:ext>
             </a:extLst>
           </p:cNvPr>
@@ -1953,7 +1964,7 @@
           <p:cNvPr id="3" name="Date Placeholder 2">
             <a:extLst>
               <a:ext uri="{FF2B5EF4-FFF2-40B4-BE49-F238E27FC236}">
-                <a16:creationId xmlns:a16="http://schemas.microsoft.com/office/drawing/2014/main" id="{36D477D8-0F28-F784-BFAB-EE2F22158672}"/>
+                <a16:creationId xmlns:a16="http://schemas.microsoft.com/office/drawing/2014/main" id="{4A9E62BC-415E-1D7D-8DBA-C4E6DE42236E}"/>
               </a:ext>
             </a:extLst>
           </p:cNvPr>
@@ -1982,7 +1993,7 @@
           <p:cNvPr id="4" name="Footer Placeholder 3">
             <a:extLst>
               <a:ext uri="{FF2B5EF4-FFF2-40B4-BE49-F238E27FC236}">
-                <a16:creationId xmlns:a16="http://schemas.microsoft.com/office/drawing/2014/main" id="{C609ACF5-EBC9-6D53-6346-6026DB815F05}"/>
+                <a16:creationId xmlns:a16="http://schemas.microsoft.com/office/drawing/2014/main" id="{D1FB8E4D-6A58-DD48-2B71-A1B44197A1B9}"/>
               </a:ext>
             </a:extLst>
           </p:cNvPr>
@@ -2007,7 +2018,7 @@
           <p:cNvPr id="5" name="Slide Number Placeholder 4">
             <a:extLst>
               <a:ext uri="{FF2B5EF4-FFF2-40B4-BE49-F238E27FC236}">
-                <a16:creationId xmlns:a16="http://schemas.microsoft.com/office/drawing/2014/main" id="{B652F154-CAA4-7F8C-192C-6D651ECAA00F}"/>
+                <a16:creationId xmlns:a16="http://schemas.microsoft.com/office/drawing/2014/main" id="{C7243788-80B7-C8C4-4998-6718873D7C3B}"/>
               </a:ext>
             </a:extLst>
           </p:cNvPr>
@@ -2034,7 +2045,7 @@
     </p:spTree>
     <p:extLst>
       <p:ext uri="{BB962C8B-B14F-4D97-AF65-F5344CB8AC3E}">
-        <p14:creationId xmlns:p14="http://schemas.microsoft.com/office/powerpoint/2010/main" val="4291368973"/>
+        <p14:creationId xmlns:p14="http://schemas.microsoft.com/office/powerpoint/2010/main" val="603880012"/>
       </p:ext>
     </p:extLst>
   </p:cSld>
@@ -2066,7 +2077,7 @@
           <p:cNvPr id="2" name="Date Placeholder 1">
             <a:extLst>
               <a:ext uri="{FF2B5EF4-FFF2-40B4-BE49-F238E27FC236}">
-                <a16:creationId xmlns:a16="http://schemas.microsoft.com/office/drawing/2014/main" id="{92D0A1E1-C955-F405-3DA4-EC1BE26F9C52}"/>
+                <a16:creationId xmlns:a16="http://schemas.microsoft.com/office/drawing/2014/main" id="{AEDE22B9-A4DF-1B4D-C486-FFDDCEC6C11E}"/>
               </a:ext>
             </a:extLst>
           </p:cNvPr>
@@ -2095,7 +2106,7 @@
           <p:cNvPr id="3" name="Footer Placeholder 2">
             <a:extLst>
               <a:ext uri="{FF2B5EF4-FFF2-40B4-BE49-F238E27FC236}">
-                <a16:creationId xmlns:a16="http://schemas.microsoft.com/office/drawing/2014/main" id="{2741FD27-4EA1-EB17-D54E-08B3CAF86211}"/>
+                <a16:creationId xmlns:a16="http://schemas.microsoft.com/office/drawing/2014/main" id="{510298C2-F3F0-701C-86D1-F8A5B1239071}"/>
               </a:ext>
             </a:extLst>
           </p:cNvPr>
@@ -2120,7 +2131,7 @@
           <p:cNvPr id="4" name="Slide Number Placeholder 3">
             <a:extLst>
               <a:ext uri="{FF2B5EF4-FFF2-40B4-BE49-F238E27FC236}">
-                <a16:creationId xmlns:a16="http://schemas.microsoft.com/office/drawing/2014/main" id="{15705DCC-95C0-E41D-0529-C82EE4014247}"/>
+                <a16:creationId xmlns:a16="http://schemas.microsoft.com/office/drawing/2014/main" id="{546D4CA2-126D-C3BE-E3ED-EF1926B6129D}"/>
               </a:ext>
             </a:extLst>
           </p:cNvPr>
@@ -2147,7 +2158,7 @@
     </p:spTree>
     <p:extLst>
       <p:ext uri="{BB962C8B-B14F-4D97-AF65-F5344CB8AC3E}">
-        <p14:creationId xmlns:p14="http://schemas.microsoft.com/office/powerpoint/2010/main" val="2604828241"/>
+        <p14:creationId xmlns:p14="http://schemas.microsoft.com/office/powerpoint/2010/main" val="342187699"/>
       </p:ext>
     </p:extLst>
   </p:cSld>
@@ -2179,7 +2190,7 @@
           <p:cNvPr id="2" name="Title 1">
             <a:extLst>
               <a:ext uri="{FF2B5EF4-FFF2-40B4-BE49-F238E27FC236}">
-                <a16:creationId xmlns:a16="http://schemas.microsoft.com/office/drawing/2014/main" id="{16454F56-64CE-EF35-4058-8BF03950568B}"/>
+                <a16:creationId xmlns:a16="http://schemas.microsoft.com/office/drawing/2014/main" id="{D290D789-8812-22EA-19E7-187B8DD1CD1A}"/>
               </a:ext>
             </a:extLst>
           </p:cNvPr>
@@ -2217,7 +2228,7 @@
           <p:cNvPr id="3" name="Content Placeholder 2">
             <a:extLst>
               <a:ext uri="{FF2B5EF4-FFF2-40B4-BE49-F238E27FC236}">
-                <a16:creationId xmlns:a16="http://schemas.microsoft.com/office/drawing/2014/main" id="{821CD245-336F-1FB2-2E08-20B70F6E1DC4}"/>
+                <a16:creationId xmlns:a16="http://schemas.microsoft.com/office/drawing/2014/main" id="{2D464512-13D4-1DA2-C0AA-AAD70D7DC501}"/>
               </a:ext>
             </a:extLst>
           </p:cNvPr>
@@ -2308,7 +2319,7 @@
           <p:cNvPr id="4" name="Text Placeholder 3">
             <a:extLst>
               <a:ext uri="{FF2B5EF4-FFF2-40B4-BE49-F238E27FC236}">
-                <a16:creationId xmlns:a16="http://schemas.microsoft.com/office/drawing/2014/main" id="{6B64E475-8619-D2E2-3A49-601857747838}"/>
+                <a16:creationId xmlns:a16="http://schemas.microsoft.com/office/drawing/2014/main" id="{988C6B5E-6C57-FE3C-7760-8DBFCD14AE1B}"/>
               </a:ext>
             </a:extLst>
           </p:cNvPr>
@@ -2379,7 +2390,7 @@
           <p:cNvPr id="5" name="Date Placeholder 4">
             <a:extLst>
               <a:ext uri="{FF2B5EF4-FFF2-40B4-BE49-F238E27FC236}">
-                <a16:creationId xmlns:a16="http://schemas.microsoft.com/office/drawing/2014/main" id="{9D3BDEFF-9B1E-B93A-F820-5CA5A10B6DC5}"/>
+                <a16:creationId xmlns:a16="http://schemas.microsoft.com/office/drawing/2014/main" id="{D9F8B38E-1580-3C8A-35FB-D91B8E3A8384}"/>
               </a:ext>
             </a:extLst>
           </p:cNvPr>
@@ -2408,7 +2419,7 @@
           <p:cNvPr id="6" name="Footer Placeholder 5">
             <a:extLst>
               <a:ext uri="{FF2B5EF4-FFF2-40B4-BE49-F238E27FC236}">
-                <a16:creationId xmlns:a16="http://schemas.microsoft.com/office/drawing/2014/main" id="{F1EC43E9-31CE-DCAC-4CA3-B76D2E208CF9}"/>
+                <a16:creationId xmlns:a16="http://schemas.microsoft.com/office/drawing/2014/main" id="{288662B1-6F0B-58FE-09F0-0EC9C29924CB}"/>
               </a:ext>
             </a:extLst>
           </p:cNvPr>
@@ -2433,7 +2444,7 @@
           <p:cNvPr id="7" name="Slide Number Placeholder 6">
             <a:extLst>
               <a:ext uri="{FF2B5EF4-FFF2-40B4-BE49-F238E27FC236}">
-                <a16:creationId xmlns:a16="http://schemas.microsoft.com/office/drawing/2014/main" id="{A3EAC1B4-D5D6-B5AA-CC18-A77FF5BB1CC2}"/>
+                <a16:creationId xmlns:a16="http://schemas.microsoft.com/office/drawing/2014/main" id="{8A4AA2E1-CA71-F7BC-E378-D458A39C21A0}"/>
               </a:ext>
             </a:extLst>
           </p:cNvPr>
@@ -2460,7 +2471,7 @@
     </p:spTree>
     <p:extLst>
       <p:ext uri="{BB962C8B-B14F-4D97-AF65-F5344CB8AC3E}">
-        <p14:creationId xmlns:p14="http://schemas.microsoft.com/office/powerpoint/2010/main" val="815466312"/>
+        <p14:creationId xmlns:p14="http://schemas.microsoft.com/office/powerpoint/2010/main" val="3960440699"/>
       </p:ext>
     </p:extLst>
   </p:cSld>
@@ -2492,7 +2503,7 @@
           <p:cNvPr id="2" name="Title 1">
             <a:extLst>
               <a:ext uri="{FF2B5EF4-FFF2-40B4-BE49-F238E27FC236}">
-                <a16:creationId xmlns:a16="http://schemas.microsoft.com/office/drawing/2014/main" id="{87B89EC9-C67B-DAF2-2ED5-980F75FC6EAC}"/>
+                <a16:creationId xmlns:a16="http://schemas.microsoft.com/office/drawing/2014/main" id="{4FFCAF44-2680-4DC3-FFCD-B3D6B970EACA}"/>
               </a:ext>
             </a:extLst>
           </p:cNvPr>
@@ -2530,7 +2541,7 @@
           <p:cNvPr id="3" name="Picture Placeholder 2">
             <a:extLst>
               <a:ext uri="{FF2B5EF4-FFF2-40B4-BE49-F238E27FC236}">
-                <a16:creationId xmlns:a16="http://schemas.microsoft.com/office/drawing/2014/main" id="{8831DF63-9631-2BD6-A9C4-02AFFADDAA15}"/>
+                <a16:creationId xmlns:a16="http://schemas.microsoft.com/office/drawing/2014/main" id="{ADE93441-6553-3583-401D-F3849BFE7426}"/>
               </a:ext>
             </a:extLst>
           </p:cNvPr>
@@ -2597,7 +2608,7 @@
           <p:cNvPr id="4" name="Text Placeholder 3">
             <a:extLst>
               <a:ext uri="{FF2B5EF4-FFF2-40B4-BE49-F238E27FC236}">
-                <a16:creationId xmlns:a16="http://schemas.microsoft.com/office/drawing/2014/main" id="{436239BC-4F5C-8313-644A-50AEB8C427B9}"/>
+                <a16:creationId xmlns:a16="http://schemas.microsoft.com/office/drawing/2014/main" id="{24C8A1F3-C22C-731A-DE73-D2858017978F}"/>
               </a:ext>
             </a:extLst>
           </p:cNvPr>
@@ -2668,7 +2679,7 @@
           <p:cNvPr id="5" name="Date Placeholder 4">
             <a:extLst>
               <a:ext uri="{FF2B5EF4-FFF2-40B4-BE49-F238E27FC236}">
-                <a16:creationId xmlns:a16="http://schemas.microsoft.com/office/drawing/2014/main" id="{00976ED3-2CAA-AEA4-778D-211D6B0C2532}"/>
+                <a16:creationId xmlns:a16="http://schemas.microsoft.com/office/drawing/2014/main" id="{909DD0C3-3EDA-A6F6-20C8-4BDD7E3AF7AF}"/>
               </a:ext>
             </a:extLst>
           </p:cNvPr>
@@ -2697,7 +2708,7 @@
           <p:cNvPr id="6" name="Footer Placeholder 5">
             <a:extLst>
               <a:ext uri="{FF2B5EF4-FFF2-40B4-BE49-F238E27FC236}">
-                <a16:creationId xmlns:a16="http://schemas.microsoft.com/office/drawing/2014/main" id="{44F5F211-0189-A47C-9B91-A60859B4B290}"/>
+                <a16:creationId xmlns:a16="http://schemas.microsoft.com/office/drawing/2014/main" id="{6C402EC3-965F-B537-84BD-7A531588AA23}"/>
               </a:ext>
             </a:extLst>
           </p:cNvPr>
@@ -2722,7 +2733,7 @@
           <p:cNvPr id="7" name="Slide Number Placeholder 6">
             <a:extLst>
               <a:ext uri="{FF2B5EF4-FFF2-40B4-BE49-F238E27FC236}">
-                <a16:creationId xmlns:a16="http://schemas.microsoft.com/office/drawing/2014/main" id="{E0383E01-F22A-B85F-1409-DBFFA7EC2E4E}"/>
+                <a16:creationId xmlns:a16="http://schemas.microsoft.com/office/drawing/2014/main" id="{C14F69A5-8DFF-9B4E-DECD-57D97F20DC61}"/>
               </a:ext>
             </a:extLst>
           </p:cNvPr>
@@ -2749,7 +2760,7 @@
     </p:spTree>
     <p:extLst>
       <p:ext uri="{BB962C8B-B14F-4D97-AF65-F5344CB8AC3E}">
-        <p14:creationId xmlns:p14="http://schemas.microsoft.com/office/powerpoint/2010/main" val="2679429239"/>
+        <p14:creationId xmlns:p14="http://schemas.microsoft.com/office/powerpoint/2010/main" val="137808661"/>
       </p:ext>
     </p:extLst>
   </p:cSld>
@@ -2786,7 +2797,7 @@
           <p:cNvPr id="2" name="Title Placeholder 1">
             <a:extLst>
               <a:ext uri="{FF2B5EF4-FFF2-40B4-BE49-F238E27FC236}">
-                <a16:creationId xmlns:a16="http://schemas.microsoft.com/office/drawing/2014/main" id="{3E6340FE-5321-3E23-6BAB-9667F24FD4DD}"/>
+                <a16:creationId xmlns:a16="http://schemas.microsoft.com/office/drawing/2014/main" id="{98037778-6446-8A60-2951-9939033269D0}"/>
               </a:ext>
             </a:extLst>
           </p:cNvPr>
@@ -2825,7 +2836,7 @@
           <p:cNvPr id="3" name="Text Placeholder 2">
             <a:extLst>
               <a:ext uri="{FF2B5EF4-FFF2-40B4-BE49-F238E27FC236}">
-                <a16:creationId xmlns:a16="http://schemas.microsoft.com/office/drawing/2014/main" id="{B6351313-8CA2-1050-432C-9EF205610C7F}"/>
+                <a16:creationId xmlns:a16="http://schemas.microsoft.com/office/drawing/2014/main" id="{20C792DE-16A9-3FFA-4E5C-E9B60F229FC8}"/>
               </a:ext>
             </a:extLst>
           </p:cNvPr>
@@ -2893,7 +2904,7 @@
           <p:cNvPr id="4" name="Date Placeholder 3">
             <a:extLst>
               <a:ext uri="{FF2B5EF4-FFF2-40B4-BE49-F238E27FC236}">
-                <a16:creationId xmlns:a16="http://schemas.microsoft.com/office/drawing/2014/main" id="{ACDC669E-0F78-0975-2836-3A7D17D7296A}"/>
+                <a16:creationId xmlns:a16="http://schemas.microsoft.com/office/drawing/2014/main" id="{7AEE7698-307F-CE5B-F1D7-A5F47A6BD527}"/>
               </a:ext>
             </a:extLst>
           </p:cNvPr>
@@ -2940,7 +2951,7 @@
           <p:cNvPr id="5" name="Footer Placeholder 4">
             <a:extLst>
               <a:ext uri="{FF2B5EF4-FFF2-40B4-BE49-F238E27FC236}">
-                <a16:creationId xmlns:a16="http://schemas.microsoft.com/office/drawing/2014/main" id="{97983E31-F383-580F-00F3-4B7B19F56F8B}"/>
+                <a16:creationId xmlns:a16="http://schemas.microsoft.com/office/drawing/2014/main" id="{B03DD976-D078-E67B-0A7B-B31C0B6D44EE}"/>
               </a:ext>
             </a:extLst>
           </p:cNvPr>
@@ -2983,7 +2994,7 @@
           <p:cNvPr id="6" name="Slide Number Placeholder 5">
             <a:extLst>
               <a:ext uri="{FF2B5EF4-FFF2-40B4-BE49-F238E27FC236}">
-                <a16:creationId xmlns:a16="http://schemas.microsoft.com/office/drawing/2014/main" id="{218A7D1D-92B6-39EC-E6DD-6399812AC500}"/>
+                <a16:creationId xmlns:a16="http://schemas.microsoft.com/office/drawing/2014/main" id="{99E6BD6B-4D50-6C98-54BF-CEB622301118}"/>
               </a:ext>
             </a:extLst>
           </p:cNvPr>
@@ -3028,23 +3039,23 @@
     </p:spTree>
     <p:extLst>
       <p:ext uri="{BB962C8B-B14F-4D97-AF65-F5344CB8AC3E}">
-        <p14:creationId xmlns:p14="http://schemas.microsoft.com/office/powerpoint/2010/main" val="3199529954"/>
+        <p14:creationId xmlns:p14="http://schemas.microsoft.com/office/powerpoint/2010/main" val="2789551097"/>
       </p:ext>
     </p:extLst>
   </p:cSld>
   <p:clrMap bg1="lt1" tx1="dk1" bg2="lt2" tx2="dk2" accent1="accent1" accent2="accent2" accent3="accent3" accent4="accent4" accent5="accent5" accent6="accent6" hlink="hlink" folHlink="folHlink"/>
   <p:sldLayoutIdLst>
-    <p:sldLayoutId id="2147483649" r:id="rId1"/>
-    <p:sldLayoutId id="2147483650" r:id="rId2"/>
-    <p:sldLayoutId id="2147483651" r:id="rId3"/>
-    <p:sldLayoutId id="2147483652" r:id="rId4"/>
-    <p:sldLayoutId id="2147483653" r:id="rId5"/>
-    <p:sldLayoutId id="2147483654" r:id="rId6"/>
-    <p:sldLayoutId id="2147483655" r:id="rId7"/>
-    <p:sldLayoutId id="2147483656" r:id="rId8"/>
-    <p:sldLayoutId id="2147483657" r:id="rId9"/>
-    <p:sldLayoutId id="2147483658" r:id="rId10"/>
-    <p:sldLayoutId id="2147483659" r:id="rId11"/>
+    <p:sldLayoutId id="2147483800" r:id="rId1"/>
+    <p:sldLayoutId id="2147483801" r:id="rId2"/>
+    <p:sldLayoutId id="2147483802" r:id="rId3"/>
+    <p:sldLayoutId id="2147483803" r:id="rId4"/>
+    <p:sldLayoutId id="2147483804" r:id="rId5"/>
+    <p:sldLayoutId id="2147483805" r:id="rId6"/>
+    <p:sldLayoutId id="2147483806" r:id="rId7"/>
+    <p:sldLayoutId id="2147483807" r:id="rId8"/>
+    <p:sldLayoutId id="2147483808" r:id="rId9"/>
+    <p:sldLayoutId id="2147483809" r:id="rId10"/>
+    <p:sldLayoutId id="2147483810" r:id="rId11"/>
   </p:sldLayoutIdLst>
   <p:txStyles>
     <p:titleStyle>
@@ -3326,6 +3337,11 @@
       </a:lvl9pPr>
     </p:otherStyle>
   </p:txStyles>
+  <p:extLst>
+    <p:ext uri="{27BBF7A9-308A-43DC-89C8-2F10F3537804}">
+      <p15:sldGuideLst xmlns:p15="http://schemas.microsoft.com/office/powerpoint/2012/main"/>
+    </p:ext>
+  </p:extLst>
 </p:sldMaster>
 </file>
 
@@ -3364,7 +3380,9 @@
         </p:nvSpPr>
         <p:spPr/>
         <p:txBody>
-          <a:bodyPr/>
+          <a:bodyPr>
+            <a:normAutofit/>
+          </a:bodyPr>
           <a:lstStyle/>
           <a:p>
             <a:r>
@@ -3392,8 +3410,13 @@
         </p:nvSpPr>
         <p:spPr/>
         <p:txBody>
-          <a:bodyPr/>
+          <a:bodyPr>
+            <a:normAutofit/>
+          </a:bodyPr>
           <a:lstStyle/>
+          <a:p>
+            <a:endParaRPr lang="en-GR" dirty="0"/>
+          </a:p>
           <a:p>
             <a:r>
               <a:rPr lang="en-GR" dirty="0"/>
@@ -3412,6 +3435,189 @@
     <p:extLst>
       <p:ext uri="{BB962C8B-B14F-4D97-AF65-F5344CB8AC3E}">
         <p14:creationId xmlns:p14="http://schemas.microsoft.com/office/powerpoint/2010/main" val="2828955456"/>
+      </p:ext>
+    </p:extLst>
+  </p:cSld>
+  <p:clrMapOvr>
+    <a:masterClrMapping/>
+  </p:clrMapOvr>
+</p:sld>
+</file>
+
+<file path=ppt/slides/slide10.xml><?xml version="1.0" encoding="utf-8"?>
+<p:sld xmlns:a="http://schemas.openxmlformats.org/drawingml/2006/main" xmlns:r="http://schemas.openxmlformats.org/officeDocument/2006/relationships" xmlns:p="http://schemas.openxmlformats.org/presentationml/2006/main">
+  <p:cSld>
+    <p:spTree>
+      <p:nvGrpSpPr>
+        <p:cNvPr id="1" name=""/>
+        <p:cNvGrpSpPr/>
+        <p:nvPr/>
+      </p:nvGrpSpPr>
+      <p:grpSpPr>
+        <a:xfrm>
+          <a:off x="0" y="0"/>
+          <a:ext cx="0" cy="0"/>
+          <a:chOff x="0" y="0"/>
+          <a:chExt cx="0" cy="0"/>
+        </a:xfrm>
+      </p:grpSpPr>
+      <p:sp>
+        <p:nvSpPr>
+          <p:cNvPr id="2" name="Title 1">
+            <a:extLst>
+              <a:ext uri="{FF2B5EF4-FFF2-40B4-BE49-F238E27FC236}">
+                <a16:creationId xmlns:a16="http://schemas.microsoft.com/office/drawing/2014/main" id="{710546AE-349B-DE50-3587-B80F057D9C39}"/>
+              </a:ext>
+            </a:extLst>
+          </p:cNvPr>
+          <p:cNvSpPr>
+            <a:spLocks noGrp="1"/>
+          </p:cNvSpPr>
+          <p:nvPr>
+            <p:ph type="title"/>
+          </p:nvPr>
+        </p:nvSpPr>
+        <p:spPr/>
+        <p:txBody>
+          <a:bodyPr/>
+          <a:lstStyle/>
+          <a:p>
+            <a:r>
+              <a:rPr lang="en-GR" dirty="0"/>
+              <a:t>Zephy Directory and File structure</a:t>
+            </a:r>
+          </a:p>
+        </p:txBody>
+      </p:sp>
+      <p:pic>
+        <p:nvPicPr>
+          <p:cNvPr id="3" name="Picture 2">
+            <a:extLst>
+              <a:ext uri="{FF2B5EF4-FFF2-40B4-BE49-F238E27FC236}">
+                <a16:creationId xmlns:a16="http://schemas.microsoft.com/office/drawing/2014/main" id="{D972E395-1D4A-84E7-771B-A5C22EF357E3}"/>
+              </a:ext>
+            </a:extLst>
+          </p:cNvPr>
+          <p:cNvPicPr>
+            <a:picLocks noChangeAspect="1"/>
+          </p:cNvPicPr>
+          <p:nvPr/>
+        </p:nvPicPr>
+        <p:blipFill>
+          <a:blip r:embed="rId2"/>
+          <a:stretch>
+            <a:fillRect/>
+          </a:stretch>
+        </p:blipFill>
+        <p:spPr>
+          <a:xfrm>
+            <a:off x="13316" y="1690688"/>
+            <a:ext cx="9066567" cy="5156200"/>
+          </a:xfrm>
+          <a:prstGeom prst="rect">
+            <a:avLst/>
+          </a:prstGeom>
+        </p:spPr>
+      </p:pic>
+      <p:pic>
+        <p:nvPicPr>
+          <p:cNvPr id="4" name="Picture 3">
+            <a:extLst>
+              <a:ext uri="{FF2B5EF4-FFF2-40B4-BE49-F238E27FC236}">
+                <a16:creationId xmlns:a16="http://schemas.microsoft.com/office/drawing/2014/main" id="{C314E9CC-261F-AD03-13B8-20D868FB6619}"/>
+              </a:ext>
+            </a:extLst>
+          </p:cNvPr>
+          <p:cNvPicPr>
+            <a:picLocks noChangeAspect="1"/>
+          </p:cNvPicPr>
+          <p:nvPr/>
+        </p:nvPicPr>
+        <p:blipFill>
+          <a:blip r:embed="rId3"/>
+          <a:stretch>
+            <a:fillRect/>
+          </a:stretch>
+        </p:blipFill>
+        <p:spPr>
+          <a:xfrm>
+            <a:off x="11030215" y="0"/>
+            <a:ext cx="1148469" cy="6858000"/>
+          </a:xfrm>
+          <a:prstGeom prst="rect">
+            <a:avLst/>
+          </a:prstGeom>
+        </p:spPr>
+      </p:pic>
+    </p:spTree>
+    <p:extLst>
+      <p:ext uri="{BB962C8B-B14F-4D97-AF65-F5344CB8AC3E}">
+        <p14:creationId xmlns:p14="http://schemas.microsoft.com/office/powerpoint/2010/main" val="1463591542"/>
+      </p:ext>
+    </p:extLst>
+  </p:cSld>
+  <p:clrMapOvr>
+    <a:masterClrMapping/>
+  </p:clrMapOvr>
+</p:sld>
+</file>
+
+<file path=ppt/slides/slide11.xml><?xml version="1.0" encoding="utf-8"?>
+<p:sld xmlns:a="http://schemas.openxmlformats.org/drawingml/2006/main" xmlns:r="http://schemas.openxmlformats.org/officeDocument/2006/relationships" xmlns:p="http://schemas.openxmlformats.org/presentationml/2006/main">
+  <p:cSld>
+    <p:spTree>
+      <p:nvGrpSpPr>
+        <p:cNvPr id="1" name=""/>
+        <p:cNvGrpSpPr/>
+        <p:nvPr/>
+      </p:nvGrpSpPr>
+      <p:grpSpPr>
+        <a:xfrm>
+          <a:off x="0" y="0"/>
+          <a:ext cx="0" cy="0"/>
+          <a:chOff x="0" y="0"/>
+          <a:chExt cx="0" cy="0"/>
+        </a:xfrm>
+      </p:grpSpPr>
+      <p:sp>
+        <p:nvSpPr>
+          <p:cNvPr id="2" name="TextBox 1">
+            <a:extLst>
+              <a:ext uri="{FF2B5EF4-FFF2-40B4-BE49-F238E27FC236}">
+                <a16:creationId xmlns:a16="http://schemas.microsoft.com/office/drawing/2014/main" id="{8DD28BAA-DDDF-63C3-295F-FAED85779D14}"/>
+              </a:ext>
+            </a:extLst>
+          </p:cNvPr>
+          <p:cNvSpPr txBox="1"/>
+          <p:nvPr/>
+        </p:nvSpPr>
+        <p:spPr>
+          <a:xfrm>
+            <a:off x="2949575" y="3013501"/>
+            <a:ext cx="6292850" cy="830997"/>
+          </a:xfrm>
+          <a:prstGeom prst="rect">
+            <a:avLst/>
+          </a:prstGeom>
+          <a:noFill/>
+        </p:spPr>
+        <p:txBody>
+          <a:bodyPr wrap="square" rtlCol="0">
+            <a:spAutoFit/>
+          </a:bodyPr>
+          <a:lstStyle/>
+          <a:p>
+            <a:r>
+              <a:rPr lang="en-GR" sz="4800" dirty="0"/>
+              <a:t>Thank you for your time</a:t>
+            </a:r>
+          </a:p>
+        </p:txBody>
+      </p:sp>
+    </p:spTree>
+    <p:extLst>
+      <p:ext uri="{BB962C8B-B14F-4D97-AF65-F5344CB8AC3E}">
+        <p14:creationId xmlns:p14="http://schemas.microsoft.com/office/powerpoint/2010/main" val="415837778"/>
       </p:ext>
     </p:extLst>
   </p:cSld>
@@ -10481,230 +10687,6 @@
           </a:prstGeom>
         </p:spPr>
       </p:pic>
-      <mc:AlternateContent xmlns:mc="http://schemas.openxmlformats.org/markup-compatibility/2006" xmlns:a14="http://schemas.microsoft.com/office/drawing/2010/main">
-        <mc:Choice Requires="a14">
-          <p:sp>
-            <p:nvSpPr>
-              <p:cNvPr id="8" name="TextBox 7">
-                <a:extLst>
-                  <a:ext uri="{FF2B5EF4-FFF2-40B4-BE49-F238E27FC236}">
-                    <a16:creationId xmlns:a16="http://schemas.microsoft.com/office/drawing/2014/main" id="{1CCB96BE-9B0D-44CF-5D0B-34216505514B}"/>
-                  </a:ext>
-                </a:extLst>
-              </p:cNvPr>
-              <p:cNvSpPr txBox="1"/>
-              <p:nvPr/>
-            </p:nvSpPr>
-            <p:spPr>
-              <a:xfrm>
-                <a:off x="1041568" y="1859078"/>
-                <a:ext cx="4190496" cy="369332"/>
-              </a:xfrm>
-              <a:prstGeom prst="rect">
-                <a:avLst/>
-              </a:prstGeom>
-              <a:noFill/>
-            </p:spPr>
-            <p:txBody>
-              <a:bodyPr wrap="square" rtlCol="0">
-                <a:spAutoFit/>
-              </a:bodyPr>
-              <a:lstStyle/>
-              <a:p>
-                <a:pPr/>
-                <a14:m>
-                  <m:oMathPara xmlns:m="http://schemas.openxmlformats.org/officeDocument/2006/math">
-                    <m:oMath>
-                      <m:r>
-                        <a:rPr lang="en-US" b="0" i="1" smtClean="0">
-                          <a:latin typeface="Cambria Math" panose="02040503050406030204" pitchFamily="18" charset="0"/>
-                        </a:rPr>
-                        <m:t>𝑄</m:t>
-                      </m:r>
-                      <m:r>
-                        <a:rPr lang="en-US" b="0" i="1" smtClean="0">
-                          <a:latin typeface="Cambria Math" panose="02040503050406030204" pitchFamily="18" charset="0"/>
-                        </a:rPr>
-                        <m:t>=</m:t>
-                      </m:r>
-                      <m:sSub>
-                        <m:sSubPr>
-                          <m:ctrlPr>
-                            <a:rPr lang="en-US" b="0" i="1" smtClean="0">
-                              <a:latin typeface="Cambria Math" panose="02040503050406030204" pitchFamily="18" charset="0"/>
-                            </a:rPr>
-                          </m:ctrlPr>
-                        </m:sSubPr>
-                        <m:e>
-                          <m:r>
-                            <a:rPr lang="en-US" b="0" i="1" smtClean="0">
-                              <a:latin typeface="Cambria Math" panose="02040503050406030204" pitchFamily="18" charset="0"/>
-                            </a:rPr>
-                            <m:t>𝐺</m:t>
-                          </m:r>
-                        </m:e>
-                        <m:sub>
-                          <m:r>
-                            <a:rPr lang="en-US" b="0" i="1" smtClean="0">
-                              <a:latin typeface="Cambria Math" panose="02040503050406030204" pitchFamily="18" charset="0"/>
-                            </a:rPr>
-                            <m:t>𝑡ℎ𝑒𝑟𝑚𝑎𝑙</m:t>
-                          </m:r>
-                        </m:sub>
-                      </m:sSub>
-                      <m:r>
-                        <a:rPr lang="en-US" b="0" i="1" smtClean="0">
-                          <a:latin typeface="Cambria Math" panose="02040503050406030204" pitchFamily="18" charset="0"/>
-                        </a:rPr>
-                        <m:t>∗</m:t>
-                      </m:r>
-                      <m:r>
-                        <m:rPr>
-                          <m:sty m:val="p"/>
-                        </m:rPr>
-                        <a:rPr lang="el-GR" b="0" i="0" smtClean="0">
-                          <a:latin typeface="Cambria Math" panose="02040503050406030204" pitchFamily="18" charset="0"/>
-                        </a:rPr>
-                        <m:t>Δ</m:t>
-                      </m:r>
-                      <m:r>
-                        <m:rPr>
-                          <m:sty m:val="p"/>
-                        </m:rPr>
-                        <a:rPr lang="en-US" b="0" i="0" smtClean="0">
-                          <a:latin typeface="Cambria Math" panose="02040503050406030204" pitchFamily="18" charset="0"/>
-                        </a:rPr>
-                        <m:t>T</m:t>
-                      </m:r>
-                      <m:r>
-                        <a:rPr lang="en-US" b="0" i="0" smtClean="0">
-                          <a:latin typeface="Cambria Math" panose="02040503050406030204" pitchFamily="18" charset="0"/>
-                        </a:rPr>
-                        <m:t> ~ </m:t>
-                      </m:r>
-                      <m:r>
-                        <m:rPr>
-                          <m:sty m:val="p"/>
-                        </m:rPr>
-                        <a:rPr lang="en-US" b="0" i="0" smtClean="0">
-                          <a:latin typeface="Cambria Math" panose="02040503050406030204" pitchFamily="18" charset="0"/>
-                        </a:rPr>
-                        <m:t>I</m:t>
-                      </m:r>
-                      <m:r>
-                        <a:rPr lang="en-US" b="0" i="0" smtClean="0">
-                          <a:latin typeface="Cambria Math" panose="02040503050406030204" pitchFamily="18" charset="0"/>
-                        </a:rPr>
-                        <m:t>=</m:t>
-                      </m:r>
-                      <m:sSub>
-                        <m:sSubPr>
-                          <m:ctrlPr>
-                            <a:rPr lang="en-US" b="0" i="0" smtClean="0">
-                              <a:latin typeface="Cambria Math" panose="02040503050406030204" pitchFamily="18" charset="0"/>
-                            </a:rPr>
-                          </m:ctrlPr>
-                        </m:sSubPr>
-                        <m:e>
-                          <m:r>
-                            <m:rPr>
-                              <m:sty m:val="p"/>
-                            </m:rPr>
-                            <a:rPr lang="en-US" b="0" i="0" smtClean="0">
-                              <a:latin typeface="Cambria Math" panose="02040503050406030204" pitchFamily="18" charset="0"/>
-                            </a:rPr>
-                            <m:t>G</m:t>
-                          </m:r>
-                        </m:e>
-                        <m:sub>
-                          <m:r>
-                            <m:rPr>
-                              <m:sty m:val="p"/>
-                            </m:rPr>
-                            <a:rPr lang="en-US" b="0" i="0" smtClean="0">
-                              <a:latin typeface="Cambria Math" panose="02040503050406030204" pitchFamily="18" charset="0"/>
-                            </a:rPr>
-                            <m:t>electrical</m:t>
-                          </m:r>
-                        </m:sub>
-                      </m:sSub>
-                      <m:r>
-                        <a:rPr lang="en-US" b="0" i="0" smtClean="0">
-                          <a:latin typeface="Cambria Math" panose="02040503050406030204" pitchFamily="18" charset="0"/>
-                        </a:rPr>
-                        <m:t>∗</m:t>
-                      </m:r>
-                      <m:r>
-                        <m:rPr>
-                          <m:sty m:val="p"/>
-                        </m:rPr>
-                        <a:rPr lang="el-GR" b="0" i="0" smtClean="0">
-                          <a:latin typeface="Cambria Math" panose="02040503050406030204" pitchFamily="18" charset="0"/>
-                        </a:rPr>
-                        <m:t>Δ</m:t>
-                      </m:r>
-                      <m:r>
-                        <m:rPr>
-                          <m:sty m:val="p"/>
-                        </m:rPr>
-                        <a:rPr lang="en-US" b="0" i="0" smtClean="0">
-                          <a:latin typeface="Cambria Math" panose="02040503050406030204" pitchFamily="18" charset="0"/>
-                        </a:rPr>
-                        <m:t>V</m:t>
-                      </m:r>
-                    </m:oMath>
-                  </m:oMathPara>
-                </a14:m>
-                <a:endParaRPr lang="en-GR"/>
-              </a:p>
-            </p:txBody>
-          </p:sp>
-        </mc:Choice>
-        <mc:Fallback xmlns="">
-          <p:sp>
-            <p:nvSpPr>
-              <p:cNvPr id="8" name="TextBox 7">
-                <a:extLst>
-                  <a:ext uri="{FF2B5EF4-FFF2-40B4-BE49-F238E27FC236}">
-                    <a16:creationId xmlns:a16="http://schemas.microsoft.com/office/drawing/2014/main" id="{1CCB96BE-9B0D-44CF-5D0B-34216505514B}"/>
-                  </a:ext>
-                </a:extLst>
-              </p:cNvPr>
-              <p:cNvSpPr txBox="1">
-                <a:spLocks noRot="1" noChangeAspect="1" noMove="1" noResize="1" noEditPoints="1" noAdjustHandles="1" noChangeArrowheads="1" noChangeShapeType="1" noTextEdit="1"/>
-              </p:cNvSpPr>
-              <p:nvPr/>
-            </p:nvSpPr>
-            <p:spPr>
-              <a:xfrm>
-                <a:off x="1041568" y="1859078"/>
-                <a:ext cx="4190496" cy="369332"/>
-              </a:xfrm>
-              <a:prstGeom prst="rect">
-                <a:avLst/>
-              </a:prstGeom>
-              <a:blipFill>
-                <a:blip r:embed="rId7"/>
-                <a:stretch>
-                  <a:fillRect b="-8197"/>
-                </a:stretch>
-              </a:blipFill>
-            </p:spPr>
-            <p:txBody>
-              <a:bodyPr/>
-              <a:lstStyle/>
-              <a:p>
-                <a:r>
-                  <a:rPr lang="en-US">
-                    <a:noFill/>
-                  </a:rPr>
-                  <a:t> </a:t>
-                </a:r>
-              </a:p>
-            </p:txBody>
-          </p:sp>
-        </mc:Fallback>
-      </mc:AlternateContent>
     </p:spTree>
     <p:extLst>
       <p:ext uri="{BB962C8B-B14F-4D97-AF65-F5344CB8AC3E}">
@@ -10778,33 +10760,15 @@
                                   </p:childTnLst>
                                 </p:cTn>
                               </p:par>
-                            </p:childTnLst>
-                          </p:cTn>
-                        </p:par>
-                      </p:childTnLst>
-                    </p:cTn>
-                  </p:par>
-                  <p:par>
-                    <p:cTn id="8" fill="hold">
-                      <p:stCondLst>
-                        <p:cond delay="indefinite"/>
-                      </p:stCondLst>
-                      <p:childTnLst>
-                        <p:par>
-                          <p:cTn id="9" fill="hold">
-                            <p:stCondLst>
-                              <p:cond delay="0"/>
-                            </p:stCondLst>
-                            <p:childTnLst>
                               <p:par>
-                                <p:cTn id="10" presetID="10" presetClass="entr" presetSubtype="0" fill="hold" nodeType="clickEffect">
+                                <p:cTn id="8" presetID="10" presetClass="entr" presetSubtype="0" fill="hold" nodeType="withEffect">
                                   <p:stCondLst>
                                     <p:cond delay="0"/>
                                   </p:stCondLst>
                                   <p:childTnLst>
                                     <p:set>
                                       <p:cBhvr>
-                                        <p:cTn id="11" dur="1" fill="hold">
+                                        <p:cTn id="9" dur="1" fill="hold">
                                           <p:stCondLst>
                                             <p:cond delay="0"/>
                                           </p:stCondLst>
@@ -10826,7 +10790,7 @@
                                     </p:set>
                                     <p:animEffect transition="in" filter="fade">
                                       <p:cBhvr>
-                                        <p:cTn id="12" dur="500"/>
+                                        <p:cTn id="10" dur="500"/>
                                         <p:tgtEl>
                                           <p:spTgt spid="3">
                                             <p:txEl>
@@ -10846,26 +10810,26 @@
                     </p:cTn>
                   </p:par>
                   <p:par>
-                    <p:cTn id="13" fill="hold">
+                    <p:cTn id="11" fill="hold">
                       <p:stCondLst>
                         <p:cond delay="indefinite"/>
                       </p:stCondLst>
                       <p:childTnLst>
                         <p:par>
-                          <p:cTn id="14" fill="hold">
+                          <p:cTn id="12" fill="hold">
                             <p:stCondLst>
                               <p:cond delay="0"/>
                             </p:stCondLst>
                             <p:childTnLst>
                               <p:par>
-                                <p:cTn id="15" presetID="10" presetClass="entr" presetSubtype="0" fill="hold" nodeType="clickEffect">
+                                <p:cTn id="13" presetID="10" presetClass="entr" presetSubtype="0" fill="hold" nodeType="clickEffect">
                                   <p:stCondLst>
                                     <p:cond delay="0"/>
                                   </p:stCondLst>
                                   <p:childTnLst>
                                     <p:set>
                                       <p:cBhvr>
-                                        <p:cTn id="16" dur="1" fill="hold">
+                                        <p:cTn id="14" dur="1" fill="hold">
                                           <p:stCondLst>
                                             <p:cond delay="0"/>
                                           </p:stCondLst>
@@ -10887,13 +10851,2430 @@
                                     </p:set>
                                     <p:animEffect transition="in" filter="fade">
                                       <p:cBhvr>
-                                        <p:cTn id="17" dur="500"/>
+                                        <p:cTn id="15" dur="500"/>
                                         <p:tgtEl>
                                           <p:spTgt spid="3">
                                             <p:txEl>
                                               <p:pRg st="3" end="3"/>
                                             </p:txEl>
                                           </p:spTgt>
+                                        </p:tgtEl>
+                                      </p:cBhvr>
+                                    </p:animEffect>
+                                  </p:childTnLst>
+                                </p:cTn>
+                              </p:par>
+                            </p:childTnLst>
+                          </p:cTn>
+                        </p:par>
+                        <p:par>
+                          <p:cTn id="16" fill="hold">
+                            <p:stCondLst>
+                              <p:cond delay="500"/>
+                            </p:stCondLst>
+                            <p:childTnLst>
+                              <p:par>
+                                <p:cTn id="17" presetID="10" presetClass="entr" presetSubtype="0" fill="hold" nodeType="afterEffect">
+                                  <p:stCondLst>
+                                    <p:cond delay="0"/>
+                                  </p:stCondLst>
+                                  <p:childTnLst>
+                                    <p:set>
+                                      <p:cBhvr>
+                                        <p:cTn id="18" dur="1" fill="hold">
+                                          <p:stCondLst>
+                                            <p:cond delay="0"/>
+                                          </p:stCondLst>
+                                        </p:cTn>
+                                        <p:tgtEl>
+                                          <p:spTgt spid="3">
+                                            <p:txEl>
+                                              <p:pRg st="4" end="4"/>
+                                            </p:txEl>
+                                          </p:spTgt>
+                                        </p:tgtEl>
+                                        <p:attrNameLst>
+                                          <p:attrName>style.visibility</p:attrName>
+                                        </p:attrNameLst>
+                                      </p:cBhvr>
+                                      <p:to>
+                                        <p:strVal val="visible"/>
+                                      </p:to>
+                                    </p:set>
+                                    <p:animEffect transition="in" filter="fade">
+                                      <p:cBhvr>
+                                        <p:cTn id="19" dur="500"/>
+                                        <p:tgtEl>
+                                          <p:spTgt spid="3">
+                                            <p:txEl>
+                                              <p:pRg st="4" end="4"/>
+                                            </p:txEl>
+                                          </p:spTgt>
+                                        </p:tgtEl>
+                                      </p:cBhvr>
+                                    </p:animEffect>
+                                  </p:childTnLst>
+                                </p:cTn>
+                              </p:par>
+                              <p:par>
+                                <p:cTn id="20" presetID="10" presetClass="entr" presetSubtype="0" fill="hold" nodeType="withEffect">
+                                  <p:stCondLst>
+                                    <p:cond delay="0"/>
+                                  </p:stCondLst>
+                                  <p:childTnLst>
+                                    <p:set>
+                                      <p:cBhvr>
+                                        <p:cTn id="21" dur="1" fill="hold">
+                                          <p:stCondLst>
+                                            <p:cond delay="0"/>
+                                          </p:stCondLst>
+                                        </p:cTn>
+                                        <p:tgtEl>
+                                          <p:spTgt spid="4"/>
+                                        </p:tgtEl>
+                                        <p:attrNameLst>
+                                          <p:attrName>style.visibility</p:attrName>
+                                        </p:attrNameLst>
+                                      </p:cBhvr>
+                                      <p:to>
+                                        <p:strVal val="visible"/>
+                                      </p:to>
+                                    </p:set>
+                                    <p:animEffect transition="in" filter="fade">
+                                      <p:cBhvr>
+                                        <p:cTn id="22" dur="500"/>
+                                        <p:tgtEl>
+                                          <p:spTgt spid="4"/>
+                                        </p:tgtEl>
+                                      </p:cBhvr>
+                                    </p:animEffect>
+                                  </p:childTnLst>
+                                </p:cTn>
+                              </p:par>
+                            </p:childTnLst>
+                          </p:cTn>
+                        </p:par>
+                        <p:par>
+                          <p:cTn id="23" fill="hold">
+                            <p:stCondLst>
+                              <p:cond delay="1000"/>
+                            </p:stCondLst>
+                            <p:childTnLst>
+                              <p:par>
+                                <p:cTn id="24" presetID="10" presetClass="entr" presetSubtype="0" fill="hold" nodeType="afterEffect">
+                                  <p:stCondLst>
+                                    <p:cond delay="0"/>
+                                  </p:stCondLst>
+                                  <p:childTnLst>
+                                    <p:set>
+                                      <p:cBhvr>
+                                        <p:cTn id="25" dur="1" fill="hold">
+                                          <p:stCondLst>
+                                            <p:cond delay="0"/>
+                                          </p:stCondLst>
+                                        </p:cTn>
+                                        <p:tgtEl>
+                                          <p:spTgt spid="3">
+                                            <p:txEl>
+                                              <p:pRg st="5" end="5"/>
+                                            </p:txEl>
+                                          </p:spTgt>
+                                        </p:tgtEl>
+                                        <p:attrNameLst>
+                                          <p:attrName>style.visibility</p:attrName>
+                                        </p:attrNameLst>
+                                      </p:cBhvr>
+                                      <p:to>
+                                        <p:strVal val="visible"/>
+                                      </p:to>
+                                    </p:set>
+                                    <p:animEffect transition="in" filter="fade">
+                                      <p:cBhvr>
+                                        <p:cTn id="26" dur="500"/>
+                                        <p:tgtEl>
+                                          <p:spTgt spid="3">
+                                            <p:txEl>
+                                              <p:pRg st="5" end="5"/>
+                                            </p:txEl>
+                                          </p:spTgt>
+                                        </p:tgtEl>
+                                      </p:cBhvr>
+                                    </p:animEffect>
+                                  </p:childTnLst>
+                                </p:cTn>
+                              </p:par>
+                              <p:par>
+                                <p:cTn id="27" presetID="10" presetClass="entr" presetSubtype="0" fill="hold" nodeType="withEffect">
+                                  <p:stCondLst>
+                                    <p:cond delay="0"/>
+                                  </p:stCondLst>
+                                  <p:childTnLst>
+                                    <p:set>
+                                      <p:cBhvr>
+                                        <p:cTn id="28" dur="1" fill="hold">
+                                          <p:stCondLst>
+                                            <p:cond delay="0"/>
+                                          </p:stCondLst>
+                                        </p:cTn>
+                                        <p:tgtEl>
+                                          <p:spTgt spid="5"/>
+                                        </p:tgtEl>
+                                        <p:attrNameLst>
+                                          <p:attrName>style.visibility</p:attrName>
+                                        </p:attrNameLst>
+                                      </p:cBhvr>
+                                      <p:to>
+                                        <p:strVal val="visible"/>
+                                      </p:to>
+                                    </p:set>
+                                    <p:animEffect transition="in" filter="fade">
+                                      <p:cBhvr>
+                                        <p:cTn id="29" dur="500"/>
+                                        <p:tgtEl>
+                                          <p:spTgt spid="5"/>
+                                        </p:tgtEl>
+                                      </p:cBhvr>
+                                    </p:animEffect>
+                                  </p:childTnLst>
+                                </p:cTn>
+                              </p:par>
+                            </p:childTnLst>
+                          </p:cTn>
+                        </p:par>
+                        <p:par>
+                          <p:cTn id="30" fill="hold">
+                            <p:stCondLst>
+                              <p:cond delay="1500"/>
+                            </p:stCondLst>
+                            <p:childTnLst>
+                              <p:par>
+                                <p:cTn id="31" presetID="10" presetClass="entr" presetSubtype="0" fill="hold" nodeType="afterEffect">
+                                  <p:stCondLst>
+                                    <p:cond delay="0"/>
+                                  </p:stCondLst>
+                                  <p:childTnLst>
+                                    <p:set>
+                                      <p:cBhvr>
+                                        <p:cTn id="32" dur="1" fill="hold">
+                                          <p:stCondLst>
+                                            <p:cond delay="0"/>
+                                          </p:stCondLst>
+                                        </p:cTn>
+                                        <p:tgtEl>
+                                          <p:spTgt spid="3">
+                                            <p:txEl>
+                                              <p:pRg st="6" end="6"/>
+                                            </p:txEl>
+                                          </p:spTgt>
+                                        </p:tgtEl>
+                                        <p:attrNameLst>
+                                          <p:attrName>style.visibility</p:attrName>
+                                        </p:attrNameLst>
+                                      </p:cBhvr>
+                                      <p:to>
+                                        <p:strVal val="visible"/>
+                                      </p:to>
+                                    </p:set>
+                                    <p:animEffect transition="in" filter="fade">
+                                      <p:cBhvr>
+                                        <p:cTn id="33" dur="500"/>
+                                        <p:tgtEl>
+                                          <p:spTgt spid="3">
+                                            <p:txEl>
+                                              <p:pRg st="6" end="6"/>
+                                            </p:txEl>
+                                          </p:spTgt>
+                                        </p:tgtEl>
+                                      </p:cBhvr>
+                                    </p:animEffect>
+                                  </p:childTnLst>
+                                </p:cTn>
+                              </p:par>
+                              <p:par>
+                                <p:cTn id="34" presetID="10" presetClass="entr" presetSubtype="0" fill="hold" nodeType="withEffect">
+                                  <p:stCondLst>
+                                    <p:cond delay="0"/>
+                                  </p:stCondLst>
+                                  <p:childTnLst>
+                                    <p:set>
+                                      <p:cBhvr>
+                                        <p:cTn id="35" dur="1" fill="hold">
+                                          <p:stCondLst>
+                                            <p:cond delay="0"/>
+                                          </p:stCondLst>
+                                        </p:cTn>
+                                        <p:tgtEl>
+                                          <p:spTgt spid="6"/>
+                                        </p:tgtEl>
+                                        <p:attrNameLst>
+                                          <p:attrName>style.visibility</p:attrName>
+                                        </p:attrNameLst>
+                                      </p:cBhvr>
+                                      <p:to>
+                                        <p:strVal val="visible"/>
+                                      </p:to>
+                                    </p:set>
+                                    <p:animEffect transition="in" filter="fade">
+                                      <p:cBhvr>
+                                        <p:cTn id="36" dur="500"/>
+                                        <p:tgtEl>
+                                          <p:spTgt spid="6"/>
+                                        </p:tgtEl>
+                                      </p:cBhvr>
+                                    </p:animEffect>
+                                  </p:childTnLst>
+                                </p:cTn>
+                              </p:par>
+                            </p:childTnLst>
+                          </p:cTn>
+                        </p:par>
+                        <p:par>
+                          <p:cTn id="37" fill="hold">
+                            <p:stCondLst>
+                              <p:cond delay="2000"/>
+                            </p:stCondLst>
+                            <p:childTnLst>
+                              <p:par>
+                                <p:cTn id="38" presetID="10" presetClass="entr" presetSubtype="0" fill="hold" nodeType="afterEffect">
+                                  <p:stCondLst>
+                                    <p:cond delay="0"/>
+                                  </p:stCondLst>
+                                  <p:childTnLst>
+                                    <p:set>
+                                      <p:cBhvr>
+                                        <p:cTn id="39" dur="1" fill="hold">
+                                          <p:stCondLst>
+                                            <p:cond delay="0"/>
+                                          </p:stCondLst>
+                                        </p:cTn>
+                                        <p:tgtEl>
+                                          <p:spTgt spid="3">
+                                            <p:txEl>
+                                              <p:pRg st="7" end="7"/>
+                                            </p:txEl>
+                                          </p:spTgt>
+                                        </p:tgtEl>
+                                        <p:attrNameLst>
+                                          <p:attrName>style.visibility</p:attrName>
+                                        </p:attrNameLst>
+                                      </p:cBhvr>
+                                      <p:to>
+                                        <p:strVal val="visible"/>
+                                      </p:to>
+                                    </p:set>
+                                    <p:animEffect transition="in" filter="fade">
+                                      <p:cBhvr>
+                                        <p:cTn id="40" dur="500"/>
+                                        <p:tgtEl>
+                                          <p:spTgt spid="3">
+                                            <p:txEl>
+                                              <p:pRg st="7" end="7"/>
+                                            </p:txEl>
+                                          </p:spTgt>
+                                        </p:tgtEl>
+                                      </p:cBhvr>
+                                    </p:animEffect>
+                                  </p:childTnLst>
+                                </p:cTn>
+                              </p:par>
+                              <p:par>
+                                <p:cTn id="41" presetID="10" presetClass="entr" presetSubtype="0" fill="hold" nodeType="withEffect">
+                                  <p:stCondLst>
+                                    <p:cond delay="0"/>
+                                  </p:stCondLst>
+                                  <p:childTnLst>
+                                    <p:set>
+                                      <p:cBhvr>
+                                        <p:cTn id="42" dur="1" fill="hold">
+                                          <p:stCondLst>
+                                            <p:cond delay="0"/>
+                                          </p:stCondLst>
+                                        </p:cTn>
+                                        <p:tgtEl>
+                                          <p:spTgt spid="7"/>
+                                        </p:tgtEl>
+                                        <p:attrNameLst>
+                                          <p:attrName>style.visibility</p:attrName>
+                                        </p:attrNameLst>
+                                      </p:cBhvr>
+                                      <p:to>
+                                        <p:strVal val="visible"/>
+                                      </p:to>
+                                    </p:set>
+                                    <p:animEffect transition="in" filter="fade">
+                                      <p:cBhvr>
+                                        <p:cTn id="43" dur="500"/>
+                                        <p:tgtEl>
+                                          <p:spTgt spid="7"/>
+                                        </p:tgtEl>
+                                      </p:cBhvr>
+                                    </p:animEffect>
+                                  </p:childTnLst>
+                                </p:cTn>
+                              </p:par>
+                            </p:childTnLst>
+                          </p:cTn>
+                        </p:par>
+                      </p:childTnLst>
+                    </p:cTn>
+                  </p:par>
+                </p:childTnLst>
+              </p:cTn>
+              <p:prevCondLst>
+                <p:cond evt="onPrev" delay="0">
+                  <p:tgtEl>
+                    <p:sldTgt/>
+                  </p:tgtEl>
+                </p:cond>
+              </p:prevCondLst>
+              <p:nextCondLst>
+                <p:cond evt="onNext" delay="0">
+                  <p:tgtEl>
+                    <p:sldTgt/>
+                  </p:tgtEl>
+                </p:cond>
+              </p:nextCondLst>
+            </p:seq>
+          </p:childTnLst>
+        </p:cTn>
+      </p:par>
+    </p:tnLst>
+  </p:timing>
+</p:sld>
+</file>
+
+<file path=ppt/slides/slide4.xml><?xml version="1.0" encoding="utf-8"?>
+<p:sld xmlns:a="http://schemas.openxmlformats.org/drawingml/2006/main" xmlns:r="http://schemas.openxmlformats.org/officeDocument/2006/relationships" xmlns:p="http://schemas.openxmlformats.org/presentationml/2006/main">
+  <p:cSld>
+    <p:spTree>
+      <p:nvGrpSpPr>
+        <p:cNvPr id="1" name=""/>
+        <p:cNvGrpSpPr/>
+        <p:nvPr/>
+      </p:nvGrpSpPr>
+      <p:grpSpPr>
+        <a:xfrm>
+          <a:off x="0" y="0"/>
+          <a:ext cx="0" cy="0"/>
+          <a:chOff x="0" y="0"/>
+          <a:chExt cx="0" cy="0"/>
+        </a:xfrm>
+      </p:grpSpPr>
+      <p:sp>
+        <p:nvSpPr>
+          <p:cNvPr id="2" name="Title 1">
+            <a:extLst>
+              <a:ext uri="{FF2B5EF4-FFF2-40B4-BE49-F238E27FC236}">
+                <a16:creationId xmlns:a16="http://schemas.microsoft.com/office/drawing/2014/main" id="{4B7CA192-CF13-478A-0904-6D17AA92D953}"/>
+              </a:ext>
+            </a:extLst>
+          </p:cNvPr>
+          <p:cNvSpPr>
+            <a:spLocks noGrp="1"/>
+          </p:cNvSpPr>
+          <p:nvPr>
+            <p:ph type="title"/>
+          </p:nvPr>
+        </p:nvSpPr>
+        <p:spPr/>
+        <p:txBody>
+          <a:bodyPr/>
+          <a:lstStyle/>
+          <a:p>
+            <a:r>
+              <a:rPr lang="en-GR" dirty="0"/>
+              <a:t>Equations &amp; Space State</a:t>
+            </a:r>
+          </a:p>
+        </p:txBody>
+      </p:sp>
+      <mc:AlternateContent xmlns:mc="http://schemas.openxmlformats.org/markup-compatibility/2006">
+        <mc:Choice xmlns:a14="http://schemas.microsoft.com/office/drawing/2010/main" Requires="a14">
+          <p:sp>
+            <p:nvSpPr>
+              <p:cNvPr id="3" name="TextBox 2">
+                <a:extLst>
+                  <a:ext uri="{FF2B5EF4-FFF2-40B4-BE49-F238E27FC236}">
+                    <a16:creationId xmlns:a16="http://schemas.microsoft.com/office/drawing/2014/main" id="{1B1371C7-F727-7B3C-FB8A-5E8C7641E149}"/>
+                  </a:ext>
+                </a:extLst>
+              </p:cNvPr>
+              <p:cNvSpPr txBox="1"/>
+              <p:nvPr/>
+            </p:nvSpPr>
+            <p:spPr>
+              <a:xfrm>
+                <a:off x="694944" y="1828800"/>
+                <a:ext cx="8034528" cy="391902"/>
+              </a:xfrm>
+              <a:prstGeom prst="rect">
+                <a:avLst/>
+              </a:prstGeom>
+              <a:noFill/>
+            </p:spPr>
+            <p:txBody>
+              <a:bodyPr wrap="square" rtlCol="0">
+                <a:spAutoFit/>
+              </a:bodyPr>
+              <a:lstStyle/>
+              <a:p>
+                <a14:m>
+                  <m:oMath xmlns:m="http://schemas.openxmlformats.org/officeDocument/2006/math">
+                    <m:sSub>
+                      <m:sSubPr>
+                        <m:ctrlPr>
+                          <a:rPr lang="en-US" b="0" i="1" smtClean="0">
+                            <a:latin typeface="Cambria Math" panose="02040503050406030204" pitchFamily="18" charset="0"/>
+                          </a:rPr>
+                        </m:ctrlPr>
+                      </m:sSubPr>
+                      <m:e>
+                        <m:r>
+                          <a:rPr lang="en-US" b="0" i="1" smtClean="0">
+                            <a:latin typeface="Cambria Math" panose="02040503050406030204" pitchFamily="18" charset="0"/>
+                          </a:rPr>
+                          <m:t>𝐶</m:t>
+                        </m:r>
+                      </m:e>
+                      <m:sub>
+                        <m:r>
+                          <a:rPr lang="en-US" b="0" i="1" smtClean="0">
+                            <a:latin typeface="Cambria Math" panose="02040503050406030204" pitchFamily="18" charset="0"/>
+                          </a:rPr>
+                          <m:t>𝑖</m:t>
+                        </m:r>
+                      </m:sub>
+                    </m:sSub>
+                    <m:sSub>
+                      <m:sSubPr>
+                        <m:ctrlPr>
+                          <a:rPr lang="el-GR" b="0" i="1" smtClean="0">
+                            <a:latin typeface="Cambria Math" panose="02040503050406030204" pitchFamily="18" charset="0"/>
+                          </a:rPr>
+                        </m:ctrlPr>
+                      </m:sSubPr>
+                      <m:e>
+                        <m:r>
+                          <a:rPr lang="el-GR" b="0" i="1" smtClean="0">
+                            <a:latin typeface="Cambria Math" panose="02040503050406030204" pitchFamily="18" charset="0"/>
+                          </a:rPr>
+                          <m:t>𝜃</m:t>
+                        </m:r>
+                      </m:e>
+                      <m:sub>
+                        <m:r>
+                          <a:rPr lang="en-US" b="0" i="1" smtClean="0">
+                            <a:latin typeface="Cambria Math" panose="02040503050406030204" pitchFamily="18" charset="0"/>
+                          </a:rPr>
+                          <m:t>𝑖</m:t>
+                        </m:r>
+                      </m:sub>
+                    </m:sSub>
+                    <m:r>
+                      <a:rPr lang="en-US" b="0" i="1" smtClean="0">
+                        <a:latin typeface="Cambria Math" panose="02040503050406030204" pitchFamily="18" charset="0"/>
+                      </a:rPr>
+                      <m:t>=</m:t>
+                    </m:r>
+                    <m:d>
+                      <m:dPr>
+                        <m:ctrlPr>
+                          <a:rPr lang="en-US" b="0" i="1" smtClean="0">
+                            <a:latin typeface="Cambria Math" panose="02040503050406030204" pitchFamily="18" charset="0"/>
+                          </a:rPr>
+                        </m:ctrlPr>
+                      </m:dPr>
+                      <m:e>
+                        <m:r>
+                          <a:rPr lang="en-US" b="0" i="1" smtClean="0">
+                            <a:latin typeface="Cambria Math" panose="02040503050406030204" pitchFamily="18" charset="0"/>
+                          </a:rPr>
+                          <m:t>1−</m:t>
+                        </m:r>
+                        <m:r>
+                          <a:rPr lang="en-US" b="0" i="1" smtClean="0">
+                            <a:latin typeface="Cambria Math" panose="02040503050406030204" pitchFamily="18" charset="0"/>
+                          </a:rPr>
+                          <m:t>𝑎</m:t>
+                        </m:r>
+                      </m:e>
+                    </m:d>
+                    <m:sSub>
+                      <m:sSubPr>
+                        <m:ctrlPr>
+                          <a:rPr lang="en-US" b="0" i="1" smtClean="0">
+                            <a:latin typeface="Cambria Math" panose="02040503050406030204" pitchFamily="18" charset="0"/>
+                          </a:rPr>
+                        </m:ctrlPr>
+                      </m:sSubPr>
+                      <m:e>
+                        <m:r>
+                          <a:rPr lang="en-US" b="0" i="1" smtClean="0">
+                            <a:latin typeface="Cambria Math" panose="02040503050406030204" pitchFamily="18" charset="0"/>
+                          </a:rPr>
+                          <m:t>𝑃</m:t>
+                        </m:r>
+                      </m:e>
+                      <m:sub>
+                        <m:r>
+                          <a:rPr lang="en-US" b="0" i="1" smtClean="0">
+                            <a:latin typeface="Cambria Math" panose="02040503050406030204" pitchFamily="18" charset="0"/>
+                          </a:rPr>
+                          <m:t>𝐷𝑈𝑇</m:t>
+                        </m:r>
+                      </m:sub>
+                    </m:sSub>
+                    <m:r>
+                      <a:rPr lang="en-US" b="0" i="1" smtClean="0">
+                        <a:latin typeface="Cambria Math" panose="02040503050406030204" pitchFamily="18" charset="0"/>
+                      </a:rPr>
+                      <m:t>+</m:t>
+                    </m:r>
+                    <m:sSub>
+                      <m:sSubPr>
+                        <m:ctrlPr>
+                          <a:rPr lang="en-US" b="0" i="1" smtClean="0">
+                            <a:latin typeface="Cambria Math" panose="02040503050406030204" pitchFamily="18" charset="0"/>
+                          </a:rPr>
+                        </m:ctrlPr>
+                      </m:sSubPr>
+                      <m:e>
+                        <m:r>
+                          <a:rPr lang="en-US" b="0" i="1" smtClean="0">
+                            <a:latin typeface="Cambria Math" panose="02040503050406030204" pitchFamily="18" charset="0"/>
+                          </a:rPr>
+                          <m:t>𝑃</m:t>
+                        </m:r>
+                      </m:e>
+                      <m:sub>
+                        <m:r>
+                          <a:rPr lang="en-US" b="0" i="1" smtClean="0">
+                            <a:latin typeface="Cambria Math" panose="02040503050406030204" pitchFamily="18" charset="0"/>
+                          </a:rPr>
+                          <m:t>𝑎𝑢𝑥</m:t>
+                        </m:r>
+                      </m:sub>
+                    </m:sSub>
+                    <m:r>
+                      <a:rPr lang="en-US" b="0" i="1" smtClean="0">
+                        <a:latin typeface="Cambria Math" panose="02040503050406030204" pitchFamily="18" charset="0"/>
+                      </a:rPr>
+                      <m:t>−</m:t>
+                    </m:r>
+                    <m:r>
+                      <a:rPr lang="en-US" b="0" i="1" smtClean="0">
+                        <a:latin typeface="Cambria Math" panose="02040503050406030204" pitchFamily="18" charset="0"/>
+                      </a:rPr>
+                      <m:t>𝑈</m:t>
+                    </m:r>
+                    <m:sSub>
+                      <m:sSubPr>
+                        <m:ctrlPr>
+                          <a:rPr lang="en-US" b="0" i="1" smtClean="0">
+                            <a:latin typeface="Cambria Math" panose="02040503050406030204" pitchFamily="18" charset="0"/>
+                          </a:rPr>
+                        </m:ctrlPr>
+                      </m:sSubPr>
+                      <m:e>
+                        <m:r>
+                          <a:rPr lang="en-US" b="0" i="1" smtClean="0">
+                            <a:latin typeface="Cambria Math" panose="02040503050406030204" pitchFamily="18" charset="0"/>
+                          </a:rPr>
+                          <m:t>𝐴</m:t>
+                        </m:r>
+                      </m:e>
+                      <m:sub>
+                        <m:r>
+                          <a:rPr lang="en-US" b="0" i="1" smtClean="0">
+                            <a:latin typeface="Cambria Math" panose="02040503050406030204" pitchFamily="18" charset="0"/>
+                          </a:rPr>
+                          <m:t>𝑟𝑎𝑑</m:t>
+                        </m:r>
+                      </m:sub>
+                    </m:sSub>
+                    <m:d>
+                      <m:dPr>
+                        <m:ctrlPr>
+                          <a:rPr lang="en-US" b="0" i="1" smtClean="0">
+                            <a:latin typeface="Cambria Math" panose="02040503050406030204" pitchFamily="18" charset="0"/>
+                          </a:rPr>
+                        </m:ctrlPr>
+                      </m:dPr>
+                      <m:e>
+                        <m:sSub>
+                          <m:sSubPr>
+                            <m:ctrlPr>
+                              <a:rPr lang="el-GR" b="0" i="1" smtClean="0">
+                                <a:latin typeface="Cambria Math" panose="02040503050406030204" pitchFamily="18" charset="0"/>
+                              </a:rPr>
+                            </m:ctrlPr>
+                          </m:sSubPr>
+                          <m:e>
+                            <m:r>
+                              <a:rPr lang="el-GR" b="0" i="1" smtClean="0">
+                                <a:latin typeface="Cambria Math" panose="02040503050406030204" pitchFamily="18" charset="0"/>
+                              </a:rPr>
+                              <m:t>𝜃</m:t>
+                            </m:r>
+                          </m:e>
+                          <m:sub>
+                            <m:r>
+                              <a:rPr lang="en-US" b="0" i="1" smtClean="0">
+                                <a:latin typeface="Cambria Math" panose="02040503050406030204" pitchFamily="18" charset="0"/>
+                              </a:rPr>
+                              <m:t>𝑖</m:t>
+                            </m:r>
+                          </m:sub>
+                        </m:sSub>
+                        <m:r>
+                          <a:rPr lang="en-US" b="0" i="1" smtClean="0">
+                            <a:latin typeface="Cambria Math" panose="02040503050406030204" pitchFamily="18" charset="0"/>
+                          </a:rPr>
+                          <m:t>−</m:t>
+                        </m:r>
+                        <m:sSub>
+                          <m:sSubPr>
+                            <m:ctrlPr>
+                              <a:rPr lang="el-GR" b="0" i="1" smtClean="0">
+                                <a:latin typeface="Cambria Math" panose="02040503050406030204" pitchFamily="18" charset="0"/>
+                              </a:rPr>
+                            </m:ctrlPr>
+                          </m:sSubPr>
+                          <m:e>
+                            <m:r>
+                              <a:rPr lang="el-GR" b="0" i="1" smtClean="0">
+                                <a:latin typeface="Cambria Math" panose="02040503050406030204" pitchFamily="18" charset="0"/>
+                              </a:rPr>
+                              <m:t>𝜃</m:t>
+                            </m:r>
+                          </m:e>
+                          <m:sub>
+                            <m:r>
+                              <a:rPr lang="en-US" b="0" i="1" smtClean="0">
+                                <a:latin typeface="Cambria Math" panose="02040503050406030204" pitchFamily="18" charset="0"/>
+                              </a:rPr>
+                              <m:t>𝑤</m:t>
+                            </m:r>
+                          </m:sub>
+                        </m:sSub>
+                      </m:e>
+                    </m:d>
+                    <m:r>
+                      <a:rPr lang="en-US" b="0" i="1" smtClean="0">
+                        <a:latin typeface="Cambria Math" panose="02040503050406030204" pitchFamily="18" charset="0"/>
+                      </a:rPr>
+                      <m:t>−</m:t>
+                    </m:r>
+                    <m:sSub>
+                      <m:sSubPr>
+                        <m:ctrlPr>
+                          <a:rPr lang="en-US" b="0" i="1" smtClean="0">
+                            <a:latin typeface="Cambria Math" panose="02040503050406030204" pitchFamily="18" charset="0"/>
+                          </a:rPr>
+                        </m:ctrlPr>
+                      </m:sSubPr>
+                      <m:e>
+                        <m:r>
+                          <a:rPr lang="en-US" b="0" i="1" smtClean="0">
+                            <a:latin typeface="Cambria Math" panose="02040503050406030204" pitchFamily="18" charset="0"/>
+                          </a:rPr>
+                          <m:t>𝐺</m:t>
+                        </m:r>
+                      </m:e>
+                      <m:sub>
+                        <m:r>
+                          <a:rPr lang="en-US" b="0" i="1" smtClean="0">
+                            <a:latin typeface="Cambria Math" panose="02040503050406030204" pitchFamily="18" charset="0"/>
+                          </a:rPr>
+                          <m:t>𝑔𝑎𝑝</m:t>
+                        </m:r>
+                      </m:sub>
+                    </m:sSub>
+                    <m:d>
+                      <m:dPr>
+                        <m:ctrlPr>
+                          <a:rPr lang="en-US" b="0" i="1" smtClean="0">
+                            <a:latin typeface="Cambria Math" panose="02040503050406030204" pitchFamily="18" charset="0"/>
+                          </a:rPr>
+                        </m:ctrlPr>
+                      </m:dPr>
+                      <m:e>
+                        <m:sSub>
+                          <m:sSubPr>
+                            <m:ctrlPr>
+                              <a:rPr lang="el-GR" b="0" i="1" smtClean="0">
+                                <a:latin typeface="Cambria Math" panose="02040503050406030204" pitchFamily="18" charset="0"/>
+                              </a:rPr>
+                            </m:ctrlPr>
+                          </m:sSubPr>
+                          <m:e>
+                            <m:r>
+                              <a:rPr lang="el-GR" b="0" i="1" smtClean="0">
+                                <a:latin typeface="Cambria Math" panose="02040503050406030204" pitchFamily="18" charset="0"/>
+                              </a:rPr>
+                              <m:t>𝜃</m:t>
+                            </m:r>
+                          </m:e>
+                          <m:sub>
+                            <m:r>
+                              <a:rPr lang="en-US" b="0" i="1" smtClean="0">
+                                <a:latin typeface="Cambria Math" panose="02040503050406030204" pitchFamily="18" charset="0"/>
+                              </a:rPr>
+                              <m:t>𝑖</m:t>
+                            </m:r>
+                          </m:sub>
+                        </m:sSub>
+                        <m:r>
+                          <a:rPr lang="en-US" b="0" i="1" smtClean="0">
+                            <a:latin typeface="Cambria Math" panose="02040503050406030204" pitchFamily="18" charset="0"/>
+                          </a:rPr>
+                          <m:t>−</m:t>
+                        </m:r>
+                        <m:sSub>
+                          <m:sSubPr>
+                            <m:ctrlPr>
+                              <a:rPr lang="el-GR" b="0" i="1" smtClean="0">
+                                <a:latin typeface="Cambria Math" panose="02040503050406030204" pitchFamily="18" charset="0"/>
+                              </a:rPr>
+                            </m:ctrlPr>
+                          </m:sSubPr>
+                          <m:e>
+                            <m:r>
+                              <a:rPr lang="el-GR" b="0" i="1" smtClean="0">
+                                <a:latin typeface="Cambria Math" panose="02040503050406030204" pitchFamily="18" charset="0"/>
+                              </a:rPr>
+                              <m:t>𝜃</m:t>
+                            </m:r>
+                          </m:e>
+                          <m:sub>
+                            <m:r>
+                              <a:rPr lang="en-US" b="0" i="1" smtClean="0">
+                                <a:latin typeface="Cambria Math" panose="02040503050406030204" pitchFamily="18" charset="0"/>
+                              </a:rPr>
+                              <m:t>𝑒</m:t>
+                            </m:r>
+                          </m:sub>
+                        </m:sSub>
+                      </m:e>
+                    </m:d>
+                    <m:r>
+                      <a:rPr lang="en-US" b="0" i="1" smtClean="0">
+                        <a:latin typeface="Cambria Math" panose="02040503050406030204" pitchFamily="18" charset="0"/>
+                      </a:rPr>
+                      <m:t>−</m:t>
+                    </m:r>
+                    <m:sSub>
+                      <m:sSubPr>
+                        <m:ctrlPr>
+                          <a:rPr lang="en-US" b="0" i="1" smtClean="0">
+                            <a:latin typeface="Cambria Math" panose="02040503050406030204" pitchFamily="18" charset="0"/>
+                          </a:rPr>
+                        </m:ctrlPr>
+                      </m:sSubPr>
+                      <m:e>
+                        <m:r>
+                          <a:rPr lang="en-US" b="0" i="1" smtClean="0">
+                            <a:latin typeface="Cambria Math" panose="02040503050406030204" pitchFamily="18" charset="0"/>
+                          </a:rPr>
+                          <m:t>𝐶</m:t>
+                        </m:r>
+                      </m:e>
+                      <m:sub>
+                        <m:r>
+                          <a:rPr lang="en-US" b="0" i="1" smtClean="0">
+                            <a:latin typeface="Cambria Math" panose="02040503050406030204" pitchFamily="18" charset="0"/>
+                          </a:rPr>
+                          <m:t>𝑖</m:t>
+                        </m:r>
+                      </m:sub>
+                    </m:sSub>
+                    <m:sSubSup>
+                      <m:sSubSupPr>
+                        <m:ctrlPr>
+                          <a:rPr lang="en-US" b="0" i="1" smtClean="0">
+                            <a:latin typeface="Cambria Math" panose="02040503050406030204" pitchFamily="18" charset="0"/>
+                          </a:rPr>
+                        </m:ctrlPr>
+                      </m:sSubSupPr>
+                      <m:e>
+                        <m:r>
+                          <a:rPr lang="en-US" b="0" i="1" smtClean="0">
+                            <a:latin typeface="Cambria Math" panose="02040503050406030204" pitchFamily="18" charset="0"/>
+                          </a:rPr>
+                          <m:t>𝑇</m:t>
+                        </m:r>
+                      </m:e>
+                      <m:sub>
+                        <m:r>
+                          <a:rPr lang="en-US" b="0" i="1" smtClean="0">
+                            <a:latin typeface="Cambria Math" panose="02040503050406030204" pitchFamily="18" charset="0"/>
+                          </a:rPr>
+                          <m:t>𝑎</m:t>
+                        </m:r>
+                      </m:sub>
+                      <m:sup>
+                        <m:r>
+                          <a:rPr lang="en-US" b="0" i="1" smtClean="0">
+                            <a:latin typeface="Cambria Math" panose="02040503050406030204" pitchFamily="18" charset="0"/>
+                          </a:rPr>
+                          <m:t>′</m:t>
+                        </m:r>
+                      </m:sup>
+                    </m:sSubSup>
+                  </m:oMath>
+                </a14:m>
+                <a:r>
+                  <a:rPr lang="en-GR" dirty="0"/>
+                  <a:t> 	(air)</a:t>
+                </a:r>
+              </a:p>
+            </p:txBody>
+          </p:sp>
+        </mc:Choice>
+        <mc:Fallback>
+          <p:sp>
+            <p:nvSpPr>
+              <p:cNvPr id="3" name="TextBox 2">
+                <a:extLst>
+                  <a:ext uri="{FF2B5EF4-FFF2-40B4-BE49-F238E27FC236}">
+                    <a16:creationId xmlns:a16="http://schemas.microsoft.com/office/drawing/2014/main" id="{1B1371C7-F727-7B3C-FB8A-5E8C7641E149}"/>
+                  </a:ext>
+                </a:extLst>
+              </p:cNvPr>
+              <p:cNvSpPr txBox="1">
+                <a:spLocks noRot="1" noChangeAspect="1" noMove="1" noResize="1" noEditPoints="1" noAdjustHandles="1" noChangeArrowheads="1" noChangeShapeType="1" noTextEdit="1"/>
+              </p:cNvSpPr>
+              <p:nvPr/>
+            </p:nvSpPr>
+            <p:spPr>
+              <a:xfrm>
+                <a:off x="694944" y="1828800"/>
+                <a:ext cx="8034528" cy="391902"/>
+              </a:xfrm>
+              <a:prstGeom prst="rect">
+                <a:avLst/>
+              </a:prstGeom>
+              <a:blipFill>
+                <a:blip r:embed="rId2"/>
+                <a:stretch>
+                  <a:fillRect t="-6452" b="-19355"/>
+                </a:stretch>
+              </a:blipFill>
+            </p:spPr>
+            <p:txBody>
+              <a:bodyPr/>
+              <a:lstStyle/>
+              <a:p>
+                <a:r>
+                  <a:rPr lang="en-GR">
+                    <a:noFill/>
+                  </a:rPr>
+                  <a:t> </a:t>
+                </a:r>
+              </a:p>
+            </p:txBody>
+          </p:sp>
+        </mc:Fallback>
+      </mc:AlternateContent>
+      <mc:AlternateContent xmlns:mc="http://schemas.openxmlformats.org/markup-compatibility/2006">
+        <mc:Choice xmlns:a14="http://schemas.microsoft.com/office/drawing/2010/main" Requires="a14">
+          <p:sp>
+            <p:nvSpPr>
+              <p:cNvPr id="4" name="TextBox 3">
+                <a:extLst>
+                  <a:ext uri="{FF2B5EF4-FFF2-40B4-BE49-F238E27FC236}">
+                    <a16:creationId xmlns:a16="http://schemas.microsoft.com/office/drawing/2014/main" id="{862437C6-6506-187F-874C-9F4F0E78FEE4}"/>
+                  </a:ext>
+                </a:extLst>
+              </p:cNvPr>
+              <p:cNvSpPr txBox="1"/>
+              <p:nvPr/>
+            </p:nvSpPr>
+            <p:spPr>
+              <a:xfrm>
+                <a:off x="790192" y="2462459"/>
+                <a:ext cx="8963406" cy="298415"/>
+              </a:xfrm>
+              <a:prstGeom prst="rect">
+                <a:avLst/>
+              </a:prstGeom>
+              <a:noFill/>
+            </p:spPr>
+            <p:txBody>
+              <a:bodyPr wrap="square" lIns="0" tIns="0" rIns="0" bIns="0" rtlCol="0">
+                <a:spAutoFit/>
+              </a:bodyPr>
+              <a:lstStyle/>
+              <a:p>
+                <a14:m>
+                  <m:oMath xmlns:m="http://schemas.openxmlformats.org/officeDocument/2006/math">
+                    <m:sSub>
+                      <m:sSubPr>
+                        <m:ctrlPr>
+                          <a:rPr lang="en-US" b="0" i="1" smtClean="0">
+                            <a:latin typeface="Cambria Math" panose="02040503050406030204" pitchFamily="18" charset="0"/>
+                          </a:rPr>
+                        </m:ctrlPr>
+                      </m:sSubPr>
+                      <m:e>
+                        <m:r>
+                          <a:rPr lang="en-US" b="0" i="1" smtClean="0">
+                            <a:latin typeface="Cambria Math" panose="02040503050406030204" pitchFamily="18" charset="0"/>
+                          </a:rPr>
+                          <m:t>𝐶</m:t>
+                        </m:r>
+                      </m:e>
+                      <m:sub>
+                        <m:r>
+                          <a:rPr lang="en-US" b="0" i="1" smtClean="0">
+                            <a:latin typeface="Cambria Math" panose="02040503050406030204" pitchFamily="18" charset="0"/>
+                          </a:rPr>
+                          <m:t>𝑤</m:t>
+                        </m:r>
+                      </m:sub>
+                    </m:sSub>
+                    <m:sSubSup>
+                      <m:sSubSupPr>
+                        <m:ctrlPr>
+                          <a:rPr lang="el-GR" b="0" i="1" smtClean="0">
+                            <a:latin typeface="Cambria Math" panose="02040503050406030204" pitchFamily="18" charset="0"/>
+                          </a:rPr>
+                        </m:ctrlPr>
+                      </m:sSubSupPr>
+                      <m:e>
+                        <m:r>
+                          <a:rPr lang="el-GR" b="0" i="1" smtClean="0">
+                            <a:latin typeface="Cambria Math" panose="02040503050406030204" pitchFamily="18" charset="0"/>
+                          </a:rPr>
+                          <m:t>𝜃</m:t>
+                        </m:r>
+                      </m:e>
+                      <m:sub>
+                        <m:r>
+                          <a:rPr lang="en-US" b="0" i="1" smtClean="0">
+                            <a:latin typeface="Cambria Math" panose="02040503050406030204" pitchFamily="18" charset="0"/>
+                          </a:rPr>
+                          <m:t>𝑤</m:t>
+                        </m:r>
+                      </m:sub>
+                      <m:sup>
+                        <m:r>
+                          <a:rPr lang="en-US" b="0" i="1" smtClean="0">
+                            <a:latin typeface="Cambria Math" panose="02040503050406030204" pitchFamily="18" charset="0"/>
+                          </a:rPr>
+                          <m:t>′</m:t>
+                        </m:r>
+                      </m:sup>
+                    </m:sSubSup>
+                    <m:r>
+                      <a:rPr lang="en-US" b="0" i="1" smtClean="0">
+                        <a:latin typeface="Cambria Math" panose="02040503050406030204" pitchFamily="18" charset="0"/>
+                      </a:rPr>
+                      <m:t>=</m:t>
+                    </m:r>
+                    <m:r>
+                      <a:rPr lang="en-US" b="0" i="1" smtClean="0">
+                        <a:latin typeface="Cambria Math" panose="02040503050406030204" pitchFamily="18" charset="0"/>
+                      </a:rPr>
+                      <m:t>𝑎</m:t>
+                    </m:r>
+                    <m:sSub>
+                      <m:sSubPr>
+                        <m:ctrlPr>
+                          <a:rPr lang="en-US" b="0" i="1" smtClean="0">
+                            <a:latin typeface="Cambria Math" panose="02040503050406030204" pitchFamily="18" charset="0"/>
+                          </a:rPr>
+                        </m:ctrlPr>
+                      </m:sSubPr>
+                      <m:e>
+                        <m:r>
+                          <a:rPr lang="en-US" b="0" i="1" smtClean="0">
+                            <a:latin typeface="Cambria Math" panose="02040503050406030204" pitchFamily="18" charset="0"/>
+                          </a:rPr>
+                          <m:t>𝑃</m:t>
+                        </m:r>
+                      </m:e>
+                      <m:sub>
+                        <m:r>
+                          <a:rPr lang="en-US" b="0" i="1" smtClean="0">
+                            <a:latin typeface="Cambria Math" panose="02040503050406030204" pitchFamily="18" charset="0"/>
+                          </a:rPr>
+                          <m:t>𝐷𝑈𝑇</m:t>
+                        </m:r>
+                      </m:sub>
+                    </m:sSub>
+                    <m:r>
+                      <a:rPr lang="en-US" b="0" i="1" smtClean="0">
+                        <a:latin typeface="Cambria Math" panose="02040503050406030204" pitchFamily="18" charset="0"/>
+                      </a:rPr>
+                      <m:t>+</m:t>
+                    </m:r>
+                    <m:r>
+                      <a:rPr lang="en-US" b="0" i="1" smtClean="0">
+                        <a:latin typeface="Cambria Math" panose="02040503050406030204" pitchFamily="18" charset="0"/>
+                      </a:rPr>
+                      <m:t>𝑈</m:t>
+                    </m:r>
+                    <m:sSub>
+                      <m:sSubPr>
+                        <m:ctrlPr>
+                          <a:rPr lang="en-US" b="0" i="1" smtClean="0">
+                            <a:latin typeface="Cambria Math" panose="02040503050406030204" pitchFamily="18" charset="0"/>
+                          </a:rPr>
+                        </m:ctrlPr>
+                      </m:sSubPr>
+                      <m:e>
+                        <m:r>
+                          <a:rPr lang="en-US" b="0" i="1" smtClean="0">
+                            <a:latin typeface="Cambria Math" panose="02040503050406030204" pitchFamily="18" charset="0"/>
+                          </a:rPr>
+                          <m:t>𝐴</m:t>
+                        </m:r>
+                      </m:e>
+                      <m:sub>
+                        <m:r>
+                          <a:rPr lang="en-US" b="0" i="1" smtClean="0">
+                            <a:latin typeface="Cambria Math" panose="02040503050406030204" pitchFamily="18" charset="0"/>
+                          </a:rPr>
+                          <m:t>𝑟𝑎𝑑</m:t>
+                        </m:r>
+                      </m:sub>
+                    </m:sSub>
+                    <m:d>
+                      <m:dPr>
+                        <m:ctrlPr>
+                          <a:rPr lang="el-GR" b="0" i="1" smtClean="0">
+                            <a:latin typeface="Cambria Math" panose="02040503050406030204" pitchFamily="18" charset="0"/>
+                          </a:rPr>
+                        </m:ctrlPr>
+                      </m:dPr>
+                      <m:e>
+                        <m:sSub>
+                          <m:sSubPr>
+                            <m:ctrlPr>
+                              <a:rPr lang="el-GR" b="0" i="1" smtClean="0">
+                                <a:latin typeface="Cambria Math" panose="02040503050406030204" pitchFamily="18" charset="0"/>
+                              </a:rPr>
+                            </m:ctrlPr>
+                          </m:sSubPr>
+                          <m:e>
+                            <m:r>
+                              <a:rPr lang="el-GR" b="0" i="1" smtClean="0">
+                                <a:latin typeface="Cambria Math" panose="02040503050406030204" pitchFamily="18" charset="0"/>
+                              </a:rPr>
+                              <m:t>𝜃</m:t>
+                            </m:r>
+                          </m:e>
+                          <m:sub>
+                            <m:r>
+                              <a:rPr lang="en-US" b="0" i="1" smtClean="0">
+                                <a:latin typeface="Cambria Math" panose="02040503050406030204" pitchFamily="18" charset="0"/>
+                              </a:rPr>
+                              <m:t>𝑖</m:t>
+                            </m:r>
+                          </m:sub>
+                        </m:sSub>
+                        <m:r>
+                          <a:rPr lang="el-GR" b="0" i="1" smtClean="0">
+                            <a:latin typeface="Cambria Math" panose="02040503050406030204" pitchFamily="18" charset="0"/>
+                          </a:rPr>
+                          <m:t>−</m:t>
+                        </m:r>
+                        <m:sSub>
+                          <m:sSubPr>
+                            <m:ctrlPr>
+                              <a:rPr lang="el-GR" b="0" i="1" smtClean="0">
+                                <a:latin typeface="Cambria Math" panose="02040503050406030204" pitchFamily="18" charset="0"/>
+                              </a:rPr>
+                            </m:ctrlPr>
+                          </m:sSubPr>
+                          <m:e>
+                            <m:r>
+                              <a:rPr lang="el-GR" b="0" i="1" smtClean="0">
+                                <a:latin typeface="Cambria Math" panose="02040503050406030204" pitchFamily="18" charset="0"/>
+                              </a:rPr>
+                              <m:t>𝜃</m:t>
+                            </m:r>
+                          </m:e>
+                          <m:sub>
+                            <m:r>
+                              <a:rPr lang="en-US" b="0" i="1" smtClean="0">
+                                <a:latin typeface="Cambria Math" panose="02040503050406030204" pitchFamily="18" charset="0"/>
+                              </a:rPr>
+                              <m:t>𝑤</m:t>
+                            </m:r>
+                          </m:sub>
+                        </m:sSub>
+                      </m:e>
+                    </m:d>
+                    <m:r>
+                      <a:rPr lang="en-US" b="0" i="1" smtClean="0">
+                        <a:latin typeface="Cambria Math" panose="02040503050406030204" pitchFamily="18" charset="0"/>
+                      </a:rPr>
+                      <m:t>−</m:t>
+                    </m:r>
+                    <m:sSup>
+                      <m:sSupPr>
+                        <m:ctrlPr>
+                          <a:rPr lang="en-US" b="0" i="1" smtClean="0">
+                            <a:latin typeface="Cambria Math" panose="02040503050406030204" pitchFamily="18" charset="0"/>
+                          </a:rPr>
+                        </m:ctrlPr>
+                      </m:sSupPr>
+                      <m:e>
+                        <m:r>
+                          <a:rPr lang="en-US" b="0" i="1" smtClean="0">
+                            <a:latin typeface="Cambria Math" panose="02040503050406030204" pitchFamily="18" charset="0"/>
+                          </a:rPr>
+                          <m:t>𝑚</m:t>
+                        </m:r>
+                      </m:e>
+                      <m:sup>
+                        <m:r>
+                          <a:rPr lang="en-US" b="0" i="1" smtClean="0">
+                            <a:latin typeface="Cambria Math" panose="02040503050406030204" pitchFamily="18" charset="0"/>
+                          </a:rPr>
+                          <m:t>′</m:t>
+                        </m:r>
+                      </m:sup>
+                    </m:sSup>
+                    <m:sSub>
+                      <m:sSubPr>
+                        <m:ctrlPr>
+                          <a:rPr lang="en-US" b="0" i="1" smtClean="0">
+                            <a:latin typeface="Cambria Math" panose="02040503050406030204" pitchFamily="18" charset="0"/>
+                          </a:rPr>
+                        </m:ctrlPr>
+                      </m:sSubPr>
+                      <m:e>
+                        <m:r>
+                          <a:rPr lang="en-US" b="0" i="1" smtClean="0">
+                            <a:latin typeface="Cambria Math" panose="02040503050406030204" pitchFamily="18" charset="0"/>
+                          </a:rPr>
+                          <m:t>𝑐</m:t>
+                        </m:r>
+                      </m:e>
+                      <m:sub>
+                        <m:r>
+                          <a:rPr lang="en-US" b="0" i="1" smtClean="0">
+                            <a:latin typeface="Cambria Math" panose="02040503050406030204" pitchFamily="18" charset="0"/>
+                          </a:rPr>
+                          <m:t>𝑝</m:t>
+                        </m:r>
+                      </m:sub>
+                    </m:sSub>
+                    <m:d>
+                      <m:dPr>
+                        <m:ctrlPr>
+                          <a:rPr lang="en-US" b="0" i="1" smtClean="0">
+                            <a:latin typeface="Cambria Math" panose="02040503050406030204" pitchFamily="18" charset="0"/>
+                          </a:rPr>
+                        </m:ctrlPr>
+                      </m:dPr>
+                      <m:e>
+                        <m:sSub>
+                          <m:sSubPr>
+                            <m:ctrlPr>
+                              <a:rPr lang="el-GR" b="0" i="1" smtClean="0">
+                                <a:latin typeface="Cambria Math" panose="02040503050406030204" pitchFamily="18" charset="0"/>
+                              </a:rPr>
+                            </m:ctrlPr>
+                          </m:sSubPr>
+                          <m:e>
+                            <m:r>
+                              <a:rPr lang="el-GR" b="0" i="1" smtClean="0">
+                                <a:latin typeface="Cambria Math" panose="02040503050406030204" pitchFamily="18" charset="0"/>
+                              </a:rPr>
+                              <m:t>𝜃</m:t>
+                            </m:r>
+                          </m:e>
+                          <m:sub>
+                            <m:r>
+                              <a:rPr lang="en-US" b="0" i="1" smtClean="0">
+                                <a:latin typeface="Cambria Math" panose="02040503050406030204" pitchFamily="18" charset="0"/>
+                              </a:rPr>
+                              <m:t>𝑤</m:t>
+                            </m:r>
+                          </m:sub>
+                        </m:sSub>
+                        <m:r>
+                          <a:rPr lang="en-US" b="0" i="1" smtClean="0">
+                            <a:latin typeface="Cambria Math" panose="02040503050406030204" pitchFamily="18" charset="0"/>
+                          </a:rPr>
+                          <m:t>−</m:t>
+                        </m:r>
+                        <m:sSub>
+                          <m:sSubPr>
+                            <m:ctrlPr>
+                              <a:rPr lang="el-GR" b="0" i="1" smtClean="0">
+                                <a:latin typeface="Cambria Math" panose="02040503050406030204" pitchFamily="18" charset="0"/>
+                              </a:rPr>
+                            </m:ctrlPr>
+                          </m:sSubPr>
+                          <m:e>
+                            <m:r>
+                              <a:rPr lang="el-GR" b="0" i="1" smtClean="0">
+                                <a:latin typeface="Cambria Math" panose="02040503050406030204" pitchFamily="18" charset="0"/>
+                              </a:rPr>
+                              <m:t>𝜃</m:t>
+                            </m:r>
+                          </m:e>
+                          <m:sub>
+                            <m:r>
+                              <a:rPr lang="en-US" b="0" i="1" smtClean="0">
+                                <a:latin typeface="Cambria Math" panose="02040503050406030204" pitchFamily="18" charset="0"/>
+                              </a:rPr>
+                              <m:t>𝑖𝑛</m:t>
+                            </m:r>
+                          </m:sub>
+                        </m:sSub>
+                      </m:e>
+                    </m:d>
+                    <m:r>
+                      <a:rPr lang="en-US" b="0" i="1" smtClean="0">
+                        <a:latin typeface="Cambria Math" panose="02040503050406030204" pitchFamily="18" charset="0"/>
+                      </a:rPr>
+                      <m:t>−</m:t>
+                    </m:r>
+                    <m:sSub>
+                      <m:sSubPr>
+                        <m:ctrlPr>
+                          <a:rPr lang="en-US" b="0" i="1" smtClean="0">
+                            <a:latin typeface="Cambria Math" panose="02040503050406030204" pitchFamily="18" charset="0"/>
+                          </a:rPr>
+                        </m:ctrlPr>
+                      </m:sSubPr>
+                      <m:e>
+                        <m:r>
+                          <a:rPr lang="en-US" b="0" i="1" smtClean="0">
+                            <a:latin typeface="Cambria Math" panose="02040503050406030204" pitchFamily="18" charset="0"/>
+                          </a:rPr>
+                          <m:t>𝐶</m:t>
+                        </m:r>
+                      </m:e>
+                      <m:sub>
+                        <m:r>
+                          <a:rPr lang="en-US" b="0" i="1" smtClean="0">
+                            <a:latin typeface="Cambria Math" panose="02040503050406030204" pitchFamily="18" charset="0"/>
+                          </a:rPr>
+                          <m:t>𝑤</m:t>
+                        </m:r>
+                      </m:sub>
+                    </m:sSub>
+                    <m:sSubSup>
+                      <m:sSubSupPr>
+                        <m:ctrlPr>
+                          <a:rPr lang="en-US" b="0" i="1" smtClean="0">
+                            <a:latin typeface="Cambria Math" panose="02040503050406030204" pitchFamily="18" charset="0"/>
+                          </a:rPr>
+                        </m:ctrlPr>
+                      </m:sSubSupPr>
+                      <m:e>
+                        <m:r>
+                          <a:rPr lang="en-US" b="0" i="1" smtClean="0">
+                            <a:latin typeface="Cambria Math" panose="02040503050406030204" pitchFamily="18" charset="0"/>
+                          </a:rPr>
+                          <m:t>𝑇</m:t>
+                        </m:r>
+                      </m:e>
+                      <m:sub>
+                        <m:r>
+                          <a:rPr lang="en-US" b="0" i="1" smtClean="0">
+                            <a:latin typeface="Cambria Math" panose="02040503050406030204" pitchFamily="18" charset="0"/>
+                          </a:rPr>
+                          <m:t>𝑎</m:t>
+                        </m:r>
+                      </m:sub>
+                      <m:sup>
+                        <m:r>
+                          <a:rPr lang="en-US" b="0" i="1" smtClean="0">
+                            <a:latin typeface="Cambria Math" panose="02040503050406030204" pitchFamily="18" charset="0"/>
+                          </a:rPr>
+                          <m:t>′</m:t>
+                        </m:r>
+                      </m:sup>
+                    </m:sSubSup>
+                  </m:oMath>
+                </a14:m>
+                <a:r>
+                  <a:rPr lang="en-GR" dirty="0"/>
+                  <a:t>  		(block + water)</a:t>
+                </a:r>
+              </a:p>
+            </p:txBody>
+          </p:sp>
+        </mc:Choice>
+        <mc:Fallback>
+          <p:sp>
+            <p:nvSpPr>
+              <p:cNvPr id="4" name="TextBox 3">
+                <a:extLst>
+                  <a:ext uri="{FF2B5EF4-FFF2-40B4-BE49-F238E27FC236}">
+                    <a16:creationId xmlns:a16="http://schemas.microsoft.com/office/drawing/2014/main" id="{862437C6-6506-187F-874C-9F4F0E78FEE4}"/>
+                  </a:ext>
+                </a:extLst>
+              </p:cNvPr>
+              <p:cNvSpPr txBox="1">
+                <a:spLocks noRot="1" noChangeAspect="1" noMove="1" noResize="1" noEditPoints="1" noAdjustHandles="1" noChangeArrowheads="1" noChangeShapeType="1" noTextEdit="1"/>
+              </p:cNvSpPr>
+              <p:nvPr/>
+            </p:nvSpPr>
+            <p:spPr>
+              <a:xfrm>
+                <a:off x="790192" y="2462459"/>
+                <a:ext cx="8963406" cy="298415"/>
+              </a:xfrm>
+              <a:prstGeom prst="rect">
+                <a:avLst/>
+              </a:prstGeom>
+              <a:blipFill>
+                <a:blip r:embed="rId3"/>
+                <a:stretch>
+                  <a:fillRect l="-850" t="-20000" b="-40000"/>
+                </a:stretch>
+              </a:blipFill>
+            </p:spPr>
+            <p:txBody>
+              <a:bodyPr/>
+              <a:lstStyle/>
+              <a:p>
+                <a:r>
+                  <a:rPr lang="en-GR">
+                    <a:noFill/>
+                  </a:rPr>
+                  <a:t> </a:t>
+                </a:r>
+              </a:p>
+            </p:txBody>
+          </p:sp>
+        </mc:Fallback>
+      </mc:AlternateContent>
+      <mc:AlternateContent xmlns:mc="http://schemas.openxmlformats.org/markup-compatibility/2006">
+        <mc:Choice xmlns:a14="http://schemas.microsoft.com/office/drawing/2010/main" Requires="a14">
+          <p:sp>
+            <p:nvSpPr>
+              <p:cNvPr id="5" name="TextBox 4">
+                <a:extLst>
+                  <a:ext uri="{FF2B5EF4-FFF2-40B4-BE49-F238E27FC236}">
+                    <a16:creationId xmlns:a16="http://schemas.microsoft.com/office/drawing/2014/main" id="{D4BE71AD-A86B-8870-5C8F-E5D774F4775C}"/>
+                  </a:ext>
+                </a:extLst>
+              </p:cNvPr>
+              <p:cNvSpPr txBox="1"/>
+              <p:nvPr/>
+            </p:nvSpPr>
+            <p:spPr>
+              <a:xfrm>
+                <a:off x="790194" y="3002631"/>
+                <a:ext cx="10563606" cy="298415"/>
+              </a:xfrm>
+              <a:prstGeom prst="rect">
+                <a:avLst/>
+              </a:prstGeom>
+              <a:noFill/>
+            </p:spPr>
+            <p:txBody>
+              <a:bodyPr wrap="square" lIns="0" tIns="0" rIns="0" bIns="0" rtlCol="0">
+                <a:spAutoFit/>
+              </a:bodyPr>
+              <a:lstStyle/>
+              <a:p>
+                <a:pPr/>
+                <a14:m>
+                  <m:oMath xmlns:m="http://schemas.openxmlformats.org/officeDocument/2006/math">
+                    <m:sSub>
+                      <m:sSubPr>
+                        <m:ctrlPr>
+                          <a:rPr lang="en-US" b="0" i="1" smtClean="0">
+                            <a:latin typeface="Cambria Math" panose="02040503050406030204" pitchFamily="18" charset="0"/>
+                          </a:rPr>
+                        </m:ctrlPr>
+                      </m:sSubPr>
+                      <m:e>
+                        <m:r>
+                          <a:rPr lang="en-US" b="0" i="1" smtClean="0">
+                            <a:latin typeface="Cambria Math" panose="02040503050406030204" pitchFamily="18" charset="0"/>
+                          </a:rPr>
+                          <m:t>𝐶</m:t>
+                        </m:r>
+                      </m:e>
+                      <m:sub>
+                        <m:r>
+                          <a:rPr lang="en-US" b="0" i="1" smtClean="0">
+                            <a:latin typeface="Cambria Math" panose="02040503050406030204" pitchFamily="18" charset="0"/>
+                          </a:rPr>
+                          <m:t>𝑒</m:t>
+                        </m:r>
+                      </m:sub>
+                    </m:sSub>
+                    <m:sSubSup>
+                      <m:sSubSupPr>
+                        <m:ctrlPr>
+                          <a:rPr lang="el-GR" b="0" i="1" smtClean="0">
+                            <a:latin typeface="Cambria Math" panose="02040503050406030204" pitchFamily="18" charset="0"/>
+                          </a:rPr>
+                        </m:ctrlPr>
+                      </m:sSubSupPr>
+                      <m:e>
+                        <m:r>
+                          <a:rPr lang="el-GR" b="0" i="1" smtClean="0">
+                            <a:latin typeface="Cambria Math" panose="02040503050406030204" pitchFamily="18" charset="0"/>
+                          </a:rPr>
+                          <m:t>𝜃</m:t>
+                        </m:r>
+                      </m:e>
+                      <m:sub>
+                        <m:r>
+                          <a:rPr lang="en-US" b="0" i="1" smtClean="0">
+                            <a:latin typeface="Cambria Math" panose="02040503050406030204" pitchFamily="18" charset="0"/>
+                          </a:rPr>
+                          <m:t>𝑒</m:t>
+                        </m:r>
+                      </m:sub>
+                      <m:sup>
+                        <m:r>
+                          <a:rPr lang="el-GR" b="0" i="1" smtClean="0">
+                            <a:latin typeface="Cambria Math" panose="02040503050406030204" pitchFamily="18" charset="0"/>
+                          </a:rPr>
+                          <m:t>′</m:t>
+                        </m:r>
+                      </m:sup>
+                    </m:sSubSup>
+                    <m:r>
+                      <a:rPr lang="en-US" b="0" i="1" smtClean="0">
+                        <a:latin typeface="Cambria Math" panose="02040503050406030204" pitchFamily="18" charset="0"/>
+                      </a:rPr>
+                      <m:t>=</m:t>
+                    </m:r>
+                    <m:sSub>
+                      <m:sSubPr>
+                        <m:ctrlPr>
+                          <a:rPr lang="en-US" b="0" i="1" smtClean="0">
+                            <a:latin typeface="Cambria Math" panose="02040503050406030204" pitchFamily="18" charset="0"/>
+                          </a:rPr>
+                        </m:ctrlPr>
+                      </m:sSubPr>
+                      <m:e>
+                        <m:r>
+                          <a:rPr lang="en-US" b="0" i="1" smtClean="0">
+                            <a:latin typeface="Cambria Math" panose="02040503050406030204" pitchFamily="18" charset="0"/>
+                          </a:rPr>
+                          <m:t>𝑃</m:t>
+                        </m:r>
+                      </m:e>
+                      <m:sub>
+                        <m:r>
+                          <a:rPr lang="en-US" b="0" i="1" smtClean="0">
+                            <a:latin typeface="Cambria Math" panose="02040503050406030204" pitchFamily="18" charset="0"/>
+                          </a:rPr>
+                          <m:t>𝑒</m:t>
+                        </m:r>
+                      </m:sub>
+                    </m:sSub>
+                    <m:r>
+                      <a:rPr lang="en-US" b="0" i="1" smtClean="0">
+                        <a:latin typeface="Cambria Math" panose="02040503050406030204" pitchFamily="18" charset="0"/>
+                      </a:rPr>
+                      <m:t>+</m:t>
+                    </m:r>
+                    <m:sSub>
+                      <m:sSubPr>
+                        <m:ctrlPr>
+                          <a:rPr lang="en-US" b="0" i="1" smtClean="0">
+                            <a:latin typeface="Cambria Math" panose="02040503050406030204" pitchFamily="18" charset="0"/>
+                          </a:rPr>
+                        </m:ctrlPr>
+                      </m:sSubPr>
+                      <m:e>
+                        <m:r>
+                          <a:rPr lang="en-US" b="0" i="1" smtClean="0">
+                            <a:latin typeface="Cambria Math" panose="02040503050406030204" pitchFamily="18" charset="0"/>
+                          </a:rPr>
+                          <m:t>𝐺</m:t>
+                        </m:r>
+                      </m:e>
+                      <m:sub>
+                        <m:r>
+                          <a:rPr lang="en-US" b="0" i="1" smtClean="0">
+                            <a:latin typeface="Cambria Math" panose="02040503050406030204" pitchFamily="18" charset="0"/>
+                          </a:rPr>
+                          <m:t>𝑔𝑎𝑝</m:t>
+                        </m:r>
+                      </m:sub>
+                    </m:sSub>
+                    <m:d>
+                      <m:dPr>
+                        <m:ctrlPr>
+                          <a:rPr lang="en-US" b="0" i="1" smtClean="0">
+                            <a:latin typeface="Cambria Math" panose="02040503050406030204" pitchFamily="18" charset="0"/>
+                          </a:rPr>
+                        </m:ctrlPr>
+                      </m:dPr>
+                      <m:e>
+                        <m:sSub>
+                          <m:sSubPr>
+                            <m:ctrlPr>
+                              <a:rPr lang="el-GR" b="0" i="1" smtClean="0">
+                                <a:latin typeface="Cambria Math" panose="02040503050406030204" pitchFamily="18" charset="0"/>
+                              </a:rPr>
+                            </m:ctrlPr>
+                          </m:sSubPr>
+                          <m:e>
+                            <m:r>
+                              <a:rPr lang="el-GR" b="0" i="1" smtClean="0">
+                                <a:latin typeface="Cambria Math" panose="02040503050406030204" pitchFamily="18" charset="0"/>
+                              </a:rPr>
+                              <m:t>𝜃</m:t>
+                            </m:r>
+                          </m:e>
+                          <m:sub>
+                            <m:r>
+                              <a:rPr lang="en-US" b="0" i="1" smtClean="0">
+                                <a:latin typeface="Cambria Math" panose="02040503050406030204" pitchFamily="18" charset="0"/>
+                              </a:rPr>
+                              <m:t>𝑖</m:t>
+                            </m:r>
+                          </m:sub>
+                        </m:sSub>
+                        <m:r>
+                          <a:rPr lang="el-GR" b="0" i="1" smtClean="0">
+                            <a:latin typeface="Cambria Math" panose="02040503050406030204" pitchFamily="18" charset="0"/>
+                          </a:rPr>
+                          <m:t>−</m:t>
+                        </m:r>
+                        <m:sSub>
+                          <m:sSubPr>
+                            <m:ctrlPr>
+                              <a:rPr lang="el-GR" b="0" i="1" smtClean="0">
+                                <a:latin typeface="Cambria Math" panose="02040503050406030204" pitchFamily="18" charset="0"/>
+                              </a:rPr>
+                            </m:ctrlPr>
+                          </m:sSubPr>
+                          <m:e>
+                            <m:r>
+                              <a:rPr lang="el-GR" b="0" i="1" smtClean="0">
+                                <a:latin typeface="Cambria Math" panose="02040503050406030204" pitchFamily="18" charset="0"/>
+                              </a:rPr>
+                              <m:t>𝜃</m:t>
+                            </m:r>
+                          </m:e>
+                          <m:sub>
+                            <m:r>
+                              <a:rPr lang="en-US" b="0" i="1" smtClean="0">
+                                <a:latin typeface="Cambria Math" panose="02040503050406030204" pitchFamily="18" charset="0"/>
+                              </a:rPr>
+                              <m:t>𝑒</m:t>
+                            </m:r>
+                          </m:sub>
+                        </m:sSub>
+                      </m:e>
+                    </m:d>
+                    <m:r>
+                      <a:rPr lang="en-US" b="0" i="1" smtClean="0">
+                        <a:latin typeface="Cambria Math" panose="02040503050406030204" pitchFamily="18" charset="0"/>
+                      </a:rPr>
+                      <m:t>−</m:t>
+                    </m:r>
+                    <m:sSub>
+                      <m:sSubPr>
+                        <m:ctrlPr>
+                          <a:rPr lang="en-US" b="0" i="1" smtClean="0">
+                            <a:latin typeface="Cambria Math" panose="02040503050406030204" pitchFamily="18" charset="0"/>
+                          </a:rPr>
+                        </m:ctrlPr>
+                      </m:sSubPr>
+                      <m:e>
+                        <m:r>
+                          <a:rPr lang="en-US" b="0" i="1" smtClean="0">
+                            <a:latin typeface="Cambria Math" panose="02040503050406030204" pitchFamily="18" charset="0"/>
+                          </a:rPr>
+                          <m:t>𝐺</m:t>
+                        </m:r>
+                      </m:e>
+                      <m:sub>
+                        <m:r>
+                          <a:rPr lang="en-US" b="0" i="1" smtClean="0">
+                            <a:latin typeface="Cambria Math" panose="02040503050406030204" pitchFamily="18" charset="0"/>
+                          </a:rPr>
+                          <m:t>𝑜𝑢𝑡</m:t>
+                        </m:r>
+                      </m:sub>
+                    </m:sSub>
+                    <m:sSub>
+                      <m:sSubPr>
+                        <m:ctrlPr>
+                          <a:rPr lang="el-GR" b="0" i="1" smtClean="0">
+                            <a:latin typeface="Cambria Math" panose="02040503050406030204" pitchFamily="18" charset="0"/>
+                          </a:rPr>
+                        </m:ctrlPr>
+                      </m:sSubPr>
+                      <m:e>
+                        <m:r>
+                          <a:rPr lang="el-GR" b="0" i="1" smtClean="0">
+                            <a:latin typeface="Cambria Math" panose="02040503050406030204" pitchFamily="18" charset="0"/>
+                          </a:rPr>
+                          <m:t>𝜃</m:t>
+                        </m:r>
+                      </m:e>
+                      <m:sub>
+                        <m:r>
+                          <a:rPr lang="en-US" b="0" i="1" smtClean="0">
+                            <a:latin typeface="Cambria Math" panose="02040503050406030204" pitchFamily="18" charset="0"/>
+                          </a:rPr>
+                          <m:t>𝑒</m:t>
+                        </m:r>
+                      </m:sub>
+                    </m:sSub>
+                    <m:r>
+                      <a:rPr lang="en-US" b="0" i="1" smtClean="0">
+                        <a:latin typeface="Cambria Math" panose="02040503050406030204" pitchFamily="18" charset="0"/>
+                      </a:rPr>
+                      <m:t>−</m:t>
+                    </m:r>
+                    <m:sSub>
+                      <m:sSubPr>
+                        <m:ctrlPr>
+                          <a:rPr lang="en-US" b="0" i="1" smtClean="0">
+                            <a:latin typeface="Cambria Math" panose="02040503050406030204" pitchFamily="18" charset="0"/>
+                          </a:rPr>
+                        </m:ctrlPr>
+                      </m:sSubPr>
+                      <m:e>
+                        <m:r>
+                          <a:rPr lang="en-US" b="0" i="1" smtClean="0">
+                            <a:latin typeface="Cambria Math" panose="02040503050406030204" pitchFamily="18" charset="0"/>
+                          </a:rPr>
+                          <m:t>𝐶</m:t>
+                        </m:r>
+                      </m:e>
+                      <m:sub>
+                        <m:r>
+                          <a:rPr lang="en-US" b="0" i="1" smtClean="0">
+                            <a:latin typeface="Cambria Math" panose="02040503050406030204" pitchFamily="18" charset="0"/>
+                          </a:rPr>
+                          <m:t>𝑒</m:t>
+                        </m:r>
+                      </m:sub>
+                    </m:sSub>
+                    <m:sSubSup>
+                      <m:sSubSupPr>
+                        <m:ctrlPr>
+                          <a:rPr lang="en-US" b="0" i="1" smtClean="0">
+                            <a:latin typeface="Cambria Math" panose="02040503050406030204" pitchFamily="18" charset="0"/>
+                          </a:rPr>
+                        </m:ctrlPr>
+                      </m:sSubSupPr>
+                      <m:e>
+                        <m:r>
+                          <a:rPr lang="en-US" b="0" i="1" smtClean="0">
+                            <a:latin typeface="Cambria Math" panose="02040503050406030204" pitchFamily="18" charset="0"/>
+                          </a:rPr>
+                          <m:t>𝑇</m:t>
+                        </m:r>
+                      </m:e>
+                      <m:sub>
+                        <m:r>
+                          <a:rPr lang="en-US" b="0" i="1" smtClean="0">
+                            <a:latin typeface="Cambria Math" panose="02040503050406030204" pitchFamily="18" charset="0"/>
+                          </a:rPr>
+                          <m:t>𝑎</m:t>
+                        </m:r>
+                      </m:sub>
+                      <m:sup>
+                        <m:r>
+                          <a:rPr lang="en-US" b="0" i="1" smtClean="0">
+                            <a:latin typeface="Cambria Math" panose="02040503050406030204" pitchFamily="18" charset="0"/>
+                          </a:rPr>
+                          <m:t>′</m:t>
+                        </m:r>
+                      </m:sup>
+                    </m:sSubSup>
+                  </m:oMath>
+                </a14:m>
+                <a:r>
+                  <a:rPr lang="en-GR" dirty="0"/>
+                  <a:t>				(Guard gap)</a:t>
+                </a:r>
+              </a:p>
+            </p:txBody>
+          </p:sp>
+        </mc:Choice>
+        <mc:Fallback>
+          <p:sp>
+            <p:nvSpPr>
+              <p:cNvPr id="5" name="TextBox 4">
+                <a:extLst>
+                  <a:ext uri="{FF2B5EF4-FFF2-40B4-BE49-F238E27FC236}">
+                    <a16:creationId xmlns:a16="http://schemas.microsoft.com/office/drawing/2014/main" id="{D4BE71AD-A86B-8870-5C8F-E5D774F4775C}"/>
+                  </a:ext>
+                </a:extLst>
+              </p:cNvPr>
+              <p:cNvSpPr txBox="1">
+                <a:spLocks noRot="1" noChangeAspect="1" noMove="1" noResize="1" noEditPoints="1" noAdjustHandles="1" noChangeArrowheads="1" noChangeShapeType="1" noTextEdit="1"/>
+              </p:cNvSpPr>
+              <p:nvPr/>
+            </p:nvSpPr>
+            <p:spPr>
+              <a:xfrm>
+                <a:off x="790194" y="3002631"/>
+                <a:ext cx="10563606" cy="298415"/>
+              </a:xfrm>
+              <a:prstGeom prst="rect">
+                <a:avLst/>
+              </a:prstGeom>
+              <a:blipFill>
+                <a:blip r:embed="rId4"/>
+                <a:stretch>
+                  <a:fillRect l="-720" t="-24000" b="-36000"/>
+                </a:stretch>
+              </a:blipFill>
+            </p:spPr>
+            <p:txBody>
+              <a:bodyPr/>
+              <a:lstStyle/>
+              <a:p>
+                <a:r>
+                  <a:rPr lang="en-GR">
+                    <a:noFill/>
+                  </a:rPr>
+                  <a:t> </a:t>
+                </a:r>
+              </a:p>
+            </p:txBody>
+          </p:sp>
+        </mc:Fallback>
+      </mc:AlternateContent>
+      <mc:AlternateContent xmlns:mc="http://schemas.openxmlformats.org/markup-compatibility/2006">
+        <mc:Choice xmlns:a14="http://schemas.microsoft.com/office/drawing/2010/main" Requires="a14">
+          <p:sp>
+            <p:nvSpPr>
+              <p:cNvPr id="6" name="TextBox 5">
+                <a:extLst>
+                  <a:ext uri="{FF2B5EF4-FFF2-40B4-BE49-F238E27FC236}">
+                    <a16:creationId xmlns:a16="http://schemas.microsoft.com/office/drawing/2014/main" id="{A3A05A43-0E3A-14DF-B9CB-F8256B4481F9}"/>
+                  </a:ext>
+                </a:extLst>
+              </p:cNvPr>
+              <p:cNvSpPr txBox="1"/>
+              <p:nvPr/>
+            </p:nvSpPr>
+            <p:spPr>
+              <a:xfrm>
+                <a:off x="766189" y="3542803"/>
+                <a:ext cx="10563605" cy="298415"/>
+              </a:xfrm>
+              <a:prstGeom prst="rect">
+                <a:avLst/>
+              </a:prstGeom>
+              <a:noFill/>
+            </p:spPr>
+            <p:txBody>
+              <a:bodyPr wrap="square" lIns="0" tIns="0" rIns="0" bIns="0" rtlCol="0">
+                <a:spAutoFit/>
+              </a:bodyPr>
+              <a:lstStyle/>
+              <a:p>
+                <a:pPr/>
+                <a14:m>
+                  <m:oMath xmlns:m="http://schemas.openxmlformats.org/officeDocument/2006/math">
+                    <m:sSub>
+                      <m:sSubPr>
+                        <m:ctrlPr>
+                          <a:rPr lang="en-US" b="0" i="1" smtClean="0">
+                            <a:latin typeface="Cambria Math" panose="02040503050406030204" pitchFamily="18" charset="0"/>
+                          </a:rPr>
+                        </m:ctrlPr>
+                      </m:sSubPr>
+                      <m:e>
+                        <m:r>
+                          <a:rPr lang="en-US" b="0" i="1" smtClean="0">
+                            <a:latin typeface="Cambria Math" panose="02040503050406030204" pitchFamily="18" charset="0"/>
+                          </a:rPr>
+                          <m:t>𝑃</m:t>
+                        </m:r>
+                      </m:e>
+                      <m:sub>
+                        <m:r>
+                          <a:rPr lang="en-US" b="0" i="1" smtClean="0">
+                            <a:latin typeface="Cambria Math" panose="02040503050406030204" pitchFamily="18" charset="0"/>
+                          </a:rPr>
+                          <m:t>𝑚𝑒𝑎𝑠</m:t>
+                        </m:r>
+                      </m:sub>
+                    </m:sSub>
+                    <m:r>
+                      <a:rPr lang="en-US" b="0" i="1" smtClean="0">
+                        <a:latin typeface="Cambria Math" panose="02040503050406030204" pitchFamily="18" charset="0"/>
+                      </a:rPr>
+                      <m:t>=</m:t>
+                    </m:r>
+                    <m:sSup>
+                      <m:sSupPr>
+                        <m:ctrlPr>
+                          <a:rPr lang="en-US" b="0" i="1" smtClean="0">
+                            <a:latin typeface="Cambria Math" panose="02040503050406030204" pitchFamily="18" charset="0"/>
+                          </a:rPr>
+                        </m:ctrlPr>
+                      </m:sSupPr>
+                      <m:e>
+                        <m:r>
+                          <a:rPr lang="en-US" b="0" i="1" smtClean="0">
+                            <a:latin typeface="Cambria Math" panose="02040503050406030204" pitchFamily="18" charset="0"/>
+                          </a:rPr>
+                          <m:t>𝑚</m:t>
+                        </m:r>
+                      </m:e>
+                      <m:sup>
+                        <m:r>
+                          <a:rPr lang="en-US" b="0" i="1" smtClean="0">
+                            <a:latin typeface="Cambria Math" panose="02040503050406030204" pitchFamily="18" charset="0"/>
+                          </a:rPr>
+                          <m:t>′</m:t>
+                        </m:r>
+                      </m:sup>
+                    </m:sSup>
+                    <m:sSub>
+                      <m:sSubPr>
+                        <m:ctrlPr>
+                          <a:rPr lang="en-US" b="0" i="1" smtClean="0">
+                            <a:latin typeface="Cambria Math" panose="02040503050406030204" pitchFamily="18" charset="0"/>
+                          </a:rPr>
+                        </m:ctrlPr>
+                      </m:sSubPr>
+                      <m:e>
+                        <m:r>
+                          <a:rPr lang="en-US" b="0" i="1" smtClean="0">
+                            <a:latin typeface="Cambria Math" panose="02040503050406030204" pitchFamily="18" charset="0"/>
+                          </a:rPr>
+                          <m:t>𝑐</m:t>
+                        </m:r>
+                      </m:e>
+                      <m:sub>
+                        <m:r>
+                          <a:rPr lang="en-US" b="0" i="1" smtClean="0">
+                            <a:latin typeface="Cambria Math" panose="02040503050406030204" pitchFamily="18" charset="0"/>
+                          </a:rPr>
+                          <m:t>𝑝</m:t>
+                        </m:r>
+                      </m:sub>
+                    </m:sSub>
+                    <m:d>
+                      <m:dPr>
+                        <m:ctrlPr>
+                          <a:rPr lang="el-GR" b="0" i="1" smtClean="0">
+                            <a:latin typeface="Cambria Math" panose="02040503050406030204" pitchFamily="18" charset="0"/>
+                          </a:rPr>
+                        </m:ctrlPr>
+                      </m:dPr>
+                      <m:e>
+                        <m:sSub>
+                          <m:sSubPr>
+                            <m:ctrlPr>
+                              <a:rPr lang="el-GR" b="0" i="1" smtClean="0">
+                                <a:latin typeface="Cambria Math" panose="02040503050406030204" pitchFamily="18" charset="0"/>
+                              </a:rPr>
+                            </m:ctrlPr>
+                          </m:sSubPr>
+                          <m:e>
+                            <m:r>
+                              <a:rPr lang="el-GR" b="0" i="1" smtClean="0">
+                                <a:latin typeface="Cambria Math" panose="02040503050406030204" pitchFamily="18" charset="0"/>
+                              </a:rPr>
+                              <m:t>𝜃</m:t>
+                            </m:r>
+                          </m:e>
+                          <m:sub>
+                            <m:r>
+                              <a:rPr lang="en-US" b="0" i="1" smtClean="0">
+                                <a:latin typeface="Cambria Math" panose="02040503050406030204" pitchFamily="18" charset="0"/>
+                              </a:rPr>
+                              <m:t>𝑤</m:t>
+                            </m:r>
+                          </m:sub>
+                        </m:sSub>
+                        <m:r>
+                          <a:rPr lang="en-US" b="0" i="1" smtClean="0">
+                            <a:latin typeface="Cambria Math" panose="02040503050406030204" pitchFamily="18" charset="0"/>
+                          </a:rPr>
+                          <m:t>−</m:t>
+                        </m:r>
+                        <m:sSub>
+                          <m:sSubPr>
+                            <m:ctrlPr>
+                              <a:rPr lang="el-GR" b="0" i="1" smtClean="0">
+                                <a:latin typeface="Cambria Math" panose="02040503050406030204" pitchFamily="18" charset="0"/>
+                              </a:rPr>
+                            </m:ctrlPr>
+                          </m:sSubPr>
+                          <m:e>
+                            <m:r>
+                              <a:rPr lang="el-GR" b="0" i="1" smtClean="0">
+                                <a:latin typeface="Cambria Math" panose="02040503050406030204" pitchFamily="18" charset="0"/>
+                              </a:rPr>
+                              <m:t>𝜃</m:t>
+                            </m:r>
+                          </m:e>
+                          <m:sub>
+                            <m:r>
+                              <a:rPr lang="en-US" b="0" i="1" smtClean="0">
+                                <a:latin typeface="Cambria Math" panose="02040503050406030204" pitchFamily="18" charset="0"/>
+                              </a:rPr>
+                              <m:t>𝑖𝑛</m:t>
+                            </m:r>
+                          </m:sub>
+                        </m:sSub>
+                      </m:e>
+                    </m:d>
+                    <m:r>
+                      <a:rPr lang="en-US" b="0" i="1" smtClean="0">
+                        <a:latin typeface="Cambria Math" panose="02040503050406030204" pitchFamily="18" charset="0"/>
+                      </a:rPr>
+                      <m:t>−</m:t>
+                    </m:r>
+                    <m:r>
+                      <a:rPr lang="en-US" b="0" i="1" smtClean="0">
+                        <a:latin typeface="Cambria Math" panose="02040503050406030204" pitchFamily="18" charset="0"/>
+                      </a:rPr>
+                      <m:t>𝑃</m:t>
+                    </m:r>
+                    <m:r>
+                      <a:rPr lang="en-US" b="0" i="1" smtClean="0">
+                        <a:latin typeface="Cambria Math" panose="02040503050406030204" pitchFamily="18" charset="0"/>
+                      </a:rPr>
+                      <m:t>_</m:t>
+                    </m:r>
+                    <m:r>
+                      <a:rPr lang="en-US" b="0" i="1" smtClean="0">
+                        <a:latin typeface="Cambria Math" panose="02040503050406030204" pitchFamily="18" charset="0"/>
+                      </a:rPr>
+                      <m:t>𝑎𝑢𝑥</m:t>
+                    </m:r>
+                  </m:oMath>
+                </a14:m>
+                <a:r>
+                  <a:rPr lang="en-GR" dirty="0"/>
+                  <a:t>					(the meter)</a:t>
+                </a:r>
+              </a:p>
+            </p:txBody>
+          </p:sp>
+        </mc:Choice>
+        <mc:Fallback>
+          <p:sp>
+            <p:nvSpPr>
+              <p:cNvPr id="6" name="TextBox 5">
+                <a:extLst>
+                  <a:ext uri="{FF2B5EF4-FFF2-40B4-BE49-F238E27FC236}">
+                    <a16:creationId xmlns:a16="http://schemas.microsoft.com/office/drawing/2014/main" id="{A3A05A43-0E3A-14DF-B9CB-F8256B4481F9}"/>
+                  </a:ext>
+                </a:extLst>
+              </p:cNvPr>
+              <p:cNvSpPr txBox="1">
+                <a:spLocks noRot="1" noChangeAspect="1" noMove="1" noResize="1" noEditPoints="1" noAdjustHandles="1" noChangeArrowheads="1" noChangeShapeType="1" noTextEdit="1"/>
+              </p:cNvSpPr>
+              <p:nvPr/>
+            </p:nvSpPr>
+            <p:spPr>
+              <a:xfrm>
+                <a:off x="766189" y="3542803"/>
+                <a:ext cx="10563605" cy="298415"/>
+              </a:xfrm>
+              <a:prstGeom prst="rect">
+                <a:avLst/>
+              </a:prstGeom>
+              <a:blipFill>
+                <a:blip r:embed="rId5"/>
+                <a:stretch>
+                  <a:fillRect l="-720" t="-20000" b="-36000"/>
+                </a:stretch>
+              </a:blipFill>
+            </p:spPr>
+            <p:txBody>
+              <a:bodyPr/>
+              <a:lstStyle/>
+              <a:p>
+                <a:r>
+                  <a:rPr lang="en-GR">
+                    <a:noFill/>
+                  </a:rPr>
+                  <a:t> </a:t>
+                </a:r>
+              </a:p>
+            </p:txBody>
+          </p:sp>
+        </mc:Fallback>
+      </mc:AlternateContent>
+      <p:pic>
+        <p:nvPicPr>
+          <p:cNvPr id="7" name="Picture 6">
+            <a:extLst>
+              <a:ext uri="{FF2B5EF4-FFF2-40B4-BE49-F238E27FC236}">
+                <a16:creationId xmlns:a16="http://schemas.microsoft.com/office/drawing/2014/main" id="{E55B3371-FBBB-1872-DD74-F087AB6C447B}"/>
+              </a:ext>
+            </a:extLst>
+          </p:cNvPr>
+          <p:cNvPicPr>
+            <a:picLocks noChangeAspect="1"/>
+          </p:cNvPicPr>
+          <p:nvPr/>
+        </p:nvPicPr>
+        <p:blipFill>
+          <a:blip r:embed="rId6"/>
+          <a:stretch>
+            <a:fillRect/>
+          </a:stretch>
+        </p:blipFill>
+        <p:spPr>
+          <a:xfrm>
+            <a:off x="794784" y="2903562"/>
+            <a:ext cx="5620337" cy="1042317"/>
+          </a:xfrm>
+          <a:prstGeom prst="rect">
+            <a:avLst/>
+          </a:prstGeom>
+        </p:spPr>
+      </p:pic>
+      <p:pic>
+        <p:nvPicPr>
+          <p:cNvPr id="8" name="Picture 7">
+            <a:extLst>
+              <a:ext uri="{FF2B5EF4-FFF2-40B4-BE49-F238E27FC236}">
+                <a16:creationId xmlns:a16="http://schemas.microsoft.com/office/drawing/2014/main" id="{FB05FD1D-CA79-6A46-319D-E37FFD264B77}"/>
+              </a:ext>
+            </a:extLst>
+          </p:cNvPr>
+          <p:cNvPicPr>
+            <a:picLocks noChangeAspect="1"/>
+          </p:cNvPicPr>
+          <p:nvPr/>
+        </p:nvPicPr>
+        <p:blipFill>
+          <a:blip r:embed="rId7"/>
+          <a:stretch>
+            <a:fillRect/>
+          </a:stretch>
+        </p:blipFill>
+        <p:spPr>
+          <a:xfrm>
+            <a:off x="6594385" y="2330479"/>
+            <a:ext cx="5415961" cy="2197041"/>
+          </a:xfrm>
+          <a:prstGeom prst="rect">
+            <a:avLst/>
+          </a:prstGeom>
+        </p:spPr>
+      </p:pic>
+      <p:pic>
+        <p:nvPicPr>
+          <p:cNvPr id="9" name="Picture 8">
+            <a:extLst>
+              <a:ext uri="{FF2B5EF4-FFF2-40B4-BE49-F238E27FC236}">
+                <a16:creationId xmlns:a16="http://schemas.microsoft.com/office/drawing/2014/main" id="{7B2488D7-566A-D735-F736-F16B18E1FC29}"/>
+              </a:ext>
+            </a:extLst>
+          </p:cNvPr>
+          <p:cNvPicPr>
+            <a:picLocks noChangeAspect="1"/>
+          </p:cNvPicPr>
+          <p:nvPr/>
+        </p:nvPicPr>
+        <p:blipFill>
+          <a:blip r:embed="rId8"/>
+          <a:stretch>
+            <a:fillRect/>
+          </a:stretch>
+        </p:blipFill>
+        <p:spPr>
+          <a:xfrm>
+            <a:off x="794784" y="4509861"/>
+            <a:ext cx="4802833" cy="1778070"/>
+          </a:xfrm>
+          <a:prstGeom prst="rect">
+            <a:avLst/>
+          </a:prstGeom>
+        </p:spPr>
+      </p:pic>
+      <p:pic>
+        <p:nvPicPr>
+          <p:cNvPr id="10" name="Picture 9">
+            <a:extLst>
+              <a:ext uri="{FF2B5EF4-FFF2-40B4-BE49-F238E27FC236}">
+                <a16:creationId xmlns:a16="http://schemas.microsoft.com/office/drawing/2014/main" id="{8645D859-960F-6C3F-85BD-4DE0828BFEC2}"/>
+              </a:ext>
+            </a:extLst>
+          </p:cNvPr>
+          <p:cNvPicPr>
+            <a:picLocks noChangeAspect="1"/>
+          </p:cNvPicPr>
+          <p:nvPr/>
+        </p:nvPicPr>
+        <p:blipFill>
+          <a:blip r:embed="rId9"/>
+          <a:stretch>
+            <a:fillRect/>
+          </a:stretch>
+        </p:blipFill>
+        <p:spPr>
+          <a:xfrm>
+            <a:off x="6207494" y="5158754"/>
+            <a:ext cx="5467055" cy="480283"/>
+          </a:xfrm>
+          <a:prstGeom prst="rect">
+            <a:avLst/>
+          </a:prstGeom>
+        </p:spPr>
+      </p:pic>
+      <p:pic>
+        <p:nvPicPr>
+          <p:cNvPr id="11" name="Picture 10">
+            <a:extLst>
+              <a:ext uri="{FF2B5EF4-FFF2-40B4-BE49-F238E27FC236}">
+                <a16:creationId xmlns:a16="http://schemas.microsoft.com/office/drawing/2014/main" id="{4BB7C527-7617-3223-6E16-BF3EAC806E77}"/>
+              </a:ext>
+            </a:extLst>
+          </p:cNvPr>
+          <p:cNvPicPr>
+            <a:picLocks noChangeAspect="1"/>
+          </p:cNvPicPr>
+          <p:nvPr/>
+        </p:nvPicPr>
+        <p:blipFill>
+          <a:blip r:embed="rId10"/>
+          <a:stretch>
+            <a:fillRect/>
+          </a:stretch>
+        </p:blipFill>
+        <p:spPr>
+          <a:xfrm>
+            <a:off x="838200" y="1737729"/>
+            <a:ext cx="3937000" cy="469900"/>
+          </a:xfrm>
+          <a:prstGeom prst="rect">
+            <a:avLst/>
+          </a:prstGeom>
+        </p:spPr>
+      </p:pic>
+      <p:pic>
+        <p:nvPicPr>
+          <p:cNvPr id="12" name="Picture 11">
+            <a:extLst>
+              <a:ext uri="{FF2B5EF4-FFF2-40B4-BE49-F238E27FC236}">
+                <a16:creationId xmlns:a16="http://schemas.microsoft.com/office/drawing/2014/main" id="{9D5F239C-5953-C393-1796-663303227D16}"/>
+              </a:ext>
+            </a:extLst>
+          </p:cNvPr>
+          <p:cNvPicPr>
+            <a:picLocks noChangeAspect="1"/>
+          </p:cNvPicPr>
+          <p:nvPr/>
+        </p:nvPicPr>
+        <p:blipFill>
+          <a:blip r:embed="rId11"/>
+          <a:stretch>
+            <a:fillRect/>
+          </a:stretch>
+        </p:blipFill>
+        <p:spPr>
+          <a:xfrm>
+            <a:off x="838200" y="2299096"/>
+            <a:ext cx="5207000" cy="495300"/>
+          </a:xfrm>
+          <a:prstGeom prst="rect">
+            <a:avLst/>
+          </a:prstGeom>
+        </p:spPr>
+      </p:pic>
+    </p:spTree>
+    <p:extLst>
+      <p:ext uri="{BB962C8B-B14F-4D97-AF65-F5344CB8AC3E}">
+        <p14:creationId xmlns:p14="http://schemas.microsoft.com/office/powerpoint/2010/main" val="91164643"/>
+      </p:ext>
+    </p:extLst>
+  </p:cSld>
+  <p:clrMapOvr>
+    <a:masterClrMapping/>
+  </p:clrMapOvr>
+  <p:timing>
+    <p:tnLst>
+      <p:par>
+        <p:cTn id="1" dur="indefinite" restart="never" nodeType="tmRoot">
+          <p:childTnLst>
+            <p:seq concurrent="1" nextAc="seek">
+              <p:cTn id="2" dur="indefinite" nodeType="mainSeq">
+                <p:childTnLst>
+                  <p:par>
+                    <p:cTn id="3" fill="hold">
+                      <p:stCondLst>
+                        <p:cond delay="indefinite"/>
+                      </p:stCondLst>
+                      <p:childTnLst>
+                        <p:par>
+                          <p:cTn id="4" fill="hold">
+                            <p:stCondLst>
+                              <p:cond delay="0"/>
+                            </p:stCondLst>
+                            <p:childTnLst>
+                              <p:par>
+                                <p:cTn id="5" presetID="10" presetClass="entr" presetSubtype="0" fill="hold" grpId="0" nodeType="clickEffect">
+                                  <p:stCondLst>
+                                    <p:cond delay="0"/>
+                                  </p:stCondLst>
+                                  <p:childTnLst>
+                                    <p:set>
+                                      <p:cBhvr>
+                                        <p:cTn id="6" dur="1" fill="hold">
+                                          <p:stCondLst>
+                                            <p:cond delay="0"/>
+                                          </p:stCondLst>
+                                        </p:cTn>
+                                        <p:tgtEl>
+                                          <p:spTgt spid="3"/>
+                                        </p:tgtEl>
+                                        <p:attrNameLst>
+                                          <p:attrName>style.visibility</p:attrName>
+                                        </p:attrNameLst>
+                                      </p:cBhvr>
+                                      <p:to>
+                                        <p:strVal val="visible"/>
+                                      </p:to>
+                                    </p:set>
+                                    <p:animEffect transition="in" filter="fade">
+                                      <p:cBhvr>
+                                        <p:cTn id="7" dur="500"/>
+                                        <p:tgtEl>
+                                          <p:spTgt spid="3"/>
+                                        </p:tgtEl>
+                                      </p:cBhvr>
+                                    </p:animEffect>
+                                  </p:childTnLst>
+                                </p:cTn>
+                              </p:par>
+                            </p:childTnLst>
+                          </p:cTn>
+                        </p:par>
+                        <p:par>
+                          <p:cTn id="8" fill="hold">
+                            <p:stCondLst>
+                              <p:cond delay="500"/>
+                            </p:stCondLst>
+                            <p:childTnLst>
+                              <p:par>
+                                <p:cTn id="9" presetID="10" presetClass="entr" presetSubtype="0" fill="hold" grpId="0" nodeType="afterEffect">
+                                  <p:stCondLst>
+                                    <p:cond delay="0"/>
+                                  </p:stCondLst>
+                                  <p:childTnLst>
+                                    <p:set>
+                                      <p:cBhvr>
+                                        <p:cTn id="10" dur="1" fill="hold">
+                                          <p:stCondLst>
+                                            <p:cond delay="0"/>
+                                          </p:stCondLst>
+                                        </p:cTn>
+                                        <p:tgtEl>
+                                          <p:spTgt spid="4"/>
+                                        </p:tgtEl>
+                                        <p:attrNameLst>
+                                          <p:attrName>style.visibility</p:attrName>
+                                        </p:attrNameLst>
+                                      </p:cBhvr>
+                                      <p:to>
+                                        <p:strVal val="visible"/>
+                                      </p:to>
+                                    </p:set>
+                                    <p:animEffect transition="in" filter="fade">
+                                      <p:cBhvr>
+                                        <p:cTn id="11" dur="500"/>
+                                        <p:tgtEl>
+                                          <p:spTgt spid="4"/>
+                                        </p:tgtEl>
+                                      </p:cBhvr>
+                                    </p:animEffect>
+                                  </p:childTnLst>
+                                </p:cTn>
+                              </p:par>
+                            </p:childTnLst>
+                          </p:cTn>
+                        </p:par>
+                        <p:par>
+                          <p:cTn id="12" fill="hold">
+                            <p:stCondLst>
+                              <p:cond delay="1000"/>
+                            </p:stCondLst>
+                            <p:childTnLst>
+                              <p:par>
+                                <p:cTn id="13" presetID="10" presetClass="entr" presetSubtype="0" fill="hold" grpId="0" nodeType="afterEffect">
+                                  <p:stCondLst>
+                                    <p:cond delay="0"/>
+                                  </p:stCondLst>
+                                  <p:childTnLst>
+                                    <p:set>
+                                      <p:cBhvr>
+                                        <p:cTn id="14" dur="1" fill="hold">
+                                          <p:stCondLst>
+                                            <p:cond delay="0"/>
+                                          </p:stCondLst>
+                                        </p:cTn>
+                                        <p:tgtEl>
+                                          <p:spTgt spid="5"/>
+                                        </p:tgtEl>
+                                        <p:attrNameLst>
+                                          <p:attrName>style.visibility</p:attrName>
+                                        </p:attrNameLst>
+                                      </p:cBhvr>
+                                      <p:to>
+                                        <p:strVal val="visible"/>
+                                      </p:to>
+                                    </p:set>
+                                    <p:animEffect transition="in" filter="fade">
+                                      <p:cBhvr>
+                                        <p:cTn id="15" dur="500"/>
+                                        <p:tgtEl>
+                                          <p:spTgt spid="5"/>
+                                        </p:tgtEl>
+                                      </p:cBhvr>
+                                    </p:animEffect>
+                                  </p:childTnLst>
+                                </p:cTn>
+                              </p:par>
+                            </p:childTnLst>
+                          </p:cTn>
+                        </p:par>
+                        <p:par>
+                          <p:cTn id="16" fill="hold">
+                            <p:stCondLst>
+                              <p:cond delay="1500"/>
+                            </p:stCondLst>
+                            <p:childTnLst>
+                              <p:par>
+                                <p:cTn id="17" presetID="10" presetClass="entr" presetSubtype="0" fill="hold" grpId="0" nodeType="afterEffect">
+                                  <p:stCondLst>
+                                    <p:cond delay="0"/>
+                                  </p:stCondLst>
+                                  <p:childTnLst>
+                                    <p:set>
+                                      <p:cBhvr>
+                                        <p:cTn id="18" dur="1" fill="hold">
+                                          <p:stCondLst>
+                                            <p:cond delay="0"/>
+                                          </p:stCondLst>
+                                        </p:cTn>
+                                        <p:tgtEl>
+                                          <p:spTgt spid="6"/>
+                                        </p:tgtEl>
+                                        <p:attrNameLst>
+                                          <p:attrName>style.visibility</p:attrName>
+                                        </p:attrNameLst>
+                                      </p:cBhvr>
+                                      <p:to>
+                                        <p:strVal val="visible"/>
+                                      </p:to>
+                                    </p:set>
+                                    <p:animEffect transition="in" filter="fade">
+                                      <p:cBhvr>
+                                        <p:cTn id="19" dur="500"/>
+                                        <p:tgtEl>
+                                          <p:spTgt spid="6"/>
                                         </p:tgtEl>
                                       </p:cBhvr>
                                     </p:animEffect>
@@ -10907,432 +13288,40 @@
                     </p:cTn>
                   </p:par>
                   <p:par>
-                    <p:cTn id="18" fill="hold">
+                    <p:cTn id="20" fill="hold">
                       <p:stCondLst>
                         <p:cond delay="indefinite"/>
                       </p:stCondLst>
                       <p:childTnLst>
                         <p:par>
-                          <p:cTn id="19" fill="hold">
+                          <p:cTn id="21" fill="hold">
                             <p:stCondLst>
                               <p:cond delay="0"/>
                             </p:stCondLst>
                             <p:childTnLst>
                               <p:par>
-                                <p:cTn id="20" presetID="10" presetClass="entr" presetSubtype="0" fill="hold" nodeType="clickEffect">
-                                  <p:stCondLst>
-                                    <p:cond delay="0"/>
-                                  </p:stCondLst>
-                                  <p:childTnLst>
-                                    <p:set>
-                                      <p:cBhvr>
-                                        <p:cTn id="21" dur="1" fill="hold">
-                                          <p:stCondLst>
-                                            <p:cond delay="0"/>
-                                          </p:stCondLst>
-                                        </p:cTn>
-                                        <p:tgtEl>
-                                          <p:spTgt spid="3">
-                                            <p:txEl>
-                                              <p:pRg st="4" end="4"/>
-                                            </p:txEl>
-                                          </p:spTgt>
-                                        </p:tgtEl>
-                                        <p:attrNameLst>
-                                          <p:attrName>style.visibility</p:attrName>
-                                        </p:attrNameLst>
-                                      </p:cBhvr>
-                                      <p:to>
-                                        <p:strVal val="visible"/>
-                                      </p:to>
-                                    </p:set>
-                                    <p:animEffect transition="in" filter="fade">
-                                      <p:cBhvr>
-                                        <p:cTn id="22" dur="500"/>
-                                        <p:tgtEl>
-                                          <p:spTgt spid="3">
-                                            <p:txEl>
-                                              <p:pRg st="4" end="4"/>
-                                            </p:txEl>
-                                          </p:spTgt>
-                                        </p:tgtEl>
-                                      </p:cBhvr>
-                                    </p:animEffect>
-                                  </p:childTnLst>
-                                </p:cTn>
-                              </p:par>
-                              <p:par>
-                                <p:cTn id="23" presetID="10" presetClass="entr" presetSubtype="0" fill="hold" nodeType="withEffect">
-                                  <p:stCondLst>
-                                    <p:cond delay="0"/>
-                                  </p:stCondLst>
-                                  <p:childTnLst>
-                                    <p:set>
-                                      <p:cBhvr>
-                                        <p:cTn id="24" dur="1" fill="hold">
-                                          <p:stCondLst>
-                                            <p:cond delay="0"/>
-                                          </p:stCondLst>
-                                        </p:cTn>
-                                        <p:tgtEl>
-                                          <p:spTgt spid="4"/>
-                                        </p:tgtEl>
-                                        <p:attrNameLst>
-                                          <p:attrName>style.visibility</p:attrName>
-                                        </p:attrNameLst>
-                                      </p:cBhvr>
-                                      <p:to>
-                                        <p:strVal val="visible"/>
-                                      </p:to>
-                                    </p:set>
-                                    <p:animEffect transition="in" filter="fade">
-                                      <p:cBhvr>
-                                        <p:cTn id="25" dur="500"/>
-                                        <p:tgtEl>
-                                          <p:spTgt spid="4"/>
-                                        </p:tgtEl>
-                                      </p:cBhvr>
-                                    </p:animEffect>
-                                  </p:childTnLst>
-                                </p:cTn>
-                              </p:par>
-                            </p:childTnLst>
-                          </p:cTn>
-                        </p:par>
-                      </p:childTnLst>
-                    </p:cTn>
-                  </p:par>
-                  <p:par>
-                    <p:cTn id="26" fill="hold">
-                      <p:stCondLst>
-                        <p:cond delay="indefinite"/>
-                      </p:stCondLst>
-                      <p:childTnLst>
-                        <p:par>
-                          <p:cTn id="27" fill="hold">
-                            <p:stCondLst>
-                              <p:cond delay="0"/>
-                            </p:stCondLst>
-                            <p:childTnLst>
-                              <p:par>
-                                <p:cTn id="28" presetID="10" presetClass="entr" presetSubtype="0" fill="hold" nodeType="clickEffect">
-                                  <p:stCondLst>
-                                    <p:cond delay="0"/>
-                                  </p:stCondLst>
-                                  <p:childTnLst>
-                                    <p:set>
-                                      <p:cBhvr>
-                                        <p:cTn id="29" dur="1" fill="hold">
-                                          <p:stCondLst>
-                                            <p:cond delay="0"/>
-                                          </p:stCondLst>
-                                        </p:cTn>
-                                        <p:tgtEl>
-                                          <p:spTgt spid="3">
-                                            <p:txEl>
-                                              <p:pRg st="5" end="5"/>
-                                            </p:txEl>
-                                          </p:spTgt>
-                                        </p:tgtEl>
-                                        <p:attrNameLst>
-                                          <p:attrName>style.visibility</p:attrName>
-                                        </p:attrNameLst>
-                                      </p:cBhvr>
-                                      <p:to>
-                                        <p:strVal val="visible"/>
-                                      </p:to>
-                                    </p:set>
-                                    <p:animEffect transition="in" filter="fade">
-                                      <p:cBhvr>
-                                        <p:cTn id="30" dur="500"/>
-                                        <p:tgtEl>
-                                          <p:spTgt spid="3">
-                                            <p:txEl>
-                                              <p:pRg st="5" end="5"/>
-                                            </p:txEl>
-                                          </p:spTgt>
-                                        </p:tgtEl>
-                                      </p:cBhvr>
-                                    </p:animEffect>
-                                  </p:childTnLst>
-                                </p:cTn>
-                              </p:par>
-                              <p:par>
-                                <p:cTn id="31" presetID="10" presetClass="entr" presetSubtype="0" fill="hold" nodeType="withEffect">
-                                  <p:stCondLst>
-                                    <p:cond delay="0"/>
-                                  </p:stCondLst>
-                                  <p:childTnLst>
-                                    <p:set>
-                                      <p:cBhvr>
-                                        <p:cTn id="32" dur="1" fill="hold">
-                                          <p:stCondLst>
-                                            <p:cond delay="0"/>
-                                          </p:stCondLst>
-                                        </p:cTn>
-                                        <p:tgtEl>
-                                          <p:spTgt spid="5"/>
-                                        </p:tgtEl>
-                                        <p:attrNameLst>
-                                          <p:attrName>style.visibility</p:attrName>
-                                        </p:attrNameLst>
-                                      </p:cBhvr>
-                                      <p:to>
-                                        <p:strVal val="visible"/>
-                                      </p:to>
-                                    </p:set>
-                                    <p:animEffect transition="in" filter="fade">
-                                      <p:cBhvr>
-                                        <p:cTn id="33" dur="500"/>
-                                        <p:tgtEl>
-                                          <p:spTgt spid="5"/>
-                                        </p:tgtEl>
-                                      </p:cBhvr>
-                                    </p:animEffect>
-                                  </p:childTnLst>
-                                </p:cTn>
-                              </p:par>
-                            </p:childTnLst>
-                          </p:cTn>
-                        </p:par>
-                      </p:childTnLst>
-                    </p:cTn>
-                  </p:par>
-                  <p:par>
-                    <p:cTn id="34" fill="hold">
-                      <p:stCondLst>
-                        <p:cond delay="indefinite"/>
-                      </p:stCondLst>
-                      <p:childTnLst>
-                        <p:par>
-                          <p:cTn id="35" fill="hold">
-                            <p:stCondLst>
-                              <p:cond delay="0"/>
-                            </p:stCondLst>
-                            <p:childTnLst>
-                              <p:par>
-                                <p:cTn id="36" presetID="10" presetClass="entr" presetSubtype="0" fill="hold" nodeType="clickEffect">
-                                  <p:stCondLst>
-                                    <p:cond delay="0"/>
-                                  </p:stCondLst>
-                                  <p:childTnLst>
-                                    <p:set>
-                                      <p:cBhvr>
-                                        <p:cTn id="37" dur="1" fill="hold">
-                                          <p:stCondLst>
-                                            <p:cond delay="0"/>
-                                          </p:stCondLst>
-                                        </p:cTn>
-                                        <p:tgtEl>
-                                          <p:spTgt spid="3">
-                                            <p:txEl>
-                                              <p:pRg st="6" end="6"/>
-                                            </p:txEl>
-                                          </p:spTgt>
-                                        </p:tgtEl>
-                                        <p:attrNameLst>
-                                          <p:attrName>style.visibility</p:attrName>
-                                        </p:attrNameLst>
-                                      </p:cBhvr>
-                                      <p:to>
-                                        <p:strVal val="visible"/>
-                                      </p:to>
-                                    </p:set>
-                                    <p:animEffect transition="in" filter="fade">
-                                      <p:cBhvr>
-                                        <p:cTn id="38" dur="500"/>
-                                        <p:tgtEl>
-                                          <p:spTgt spid="3">
-                                            <p:txEl>
-                                              <p:pRg st="6" end="6"/>
-                                            </p:txEl>
-                                          </p:spTgt>
-                                        </p:tgtEl>
-                                      </p:cBhvr>
-                                    </p:animEffect>
-                                  </p:childTnLst>
-                                </p:cTn>
-                              </p:par>
-                              <p:par>
-                                <p:cTn id="39" presetID="10" presetClass="entr" presetSubtype="0" fill="hold" nodeType="withEffect">
-                                  <p:stCondLst>
-                                    <p:cond delay="0"/>
-                                  </p:stCondLst>
-                                  <p:childTnLst>
-                                    <p:set>
-                                      <p:cBhvr>
-                                        <p:cTn id="40" dur="1" fill="hold">
-                                          <p:stCondLst>
-                                            <p:cond delay="0"/>
-                                          </p:stCondLst>
-                                        </p:cTn>
-                                        <p:tgtEl>
-                                          <p:spTgt spid="6"/>
-                                        </p:tgtEl>
-                                        <p:attrNameLst>
-                                          <p:attrName>style.visibility</p:attrName>
-                                        </p:attrNameLst>
-                                      </p:cBhvr>
-                                      <p:to>
-                                        <p:strVal val="visible"/>
-                                      </p:to>
-                                    </p:set>
-                                    <p:animEffect transition="in" filter="fade">
-                                      <p:cBhvr>
-                                        <p:cTn id="41" dur="500"/>
-                                        <p:tgtEl>
-                                          <p:spTgt spid="6"/>
-                                        </p:tgtEl>
-                                      </p:cBhvr>
-                                    </p:animEffect>
-                                  </p:childTnLst>
-                                </p:cTn>
-                              </p:par>
-                            </p:childTnLst>
-                          </p:cTn>
-                        </p:par>
-                      </p:childTnLst>
-                    </p:cTn>
-                  </p:par>
-                  <p:par>
-                    <p:cTn id="42" fill="hold">
-                      <p:stCondLst>
-                        <p:cond delay="indefinite"/>
-                      </p:stCondLst>
-                      <p:childTnLst>
-                        <p:par>
-                          <p:cTn id="43" fill="hold">
-                            <p:stCondLst>
-                              <p:cond delay="0"/>
-                            </p:stCondLst>
-                            <p:childTnLst>
-                              <p:par>
-                                <p:cTn id="44" presetID="10" presetClass="entr" presetSubtype="0" fill="hold" nodeType="clickEffect">
-                                  <p:stCondLst>
-                                    <p:cond delay="0"/>
-                                  </p:stCondLst>
-                                  <p:childTnLst>
-                                    <p:set>
-                                      <p:cBhvr>
-                                        <p:cTn id="45" dur="1" fill="hold">
-                                          <p:stCondLst>
-                                            <p:cond delay="0"/>
-                                          </p:stCondLst>
-                                        </p:cTn>
-                                        <p:tgtEl>
-                                          <p:spTgt spid="3">
-                                            <p:txEl>
-                                              <p:pRg st="7" end="7"/>
-                                            </p:txEl>
-                                          </p:spTgt>
-                                        </p:tgtEl>
-                                        <p:attrNameLst>
-                                          <p:attrName>style.visibility</p:attrName>
-                                        </p:attrNameLst>
-                                      </p:cBhvr>
-                                      <p:to>
-                                        <p:strVal val="visible"/>
-                                      </p:to>
-                                    </p:set>
-                                    <p:animEffect transition="in" filter="fade">
-                                      <p:cBhvr>
-                                        <p:cTn id="46" dur="500"/>
-                                        <p:tgtEl>
-                                          <p:spTgt spid="3">
-                                            <p:txEl>
-                                              <p:pRg st="7" end="7"/>
-                                            </p:txEl>
-                                          </p:spTgt>
-                                        </p:tgtEl>
-                                      </p:cBhvr>
-                                    </p:animEffect>
-                                  </p:childTnLst>
-                                </p:cTn>
-                              </p:par>
-                              <p:par>
-                                <p:cTn id="47" presetID="10" presetClass="entr" presetSubtype="0" fill="hold" nodeType="withEffect">
-                                  <p:stCondLst>
-                                    <p:cond delay="0"/>
-                                  </p:stCondLst>
-                                  <p:childTnLst>
-                                    <p:set>
-                                      <p:cBhvr>
-                                        <p:cTn id="48" dur="1" fill="hold">
-                                          <p:stCondLst>
-                                            <p:cond delay="0"/>
-                                          </p:stCondLst>
-                                        </p:cTn>
-                                        <p:tgtEl>
-                                          <p:spTgt spid="7"/>
-                                        </p:tgtEl>
-                                        <p:attrNameLst>
-                                          <p:attrName>style.visibility</p:attrName>
-                                        </p:attrNameLst>
-                                      </p:cBhvr>
-                                      <p:to>
-                                        <p:strVal val="visible"/>
-                                      </p:to>
-                                    </p:set>
-                                    <p:animEffect transition="in" filter="fade">
-                                      <p:cBhvr>
-                                        <p:cTn id="49" dur="500"/>
-                                        <p:tgtEl>
-                                          <p:spTgt spid="7"/>
-                                        </p:tgtEl>
-                                      </p:cBhvr>
-                                    </p:animEffect>
-                                  </p:childTnLst>
-                                </p:cTn>
-                              </p:par>
-                            </p:childTnLst>
-                          </p:cTn>
-                        </p:par>
-                      </p:childTnLst>
-                    </p:cTn>
-                  </p:par>
-                  <p:par>
-                    <p:cTn id="50" fill="hold">
-                      <p:stCondLst>
-                        <p:cond delay="indefinite"/>
-                      </p:stCondLst>
-                      <p:childTnLst>
-                        <p:par>
-                          <p:cTn id="51" fill="hold">
-                            <p:stCondLst>
-                              <p:cond delay="0"/>
-                            </p:stCondLst>
-                            <p:childTnLst>
-                              <p:par>
-                                <p:cTn id="52" presetID="10" presetClass="exit" presetSubtype="0" fill="hold" grpId="0" nodeType="clickEffect">
+                                <p:cTn id="22" presetID="10" presetClass="exit" presetSubtype="0" fill="hold" grpId="1" nodeType="clickEffect">
                                   <p:stCondLst>
                                     <p:cond delay="0"/>
                                   </p:stCondLst>
                                   <p:childTnLst>
                                     <p:animEffect transition="out" filter="fade">
                                       <p:cBhvr>
-                                        <p:cTn id="53" dur="500"/>
-                                        <p:tgtEl>
-                                          <p:spTgt spid="3">
-                                            <p:txEl>
-                                              <p:pRg st="0" end="0"/>
-                                            </p:txEl>
-                                          </p:spTgt>
+                                        <p:cTn id="23" dur="500"/>
+                                        <p:tgtEl>
+                                          <p:spTgt spid="3"/>
                                         </p:tgtEl>
                                       </p:cBhvr>
                                     </p:animEffect>
                                     <p:set>
                                       <p:cBhvr>
-                                        <p:cTn id="54" dur="1" fill="hold">
+                                        <p:cTn id="24" dur="1" fill="hold">
                                           <p:stCondLst>
                                             <p:cond delay="499"/>
                                           </p:stCondLst>
                                         </p:cTn>
                                         <p:tgtEl>
-                                          <p:spTgt spid="3">
-                                            <p:txEl>
-                                              <p:pRg st="0" end="0"/>
-                                            </p:txEl>
-                                          </p:spTgt>
+                                          <p:spTgt spid="3"/>
                                         </p:tgtEl>
                                         <p:attrNameLst>
                                           <p:attrName>style.visibility</p:attrName>
@@ -11346,36 +13335,28 @@
                                 </p:cTn>
                               </p:par>
                               <p:par>
-                                <p:cTn id="55" presetID="10" presetClass="exit" presetSubtype="0" fill="hold" grpId="0" nodeType="withEffect">
+                                <p:cTn id="25" presetID="10" presetClass="exit" presetSubtype="0" fill="hold" grpId="1" nodeType="withEffect">
                                   <p:stCondLst>
                                     <p:cond delay="0"/>
                                   </p:stCondLst>
                                   <p:childTnLst>
                                     <p:animEffect transition="out" filter="fade">
                                       <p:cBhvr>
-                                        <p:cTn id="56" dur="500"/>
-                                        <p:tgtEl>
-                                          <p:spTgt spid="3">
-                                            <p:txEl>
-                                              <p:pRg st="1" end="1"/>
-                                            </p:txEl>
-                                          </p:spTgt>
+                                        <p:cTn id="26" dur="500"/>
+                                        <p:tgtEl>
+                                          <p:spTgt spid="4"/>
                                         </p:tgtEl>
                                       </p:cBhvr>
                                     </p:animEffect>
                                     <p:set>
                                       <p:cBhvr>
-                                        <p:cTn id="57" dur="1" fill="hold">
+                                        <p:cTn id="27" dur="1" fill="hold">
                                           <p:stCondLst>
                                             <p:cond delay="499"/>
                                           </p:stCondLst>
                                         </p:cTn>
                                         <p:tgtEl>
-                                          <p:spTgt spid="3">
-                                            <p:txEl>
-                                              <p:pRg st="1" end="1"/>
-                                            </p:txEl>
-                                          </p:spTgt>
+                                          <p:spTgt spid="4"/>
                                         </p:tgtEl>
                                         <p:attrNameLst>
                                           <p:attrName>style.visibility</p:attrName>
@@ -11389,36 +13370,28 @@
                                 </p:cTn>
                               </p:par>
                               <p:par>
-                                <p:cTn id="58" presetID="10" presetClass="exit" presetSubtype="0" fill="hold" grpId="0" nodeType="withEffect">
+                                <p:cTn id="28" presetID="10" presetClass="exit" presetSubtype="0" fill="hold" grpId="1" nodeType="withEffect">
                                   <p:stCondLst>
                                     <p:cond delay="0"/>
                                   </p:stCondLst>
                                   <p:childTnLst>
                                     <p:animEffect transition="out" filter="fade">
                                       <p:cBhvr>
-                                        <p:cTn id="59" dur="500"/>
-                                        <p:tgtEl>
-                                          <p:spTgt spid="3">
-                                            <p:txEl>
-                                              <p:pRg st="3" end="3"/>
-                                            </p:txEl>
-                                          </p:spTgt>
+                                        <p:cTn id="29" dur="500"/>
+                                        <p:tgtEl>
+                                          <p:spTgt spid="5"/>
                                         </p:tgtEl>
                                       </p:cBhvr>
                                     </p:animEffect>
                                     <p:set>
                                       <p:cBhvr>
-                                        <p:cTn id="60" dur="1" fill="hold">
+                                        <p:cTn id="30" dur="1" fill="hold">
                                           <p:stCondLst>
                                             <p:cond delay="499"/>
                                           </p:stCondLst>
                                         </p:cTn>
                                         <p:tgtEl>
-                                          <p:spTgt spid="3">
-                                            <p:txEl>
-                                              <p:pRg st="3" end="3"/>
-                                            </p:txEl>
-                                          </p:spTgt>
+                                          <p:spTgt spid="5"/>
                                         </p:tgtEl>
                                         <p:attrNameLst>
                                           <p:attrName>style.visibility</p:attrName>
@@ -11432,305 +13405,28 @@
                                 </p:cTn>
                               </p:par>
                               <p:par>
-                                <p:cTn id="61" presetID="10" presetClass="exit" presetSubtype="0" fill="hold" grpId="0" nodeType="withEffect">
+                                <p:cTn id="31" presetID="10" presetClass="exit" presetSubtype="0" fill="hold" grpId="1" nodeType="withEffect">
                                   <p:stCondLst>
                                     <p:cond delay="0"/>
                                   </p:stCondLst>
                                   <p:childTnLst>
                                     <p:animEffect transition="out" filter="fade">
                                       <p:cBhvr>
-                                        <p:cTn id="62" dur="500"/>
-                                        <p:tgtEl>
-                                          <p:spTgt spid="3">
-                                            <p:txEl>
-                                              <p:pRg st="4" end="4"/>
-                                            </p:txEl>
-                                          </p:spTgt>
+                                        <p:cTn id="32" dur="500"/>
+                                        <p:tgtEl>
+                                          <p:spTgt spid="6"/>
                                         </p:tgtEl>
                                       </p:cBhvr>
                                     </p:animEffect>
                                     <p:set>
                                       <p:cBhvr>
-                                        <p:cTn id="63" dur="1" fill="hold">
+                                        <p:cTn id="33" dur="1" fill="hold">
                                           <p:stCondLst>
                                             <p:cond delay="499"/>
                                           </p:stCondLst>
                                         </p:cTn>
                                         <p:tgtEl>
-                                          <p:spTgt spid="3">
-                                            <p:txEl>
-                                              <p:pRg st="4" end="4"/>
-                                            </p:txEl>
-                                          </p:spTgt>
-                                        </p:tgtEl>
-                                        <p:attrNameLst>
-                                          <p:attrName>style.visibility</p:attrName>
-                                        </p:attrNameLst>
-                                      </p:cBhvr>
-                                      <p:to>
-                                        <p:strVal val="hidden"/>
-                                      </p:to>
-                                    </p:set>
-                                  </p:childTnLst>
-                                </p:cTn>
-                              </p:par>
-                              <p:par>
-                                <p:cTn id="64" presetID="10" presetClass="exit" presetSubtype="0" fill="hold" grpId="0" nodeType="withEffect">
-                                  <p:stCondLst>
-                                    <p:cond delay="0"/>
-                                  </p:stCondLst>
-                                  <p:childTnLst>
-                                    <p:animEffect transition="out" filter="fade">
-                                      <p:cBhvr>
-                                        <p:cTn id="65" dur="500"/>
-                                        <p:tgtEl>
-                                          <p:spTgt spid="3">
-                                            <p:txEl>
-                                              <p:pRg st="5" end="5"/>
-                                            </p:txEl>
-                                          </p:spTgt>
-                                        </p:tgtEl>
-                                      </p:cBhvr>
-                                    </p:animEffect>
-                                    <p:set>
-                                      <p:cBhvr>
-                                        <p:cTn id="66" dur="1" fill="hold">
-                                          <p:stCondLst>
-                                            <p:cond delay="499"/>
-                                          </p:stCondLst>
-                                        </p:cTn>
-                                        <p:tgtEl>
-                                          <p:spTgt spid="3">
-                                            <p:txEl>
-                                              <p:pRg st="5" end="5"/>
-                                            </p:txEl>
-                                          </p:spTgt>
-                                        </p:tgtEl>
-                                        <p:attrNameLst>
-                                          <p:attrName>style.visibility</p:attrName>
-                                        </p:attrNameLst>
-                                      </p:cBhvr>
-                                      <p:to>
-                                        <p:strVal val="hidden"/>
-                                      </p:to>
-                                    </p:set>
-                                  </p:childTnLst>
-                                </p:cTn>
-                              </p:par>
-                              <p:par>
-                                <p:cTn id="67" presetID="10" presetClass="exit" presetSubtype="0" fill="hold" grpId="0" nodeType="withEffect">
-                                  <p:stCondLst>
-                                    <p:cond delay="0"/>
-                                  </p:stCondLst>
-                                  <p:childTnLst>
-                                    <p:animEffect transition="out" filter="fade">
-                                      <p:cBhvr>
-                                        <p:cTn id="68" dur="500"/>
-                                        <p:tgtEl>
-                                          <p:spTgt spid="3">
-                                            <p:txEl>
-                                              <p:pRg st="6" end="6"/>
-                                            </p:txEl>
-                                          </p:spTgt>
-                                        </p:tgtEl>
-                                      </p:cBhvr>
-                                    </p:animEffect>
-                                    <p:set>
-                                      <p:cBhvr>
-                                        <p:cTn id="69" dur="1" fill="hold">
-                                          <p:stCondLst>
-                                            <p:cond delay="499"/>
-                                          </p:stCondLst>
-                                        </p:cTn>
-                                        <p:tgtEl>
-                                          <p:spTgt spid="3">
-                                            <p:txEl>
-                                              <p:pRg st="6" end="6"/>
-                                            </p:txEl>
-                                          </p:spTgt>
-                                        </p:tgtEl>
-                                        <p:attrNameLst>
-                                          <p:attrName>style.visibility</p:attrName>
-                                        </p:attrNameLst>
-                                      </p:cBhvr>
-                                      <p:to>
-                                        <p:strVal val="hidden"/>
-                                      </p:to>
-                                    </p:set>
-                                  </p:childTnLst>
-                                </p:cTn>
-                              </p:par>
-                              <p:par>
-                                <p:cTn id="70" presetID="10" presetClass="exit" presetSubtype="0" fill="hold" grpId="0" nodeType="withEffect">
-                                  <p:stCondLst>
-                                    <p:cond delay="0"/>
-                                  </p:stCondLst>
-                                  <p:childTnLst>
-                                    <p:animEffect transition="out" filter="fade">
-                                      <p:cBhvr>
-                                        <p:cTn id="71" dur="500"/>
-                                        <p:tgtEl>
-                                          <p:spTgt spid="3">
-                                            <p:txEl>
-                                              <p:pRg st="7" end="7"/>
-                                            </p:txEl>
-                                          </p:spTgt>
-                                        </p:tgtEl>
-                                      </p:cBhvr>
-                                    </p:animEffect>
-                                    <p:set>
-                                      <p:cBhvr>
-                                        <p:cTn id="72" dur="1" fill="hold">
-                                          <p:stCondLst>
-                                            <p:cond delay="499"/>
-                                          </p:stCondLst>
-                                        </p:cTn>
-                                        <p:tgtEl>
-                                          <p:spTgt spid="3">
-                                            <p:txEl>
-                                              <p:pRg st="7" end="7"/>
-                                            </p:txEl>
-                                          </p:spTgt>
-                                        </p:tgtEl>
-                                        <p:attrNameLst>
-                                          <p:attrName>style.visibility</p:attrName>
-                                        </p:attrNameLst>
-                                      </p:cBhvr>
-                                      <p:to>
-                                        <p:strVal val="hidden"/>
-                                      </p:to>
-                                    </p:set>
-                                  </p:childTnLst>
-                                </p:cTn>
-                              </p:par>
-                              <p:par>
-                                <p:cTn id="73" presetID="10" presetClass="exit" presetSubtype="0" fill="hold" nodeType="withEffect">
-                                  <p:stCondLst>
-                                    <p:cond delay="0"/>
-                                  </p:stCondLst>
-                                  <p:childTnLst>
-                                    <p:animEffect transition="out" filter="fade">
-                                      <p:cBhvr>
-                                        <p:cTn id="74" dur="500"/>
-                                        <p:tgtEl>
-                                          <p:spTgt spid="4"/>
-                                        </p:tgtEl>
-                                      </p:cBhvr>
-                                    </p:animEffect>
-                                    <p:set>
-                                      <p:cBhvr>
-                                        <p:cTn id="75" dur="1" fill="hold">
-                                          <p:stCondLst>
-                                            <p:cond delay="499"/>
-                                          </p:stCondLst>
-                                        </p:cTn>
-                                        <p:tgtEl>
-                                          <p:spTgt spid="4"/>
-                                        </p:tgtEl>
-                                        <p:attrNameLst>
-                                          <p:attrName>style.visibility</p:attrName>
-                                        </p:attrNameLst>
-                                      </p:cBhvr>
-                                      <p:to>
-                                        <p:strVal val="hidden"/>
-                                      </p:to>
-                                    </p:set>
-                                  </p:childTnLst>
-                                </p:cTn>
-                              </p:par>
-                              <p:par>
-                                <p:cTn id="76" presetID="10" presetClass="exit" presetSubtype="0" fill="hold" nodeType="withEffect">
-                                  <p:stCondLst>
-                                    <p:cond delay="0"/>
-                                  </p:stCondLst>
-                                  <p:childTnLst>
-                                    <p:animEffect transition="out" filter="fade">
-                                      <p:cBhvr>
-                                        <p:cTn id="77" dur="500"/>
-                                        <p:tgtEl>
-                                          <p:spTgt spid="5"/>
-                                        </p:tgtEl>
-                                      </p:cBhvr>
-                                    </p:animEffect>
-                                    <p:set>
-                                      <p:cBhvr>
-                                        <p:cTn id="78" dur="1" fill="hold">
-                                          <p:stCondLst>
-                                            <p:cond delay="499"/>
-                                          </p:stCondLst>
-                                        </p:cTn>
-                                        <p:tgtEl>
-                                          <p:spTgt spid="5"/>
-                                        </p:tgtEl>
-                                        <p:attrNameLst>
-                                          <p:attrName>style.visibility</p:attrName>
-                                        </p:attrNameLst>
-                                      </p:cBhvr>
-                                      <p:to>
-                                        <p:strVal val="hidden"/>
-                                      </p:to>
-                                    </p:set>
-                                  </p:childTnLst>
-                                </p:cTn>
-                              </p:par>
-                              <p:par>
-                                <p:cTn id="79" presetID="10" presetClass="exit" presetSubtype="0" fill="hold" nodeType="withEffect">
-                                  <p:stCondLst>
-                                    <p:cond delay="0"/>
-                                  </p:stCondLst>
-                                  <p:childTnLst>
-                                    <p:animEffect transition="out" filter="fade">
-                                      <p:cBhvr>
-                                        <p:cTn id="80" dur="500"/>
-                                        <p:tgtEl>
                                           <p:spTgt spid="6"/>
-                                        </p:tgtEl>
-                                      </p:cBhvr>
-                                    </p:animEffect>
-                                    <p:set>
-                                      <p:cBhvr>
-                                        <p:cTn id="81" dur="1" fill="hold">
-                                          <p:stCondLst>
-                                            <p:cond delay="499"/>
-                                          </p:stCondLst>
-                                        </p:cTn>
-                                        <p:tgtEl>
-                                          <p:spTgt spid="6"/>
-                                        </p:tgtEl>
-                                        <p:attrNameLst>
-                                          <p:attrName>style.visibility</p:attrName>
-                                        </p:attrNameLst>
-                                      </p:cBhvr>
-                                      <p:to>
-                                        <p:strVal val="hidden"/>
-                                      </p:to>
-                                    </p:set>
-                                  </p:childTnLst>
-                                </p:cTn>
-                              </p:par>
-                              <p:par>
-                                <p:cTn id="82" presetID="10" presetClass="exit" presetSubtype="0" fill="hold" nodeType="withEffect">
-                                  <p:stCondLst>
-                                    <p:cond delay="0"/>
-                                  </p:stCondLst>
-                                  <p:childTnLst>
-                                    <p:animEffect transition="out" filter="fade">
-                                      <p:cBhvr>
-                                        <p:cTn id="83" dur="500"/>
-                                        <p:tgtEl>
-                                          <p:spTgt spid="7"/>
-                                        </p:tgtEl>
-                                      </p:cBhvr>
-                                    </p:animEffect>
-                                    <p:set>
-                                      <p:cBhvr>
-                                        <p:cTn id="84" dur="1" fill="hold">
-                                          <p:stCondLst>
-                                            <p:cond delay="499"/>
-                                          </p:stCondLst>
-                                        </p:cTn>
-                                        <p:tgtEl>
-                                          <p:spTgt spid="7"/>
                                         </p:tgtEl>
                                         <p:attrNameLst>
                                           <p:attrName>style.visibility</p:attrName>
@@ -11746,36 +13442,27 @@
                             </p:childTnLst>
                           </p:cTn>
                         </p:par>
-                      </p:childTnLst>
-                    </p:cTn>
-                  </p:par>
-                  <p:par>
-                    <p:cTn id="85" fill="hold">
-                      <p:stCondLst>
-                        <p:cond delay="indefinite"/>
-                      </p:stCondLst>
-                      <p:childTnLst>
                         <p:par>
-                          <p:cTn id="86" fill="hold">
+                          <p:cTn id="34" fill="hold">
                             <p:stCondLst>
-                              <p:cond delay="0"/>
+                              <p:cond delay="500"/>
                             </p:stCondLst>
                             <p:childTnLst>
                               <p:par>
-                                <p:cTn id="87" presetID="10" presetClass="entr" presetSubtype="0" fill="hold" grpId="0" nodeType="clickEffect">
+                                <p:cTn id="35" presetID="10" presetClass="entr" presetSubtype="0" fill="hold" nodeType="afterEffect">
                                   <p:stCondLst>
                                     <p:cond delay="0"/>
                                   </p:stCondLst>
                                   <p:childTnLst>
                                     <p:set>
                                       <p:cBhvr>
-                                        <p:cTn id="88" dur="1" fill="hold">
+                                        <p:cTn id="36" dur="1" fill="hold">
                                           <p:stCondLst>
                                             <p:cond delay="0"/>
                                           </p:stCondLst>
                                         </p:cTn>
                                         <p:tgtEl>
-                                          <p:spTgt spid="8"/>
+                                          <p:spTgt spid="11"/>
                                         </p:tgtEl>
                                         <p:attrNameLst>
                                           <p:attrName>style.visibility</p:attrName>
@@ -11787,9 +13474,229 @@
                                     </p:set>
                                     <p:animEffect transition="in" filter="fade">
                                       <p:cBhvr>
-                                        <p:cTn id="89" dur="500"/>
+                                        <p:cTn id="37" dur="500"/>
+                                        <p:tgtEl>
+                                          <p:spTgt spid="11"/>
+                                        </p:tgtEl>
+                                      </p:cBhvr>
+                                    </p:animEffect>
+                                  </p:childTnLst>
+                                </p:cTn>
+                              </p:par>
+                            </p:childTnLst>
+                          </p:cTn>
+                        </p:par>
+                        <p:par>
+                          <p:cTn id="38" fill="hold">
+                            <p:stCondLst>
+                              <p:cond delay="1000"/>
+                            </p:stCondLst>
+                            <p:childTnLst>
+                              <p:par>
+                                <p:cTn id="39" presetID="10" presetClass="entr" presetSubtype="0" fill="hold" nodeType="afterEffect">
+                                  <p:stCondLst>
+                                    <p:cond delay="0"/>
+                                  </p:stCondLst>
+                                  <p:childTnLst>
+                                    <p:set>
+                                      <p:cBhvr>
+                                        <p:cTn id="40" dur="1" fill="hold">
+                                          <p:stCondLst>
+                                            <p:cond delay="0"/>
+                                          </p:stCondLst>
+                                        </p:cTn>
+                                        <p:tgtEl>
+                                          <p:spTgt spid="12"/>
+                                        </p:tgtEl>
+                                        <p:attrNameLst>
+                                          <p:attrName>style.visibility</p:attrName>
+                                        </p:attrNameLst>
+                                      </p:cBhvr>
+                                      <p:to>
+                                        <p:strVal val="visible"/>
+                                      </p:to>
+                                    </p:set>
+                                    <p:animEffect transition="in" filter="fade">
+                                      <p:cBhvr>
+                                        <p:cTn id="41" dur="500"/>
+                                        <p:tgtEl>
+                                          <p:spTgt spid="12"/>
+                                        </p:tgtEl>
+                                      </p:cBhvr>
+                                    </p:animEffect>
+                                  </p:childTnLst>
+                                </p:cTn>
+                              </p:par>
+                            </p:childTnLst>
+                          </p:cTn>
+                        </p:par>
+                        <p:par>
+                          <p:cTn id="42" fill="hold">
+                            <p:stCondLst>
+                              <p:cond delay="1500"/>
+                            </p:stCondLst>
+                            <p:childTnLst>
+                              <p:par>
+                                <p:cTn id="43" presetID="10" presetClass="entr" presetSubtype="0" fill="hold" nodeType="afterEffect">
+                                  <p:stCondLst>
+                                    <p:cond delay="0"/>
+                                  </p:stCondLst>
+                                  <p:childTnLst>
+                                    <p:set>
+                                      <p:cBhvr>
+                                        <p:cTn id="44" dur="1" fill="hold">
+                                          <p:stCondLst>
+                                            <p:cond delay="0"/>
+                                          </p:stCondLst>
+                                        </p:cTn>
+                                        <p:tgtEl>
+                                          <p:spTgt spid="7"/>
+                                        </p:tgtEl>
+                                        <p:attrNameLst>
+                                          <p:attrName>style.visibility</p:attrName>
+                                        </p:attrNameLst>
+                                      </p:cBhvr>
+                                      <p:to>
+                                        <p:strVal val="visible"/>
+                                      </p:to>
+                                    </p:set>
+                                    <p:animEffect transition="in" filter="fade">
+                                      <p:cBhvr>
+                                        <p:cTn id="45" dur="500"/>
+                                        <p:tgtEl>
+                                          <p:spTgt spid="7"/>
+                                        </p:tgtEl>
+                                      </p:cBhvr>
+                                    </p:animEffect>
+                                  </p:childTnLst>
+                                </p:cTn>
+                              </p:par>
+                            </p:childTnLst>
+                          </p:cTn>
+                        </p:par>
+                        <p:par>
+                          <p:cTn id="46" fill="hold">
+                            <p:stCondLst>
+                              <p:cond delay="2000"/>
+                            </p:stCondLst>
+                            <p:childTnLst>
+                              <p:par>
+                                <p:cTn id="47" presetID="10" presetClass="entr" presetSubtype="0" fill="hold" nodeType="afterEffect">
+                                  <p:stCondLst>
+                                    <p:cond delay="0"/>
+                                  </p:stCondLst>
+                                  <p:childTnLst>
+                                    <p:set>
+                                      <p:cBhvr>
+                                        <p:cTn id="48" dur="1" fill="hold">
+                                          <p:stCondLst>
+                                            <p:cond delay="0"/>
+                                          </p:stCondLst>
+                                        </p:cTn>
                                         <p:tgtEl>
                                           <p:spTgt spid="8"/>
+                                        </p:tgtEl>
+                                        <p:attrNameLst>
+                                          <p:attrName>style.visibility</p:attrName>
+                                        </p:attrNameLst>
+                                      </p:cBhvr>
+                                      <p:to>
+                                        <p:strVal val="visible"/>
+                                      </p:to>
+                                    </p:set>
+                                    <p:animEffect transition="in" filter="fade">
+                                      <p:cBhvr>
+                                        <p:cTn id="49" dur="500"/>
+                                        <p:tgtEl>
+                                          <p:spTgt spid="8"/>
+                                        </p:tgtEl>
+                                      </p:cBhvr>
+                                    </p:animEffect>
+                                  </p:childTnLst>
+                                </p:cTn>
+                              </p:par>
+                            </p:childTnLst>
+                          </p:cTn>
+                        </p:par>
+                        <p:par>
+                          <p:cTn id="50" fill="hold">
+                            <p:stCondLst>
+                              <p:cond delay="2500"/>
+                            </p:stCondLst>
+                            <p:childTnLst>
+                              <p:par>
+                                <p:cTn id="51" presetID="10" presetClass="entr" presetSubtype="0" fill="hold" nodeType="afterEffect">
+                                  <p:stCondLst>
+                                    <p:cond delay="0"/>
+                                  </p:stCondLst>
+                                  <p:childTnLst>
+                                    <p:set>
+                                      <p:cBhvr>
+                                        <p:cTn id="52" dur="1" fill="hold">
+                                          <p:stCondLst>
+                                            <p:cond delay="0"/>
+                                          </p:stCondLst>
+                                        </p:cTn>
+                                        <p:tgtEl>
+                                          <p:spTgt spid="9"/>
+                                        </p:tgtEl>
+                                        <p:attrNameLst>
+                                          <p:attrName>style.visibility</p:attrName>
+                                        </p:attrNameLst>
+                                      </p:cBhvr>
+                                      <p:to>
+                                        <p:strVal val="visible"/>
+                                      </p:to>
+                                    </p:set>
+                                    <p:animEffect transition="in" filter="fade">
+                                      <p:cBhvr>
+                                        <p:cTn id="53" dur="500"/>
+                                        <p:tgtEl>
+                                          <p:spTgt spid="9"/>
+                                        </p:tgtEl>
+                                      </p:cBhvr>
+                                    </p:animEffect>
+                                  </p:childTnLst>
+                                </p:cTn>
+                              </p:par>
+                            </p:childTnLst>
+                          </p:cTn>
+                        </p:par>
+                        <p:par>
+                          <p:cTn id="54" fill="hold">
+                            <p:stCondLst>
+                              <p:cond delay="3000"/>
+                            </p:stCondLst>
+                            <p:childTnLst>
+                              <p:par>
+                                <p:cTn id="55" presetID="10" presetClass="entr" presetSubtype="0" fill="hold" nodeType="afterEffect">
+                                  <p:stCondLst>
+                                    <p:cond delay="0"/>
+                                  </p:stCondLst>
+                                  <p:childTnLst>
+                                    <p:set>
+                                      <p:cBhvr>
+                                        <p:cTn id="56" dur="1" fill="hold">
+                                          <p:stCondLst>
+                                            <p:cond delay="0"/>
+                                          </p:stCondLst>
+                                        </p:cTn>
+                                        <p:tgtEl>
+                                          <p:spTgt spid="10"/>
+                                        </p:tgtEl>
+                                        <p:attrNameLst>
+                                          <p:attrName>style.visibility</p:attrName>
+                                        </p:attrNameLst>
+                                      </p:cBhvr>
+                                      <p:to>
+                                        <p:strVal val="visible"/>
+                                      </p:to>
+                                    </p:set>
+                                    <p:animEffect transition="in" filter="fade">
+                                      <p:cBhvr>
+                                        <p:cTn id="57" dur="500"/>
+                                        <p:tgtEl>
+                                          <p:spTgt spid="10"/>
                                         </p:tgtEl>
                                       </p:cBhvr>
                                     </p:animEffect>
@@ -11824,14 +13731,140 @@
       </p:par>
     </p:tnLst>
     <p:bldLst>
-      <p:bldP spid="3" grpId="0" build="allAtOnce"/>
-      <p:bldP spid="8" grpId="0"/>
+      <p:bldP spid="3" grpId="0"/>
+      <p:bldP spid="3" grpId="1"/>
+      <p:bldP spid="4" grpId="0"/>
+      <p:bldP spid="4" grpId="1"/>
+      <p:bldP spid="5" grpId="0"/>
+      <p:bldP spid="5" grpId="1"/>
+      <p:bldP spid="6" grpId="0"/>
+      <p:bldP spid="6" grpId="1"/>
     </p:bldLst>
   </p:timing>
 </p:sld>
 </file>
 
-<file path=ppt/slides/slide4.xml><?xml version="1.0" encoding="utf-8"?>
+<file path=ppt/slides/slide5.xml><?xml version="1.0" encoding="utf-8"?>
+<p:sld xmlns:a="http://schemas.openxmlformats.org/drawingml/2006/main" xmlns:r="http://schemas.openxmlformats.org/officeDocument/2006/relationships" xmlns:p="http://schemas.openxmlformats.org/presentationml/2006/main">
+  <p:cSld>
+    <p:spTree>
+      <p:nvGrpSpPr>
+        <p:cNvPr id="1" name=""/>
+        <p:cNvGrpSpPr/>
+        <p:nvPr/>
+      </p:nvGrpSpPr>
+      <p:grpSpPr>
+        <a:xfrm>
+          <a:off x="0" y="0"/>
+          <a:ext cx="0" cy="0"/>
+          <a:chOff x="0" y="0"/>
+          <a:chExt cx="0" cy="0"/>
+        </a:xfrm>
+      </p:grpSpPr>
+      <p:pic>
+        <p:nvPicPr>
+          <p:cNvPr id="2" name="Picture 1">
+            <a:extLst>
+              <a:ext uri="{FF2B5EF4-FFF2-40B4-BE49-F238E27FC236}">
+                <a16:creationId xmlns:a16="http://schemas.microsoft.com/office/drawing/2014/main" id="{5DFD7455-B9F0-B6FF-0C7D-61F0138FA8A8}"/>
+              </a:ext>
+            </a:extLst>
+          </p:cNvPr>
+          <p:cNvPicPr>
+            <a:picLocks noChangeAspect="1"/>
+          </p:cNvPicPr>
+          <p:nvPr/>
+        </p:nvPicPr>
+        <p:blipFill>
+          <a:blip r:embed="rId2"/>
+          <a:stretch>
+            <a:fillRect/>
+          </a:stretch>
+        </p:blipFill>
+        <p:spPr>
+          <a:xfrm>
+            <a:off x="0" y="387096"/>
+            <a:ext cx="12167616" cy="6083808"/>
+          </a:xfrm>
+          <a:prstGeom prst="rect">
+            <a:avLst/>
+          </a:prstGeom>
+        </p:spPr>
+      </p:pic>
+    </p:spTree>
+    <p:extLst>
+      <p:ext uri="{BB962C8B-B14F-4D97-AF65-F5344CB8AC3E}">
+        <p14:creationId xmlns:p14="http://schemas.microsoft.com/office/powerpoint/2010/main" val="3276140883"/>
+      </p:ext>
+    </p:extLst>
+  </p:cSld>
+  <p:clrMapOvr>
+    <a:masterClrMapping/>
+  </p:clrMapOvr>
+</p:sld>
+</file>
+
+<file path=ppt/slides/slide6.xml><?xml version="1.0" encoding="utf-8"?>
+<p:sld xmlns:a="http://schemas.openxmlformats.org/drawingml/2006/main" xmlns:r="http://schemas.openxmlformats.org/officeDocument/2006/relationships" xmlns:p="http://schemas.openxmlformats.org/presentationml/2006/main">
+  <p:cSld>
+    <p:spTree>
+      <p:nvGrpSpPr>
+        <p:cNvPr id="1" name=""/>
+        <p:cNvGrpSpPr/>
+        <p:nvPr/>
+      </p:nvGrpSpPr>
+      <p:grpSpPr>
+        <a:xfrm>
+          <a:off x="0" y="0"/>
+          <a:ext cx="0" cy="0"/>
+          <a:chOff x="0" y="0"/>
+          <a:chExt cx="0" cy="0"/>
+        </a:xfrm>
+      </p:grpSpPr>
+      <p:pic>
+        <p:nvPicPr>
+          <p:cNvPr id="4" name="Picture 3">
+            <a:extLst>
+              <a:ext uri="{FF2B5EF4-FFF2-40B4-BE49-F238E27FC236}">
+                <a16:creationId xmlns:a16="http://schemas.microsoft.com/office/drawing/2014/main" id="{C47B0C6B-DE63-D323-E0A9-0A24D3B64B44}"/>
+              </a:ext>
+            </a:extLst>
+          </p:cNvPr>
+          <p:cNvPicPr>
+            <a:picLocks noChangeAspect="1"/>
+          </p:cNvPicPr>
+          <p:nvPr/>
+        </p:nvPicPr>
+        <p:blipFill>
+          <a:blip r:embed="rId2"/>
+          <a:stretch>
+            <a:fillRect/>
+          </a:stretch>
+        </p:blipFill>
+        <p:spPr>
+          <a:xfrm>
+            <a:off x="0" y="381000"/>
+            <a:ext cx="12192000" cy="6096000"/>
+          </a:xfrm>
+          <a:prstGeom prst="rect">
+            <a:avLst/>
+          </a:prstGeom>
+        </p:spPr>
+      </p:pic>
+    </p:spTree>
+    <p:extLst>
+      <p:ext uri="{BB962C8B-B14F-4D97-AF65-F5344CB8AC3E}">
+        <p14:creationId xmlns:p14="http://schemas.microsoft.com/office/powerpoint/2010/main" val="105244534"/>
+      </p:ext>
+    </p:extLst>
+  </p:cSld>
+  <p:clrMapOvr>
+    <a:masterClrMapping/>
+  </p:clrMapOvr>
+</p:sld>
+</file>
+
+<file path=ppt/slides/slide7.xml><?xml version="1.0" encoding="utf-8"?>
 <p:sld xmlns:a="http://schemas.openxmlformats.org/drawingml/2006/main" xmlns:r="http://schemas.openxmlformats.org/officeDocument/2006/relationships" xmlns:p="http://schemas.openxmlformats.org/presentationml/2006/main">
   <p:cSld>
     <p:spTree>
@@ -11891,7 +13924,827 @@
 </p:sld>
 </file>
 
-<file path=ppt/slides/slide5.xml><?xml version="1.0" encoding="utf-8"?>
+<file path=ppt/slides/slide8.xml><?xml version="1.0" encoding="utf-8"?>
+<p:sld xmlns:a="http://schemas.openxmlformats.org/drawingml/2006/main" xmlns:r="http://schemas.openxmlformats.org/officeDocument/2006/relationships" xmlns:p="http://schemas.openxmlformats.org/presentationml/2006/main">
+  <p:cSld>
+    <p:spTree>
+      <p:nvGrpSpPr>
+        <p:cNvPr id="1" name=""/>
+        <p:cNvGrpSpPr/>
+        <p:nvPr/>
+      </p:nvGrpSpPr>
+      <p:grpSpPr>
+        <a:xfrm>
+          <a:off x="0" y="0"/>
+          <a:ext cx="0" cy="0"/>
+          <a:chOff x="0" y="0"/>
+          <a:chExt cx="0" cy="0"/>
+        </a:xfrm>
+      </p:grpSpPr>
+      <p:sp>
+        <p:nvSpPr>
+          <p:cNvPr id="2" name="Title 1">
+            <a:extLst>
+              <a:ext uri="{FF2B5EF4-FFF2-40B4-BE49-F238E27FC236}">
+                <a16:creationId xmlns:a16="http://schemas.microsoft.com/office/drawing/2014/main" id="{AD014FB8-F59C-4AF4-81C8-3C0A11E44FC1}"/>
+              </a:ext>
+            </a:extLst>
+          </p:cNvPr>
+          <p:cNvSpPr>
+            <a:spLocks noGrp="1"/>
+          </p:cNvSpPr>
+          <p:nvPr>
+            <p:ph type="title"/>
+          </p:nvPr>
+        </p:nvSpPr>
+        <p:spPr/>
+        <p:txBody>
+          <a:bodyPr/>
+          <a:lstStyle/>
+          <a:p>
+            <a:r>
+              <a:rPr lang="en-GR" dirty="0"/>
+              <a:t>Safety Measurements</a:t>
+            </a:r>
+          </a:p>
+        </p:txBody>
+      </p:sp>
+      <p:sp>
+        <p:nvSpPr>
+          <p:cNvPr id="3" name="TextBox 2">
+            <a:extLst>
+              <a:ext uri="{FF2B5EF4-FFF2-40B4-BE49-F238E27FC236}">
+                <a16:creationId xmlns:a16="http://schemas.microsoft.com/office/drawing/2014/main" id="{C7E9A6F5-5003-6738-BCC5-C8A55C47CFC0}"/>
+              </a:ext>
+            </a:extLst>
+          </p:cNvPr>
+          <p:cNvSpPr txBox="1"/>
+          <p:nvPr/>
+        </p:nvSpPr>
+        <p:spPr>
+          <a:xfrm>
+            <a:off x="431800" y="1859339"/>
+            <a:ext cx="5664200" cy="3416320"/>
+          </a:xfrm>
+          <a:prstGeom prst="rect">
+            <a:avLst/>
+          </a:prstGeom>
+          <a:noFill/>
+        </p:spPr>
+        <p:txBody>
+          <a:bodyPr wrap="square" rtlCol="0">
+            <a:spAutoFit/>
+          </a:bodyPr>
+          <a:lstStyle/>
+          <a:p>
+            <a:r>
+              <a:rPr lang="en-GR" sz="2400" b="1" dirty="0"/>
+              <a:t>Hardware:</a:t>
+            </a:r>
+          </a:p>
+          <a:p>
+            <a:endParaRPr lang="en-GR" sz="2400" dirty="0"/>
+          </a:p>
+          <a:p>
+            <a:pPr marL="285750" indent="-285750">
+              <a:buFont typeface="Arial" panose="020B0604020202020204" pitchFamily="34" charset="0"/>
+              <a:buChar char="•"/>
+            </a:pPr>
+            <a:r>
+              <a:rPr lang="en-GR" sz="2400" dirty="0"/>
+              <a:t>Input mosfet as input diode</a:t>
+            </a:r>
+          </a:p>
+          <a:p>
+            <a:pPr marL="285750" indent="-285750">
+              <a:buFont typeface="Arial" panose="020B0604020202020204" pitchFamily="34" charset="0"/>
+              <a:buChar char="•"/>
+            </a:pPr>
+            <a:endParaRPr lang="en-GR" sz="2400" dirty="0"/>
+          </a:p>
+          <a:p>
+            <a:pPr marL="285750" indent="-285750">
+              <a:buFont typeface="Arial" panose="020B0604020202020204" pitchFamily="34" charset="0"/>
+              <a:buChar char="•"/>
+            </a:pPr>
+            <a:r>
+              <a:rPr lang="en-GR" sz="2400" dirty="0"/>
+              <a:t>Current sense</a:t>
+            </a:r>
+          </a:p>
+          <a:p>
+            <a:pPr marL="285750" indent="-285750">
+              <a:buFont typeface="Arial" panose="020B0604020202020204" pitchFamily="34" charset="0"/>
+              <a:buChar char="•"/>
+            </a:pPr>
+            <a:endParaRPr lang="en-GR" sz="2400" dirty="0"/>
+          </a:p>
+          <a:p>
+            <a:pPr marL="285750" indent="-285750">
+              <a:buFont typeface="Arial" panose="020B0604020202020204" pitchFamily="34" charset="0"/>
+              <a:buChar char="•"/>
+            </a:pPr>
+            <a:r>
+              <a:rPr lang="en-GR" sz="2400" dirty="0"/>
+              <a:t>Avoid wiring boot strap pins</a:t>
+            </a:r>
+          </a:p>
+          <a:p>
+            <a:pPr marL="285750" indent="-285750">
+              <a:buFont typeface="Arial" panose="020B0604020202020204" pitchFamily="34" charset="0"/>
+              <a:buChar char="•"/>
+            </a:pPr>
+            <a:endParaRPr lang="en-GR" sz="2400" dirty="0"/>
+          </a:p>
+          <a:p>
+            <a:pPr marL="285750" indent="-285750">
+              <a:buFont typeface="Arial" panose="020B0604020202020204" pitchFamily="34" charset="0"/>
+              <a:buChar char="•"/>
+            </a:pPr>
+            <a:r>
+              <a:rPr lang="en-GR" sz="2400" dirty="0"/>
+              <a:t>ESD arrays</a:t>
+            </a:r>
+          </a:p>
+        </p:txBody>
+      </p:sp>
+      <p:sp>
+        <p:nvSpPr>
+          <p:cNvPr id="4" name="TextBox 3">
+            <a:extLst>
+              <a:ext uri="{FF2B5EF4-FFF2-40B4-BE49-F238E27FC236}">
+                <a16:creationId xmlns:a16="http://schemas.microsoft.com/office/drawing/2014/main" id="{CB26144E-815C-E5F5-AEF9-2C0B02F7C454}"/>
+              </a:ext>
+            </a:extLst>
+          </p:cNvPr>
+          <p:cNvSpPr txBox="1"/>
+          <p:nvPr/>
+        </p:nvSpPr>
+        <p:spPr>
+          <a:xfrm>
+            <a:off x="6197600" y="1859339"/>
+            <a:ext cx="5372100" cy="2677656"/>
+          </a:xfrm>
+          <a:prstGeom prst="rect">
+            <a:avLst/>
+          </a:prstGeom>
+          <a:noFill/>
+        </p:spPr>
+        <p:txBody>
+          <a:bodyPr wrap="square" rtlCol="0">
+            <a:spAutoFit/>
+          </a:bodyPr>
+          <a:lstStyle/>
+          <a:p>
+            <a:r>
+              <a:rPr lang="en-GR" sz="2400" b="1" dirty="0"/>
+              <a:t>Firmware:</a:t>
+            </a:r>
+          </a:p>
+          <a:p>
+            <a:endParaRPr lang="en-GR" sz="2400" dirty="0"/>
+          </a:p>
+          <a:p>
+            <a:pPr marL="285750" indent="-285750">
+              <a:buFont typeface="Arial" panose="020B0604020202020204" pitchFamily="34" charset="0"/>
+              <a:buChar char="•"/>
+            </a:pPr>
+            <a:r>
+              <a:rPr lang="en-GR" sz="2400" dirty="0"/>
+              <a:t>Zephyr RTOS</a:t>
+            </a:r>
+          </a:p>
+          <a:p>
+            <a:pPr marL="285750" indent="-285750">
+              <a:buFont typeface="Arial" panose="020B0604020202020204" pitchFamily="34" charset="0"/>
+              <a:buChar char="•"/>
+            </a:pPr>
+            <a:endParaRPr lang="en-GR" sz="2400" dirty="0"/>
+          </a:p>
+          <a:p>
+            <a:pPr marL="285750" indent="-285750">
+              <a:buFont typeface="Arial" panose="020B0604020202020204" pitchFamily="34" charset="0"/>
+              <a:buChar char="•"/>
+            </a:pPr>
+            <a:r>
+              <a:rPr lang="en-GR" sz="2400" dirty="0"/>
+              <a:t>Scheduler</a:t>
+            </a:r>
+          </a:p>
+          <a:p>
+            <a:pPr marL="285750" indent="-285750">
+              <a:buFont typeface="Arial" panose="020B0604020202020204" pitchFamily="34" charset="0"/>
+              <a:buChar char="•"/>
+            </a:pPr>
+            <a:endParaRPr lang="en-GR" sz="2400" dirty="0"/>
+          </a:p>
+          <a:p>
+            <a:pPr marL="285750" indent="-285750">
+              <a:buFont typeface="Arial" panose="020B0604020202020204" pitchFamily="34" charset="0"/>
+              <a:buChar char="•"/>
+            </a:pPr>
+            <a:r>
+              <a:rPr lang="en-GR" sz="2400" dirty="0"/>
+              <a:t>Safety Threads</a:t>
+            </a:r>
+          </a:p>
+        </p:txBody>
+      </p:sp>
+      <p:pic>
+        <p:nvPicPr>
+          <p:cNvPr id="5" name="Picture 4" descr="Zephyr RTOS: Definition, Vorteile und Anwendung">
+            <a:extLst>
+              <a:ext uri="{FF2B5EF4-FFF2-40B4-BE49-F238E27FC236}">
+                <a16:creationId xmlns:a16="http://schemas.microsoft.com/office/drawing/2014/main" id="{9190100A-097D-197C-C5FC-60F55B387F6A}"/>
+              </a:ext>
+            </a:extLst>
+          </p:cNvPr>
+          <p:cNvPicPr>
+            <a:picLocks noChangeAspect="1"/>
+          </p:cNvPicPr>
+          <p:nvPr/>
+        </p:nvPicPr>
+        <p:blipFill>
+          <a:blip r:embed="rId2"/>
+          <a:stretch>
+            <a:fillRect/>
+          </a:stretch>
+        </p:blipFill>
+        <p:spPr>
+          <a:xfrm>
+            <a:off x="8775700" y="2485330"/>
+            <a:ext cx="1308100" cy="678066"/>
+          </a:xfrm>
+          <a:prstGeom prst="rect">
+            <a:avLst/>
+          </a:prstGeom>
+        </p:spPr>
+      </p:pic>
+    </p:spTree>
+    <p:extLst>
+      <p:ext uri="{BB962C8B-B14F-4D97-AF65-F5344CB8AC3E}">
+        <p14:creationId xmlns:p14="http://schemas.microsoft.com/office/powerpoint/2010/main" val="2068405835"/>
+      </p:ext>
+    </p:extLst>
+  </p:cSld>
+  <p:clrMapOvr>
+    <a:masterClrMapping/>
+  </p:clrMapOvr>
+  <p:timing>
+    <p:tnLst>
+      <p:par>
+        <p:cTn id="1" dur="indefinite" restart="never" nodeType="tmRoot">
+          <p:childTnLst>
+            <p:seq concurrent="1" nextAc="seek">
+              <p:cTn id="2" dur="indefinite" nodeType="mainSeq">
+                <p:childTnLst>
+                  <p:par>
+                    <p:cTn id="3" fill="hold">
+                      <p:stCondLst>
+                        <p:cond delay="indefinite"/>
+                      </p:stCondLst>
+                      <p:childTnLst>
+                        <p:par>
+                          <p:cTn id="4" fill="hold">
+                            <p:stCondLst>
+                              <p:cond delay="0"/>
+                            </p:stCondLst>
+                            <p:childTnLst>
+                              <p:par>
+                                <p:cTn id="5" presetID="10" presetClass="entr" presetSubtype="0" fill="hold" nodeType="clickEffect">
+                                  <p:stCondLst>
+                                    <p:cond delay="0"/>
+                                  </p:stCondLst>
+                                  <p:childTnLst>
+                                    <p:set>
+                                      <p:cBhvr>
+                                        <p:cTn id="6" dur="1" fill="hold">
+                                          <p:stCondLst>
+                                            <p:cond delay="0"/>
+                                          </p:stCondLst>
+                                        </p:cTn>
+                                        <p:tgtEl>
+                                          <p:spTgt spid="3">
+                                            <p:txEl>
+                                              <p:pRg st="0" end="0"/>
+                                            </p:txEl>
+                                          </p:spTgt>
+                                        </p:tgtEl>
+                                        <p:attrNameLst>
+                                          <p:attrName>style.visibility</p:attrName>
+                                        </p:attrNameLst>
+                                      </p:cBhvr>
+                                      <p:to>
+                                        <p:strVal val="visible"/>
+                                      </p:to>
+                                    </p:set>
+                                    <p:animEffect transition="in" filter="fade">
+                                      <p:cBhvr>
+                                        <p:cTn id="7" dur="500"/>
+                                        <p:tgtEl>
+                                          <p:spTgt spid="3">
+                                            <p:txEl>
+                                              <p:pRg st="0" end="0"/>
+                                            </p:txEl>
+                                          </p:spTgt>
+                                        </p:tgtEl>
+                                      </p:cBhvr>
+                                    </p:animEffect>
+                                  </p:childTnLst>
+                                </p:cTn>
+                              </p:par>
+                            </p:childTnLst>
+                          </p:cTn>
+                        </p:par>
+                        <p:par>
+                          <p:cTn id="8" fill="hold">
+                            <p:stCondLst>
+                              <p:cond delay="500"/>
+                            </p:stCondLst>
+                            <p:childTnLst>
+                              <p:par>
+                                <p:cTn id="9" presetID="10" presetClass="entr" presetSubtype="0" fill="hold" nodeType="afterEffect">
+                                  <p:stCondLst>
+                                    <p:cond delay="0"/>
+                                  </p:stCondLst>
+                                  <p:childTnLst>
+                                    <p:set>
+                                      <p:cBhvr>
+                                        <p:cTn id="10" dur="1" fill="hold">
+                                          <p:stCondLst>
+                                            <p:cond delay="0"/>
+                                          </p:stCondLst>
+                                        </p:cTn>
+                                        <p:tgtEl>
+                                          <p:spTgt spid="3">
+                                            <p:txEl>
+                                              <p:pRg st="2" end="2"/>
+                                            </p:txEl>
+                                          </p:spTgt>
+                                        </p:tgtEl>
+                                        <p:attrNameLst>
+                                          <p:attrName>style.visibility</p:attrName>
+                                        </p:attrNameLst>
+                                      </p:cBhvr>
+                                      <p:to>
+                                        <p:strVal val="visible"/>
+                                      </p:to>
+                                    </p:set>
+                                    <p:animEffect transition="in" filter="fade">
+                                      <p:cBhvr>
+                                        <p:cTn id="11" dur="500"/>
+                                        <p:tgtEl>
+                                          <p:spTgt spid="3">
+                                            <p:txEl>
+                                              <p:pRg st="2" end="2"/>
+                                            </p:txEl>
+                                          </p:spTgt>
+                                        </p:tgtEl>
+                                      </p:cBhvr>
+                                    </p:animEffect>
+                                  </p:childTnLst>
+                                </p:cTn>
+                              </p:par>
+                            </p:childTnLst>
+                          </p:cTn>
+                        </p:par>
+                        <p:par>
+                          <p:cTn id="12" fill="hold">
+                            <p:stCondLst>
+                              <p:cond delay="1000"/>
+                            </p:stCondLst>
+                            <p:childTnLst>
+                              <p:par>
+                                <p:cTn id="13" presetID="10" presetClass="entr" presetSubtype="0" fill="hold" nodeType="afterEffect">
+                                  <p:stCondLst>
+                                    <p:cond delay="0"/>
+                                  </p:stCondLst>
+                                  <p:childTnLst>
+                                    <p:set>
+                                      <p:cBhvr>
+                                        <p:cTn id="14" dur="1" fill="hold">
+                                          <p:stCondLst>
+                                            <p:cond delay="0"/>
+                                          </p:stCondLst>
+                                        </p:cTn>
+                                        <p:tgtEl>
+                                          <p:spTgt spid="3">
+                                            <p:txEl>
+                                              <p:pRg st="4" end="4"/>
+                                            </p:txEl>
+                                          </p:spTgt>
+                                        </p:tgtEl>
+                                        <p:attrNameLst>
+                                          <p:attrName>style.visibility</p:attrName>
+                                        </p:attrNameLst>
+                                      </p:cBhvr>
+                                      <p:to>
+                                        <p:strVal val="visible"/>
+                                      </p:to>
+                                    </p:set>
+                                    <p:animEffect transition="in" filter="fade">
+                                      <p:cBhvr>
+                                        <p:cTn id="15" dur="500"/>
+                                        <p:tgtEl>
+                                          <p:spTgt spid="3">
+                                            <p:txEl>
+                                              <p:pRg st="4" end="4"/>
+                                            </p:txEl>
+                                          </p:spTgt>
+                                        </p:tgtEl>
+                                      </p:cBhvr>
+                                    </p:animEffect>
+                                  </p:childTnLst>
+                                </p:cTn>
+                              </p:par>
+                            </p:childTnLst>
+                          </p:cTn>
+                        </p:par>
+                        <p:par>
+                          <p:cTn id="16" fill="hold">
+                            <p:stCondLst>
+                              <p:cond delay="1500"/>
+                            </p:stCondLst>
+                            <p:childTnLst>
+                              <p:par>
+                                <p:cTn id="17" presetID="10" presetClass="entr" presetSubtype="0" fill="hold" nodeType="afterEffect">
+                                  <p:stCondLst>
+                                    <p:cond delay="0"/>
+                                  </p:stCondLst>
+                                  <p:childTnLst>
+                                    <p:set>
+                                      <p:cBhvr>
+                                        <p:cTn id="18" dur="1" fill="hold">
+                                          <p:stCondLst>
+                                            <p:cond delay="0"/>
+                                          </p:stCondLst>
+                                        </p:cTn>
+                                        <p:tgtEl>
+                                          <p:spTgt spid="3">
+                                            <p:txEl>
+                                              <p:pRg st="6" end="6"/>
+                                            </p:txEl>
+                                          </p:spTgt>
+                                        </p:tgtEl>
+                                        <p:attrNameLst>
+                                          <p:attrName>style.visibility</p:attrName>
+                                        </p:attrNameLst>
+                                      </p:cBhvr>
+                                      <p:to>
+                                        <p:strVal val="visible"/>
+                                      </p:to>
+                                    </p:set>
+                                    <p:animEffect transition="in" filter="fade">
+                                      <p:cBhvr>
+                                        <p:cTn id="19" dur="500"/>
+                                        <p:tgtEl>
+                                          <p:spTgt spid="3">
+                                            <p:txEl>
+                                              <p:pRg st="6" end="6"/>
+                                            </p:txEl>
+                                          </p:spTgt>
+                                        </p:tgtEl>
+                                      </p:cBhvr>
+                                    </p:animEffect>
+                                  </p:childTnLst>
+                                </p:cTn>
+                              </p:par>
+                            </p:childTnLst>
+                          </p:cTn>
+                        </p:par>
+                        <p:par>
+                          <p:cTn id="20" fill="hold">
+                            <p:stCondLst>
+                              <p:cond delay="2000"/>
+                            </p:stCondLst>
+                            <p:childTnLst>
+                              <p:par>
+                                <p:cTn id="21" presetID="10" presetClass="entr" presetSubtype="0" fill="hold" nodeType="afterEffect">
+                                  <p:stCondLst>
+                                    <p:cond delay="0"/>
+                                  </p:stCondLst>
+                                  <p:childTnLst>
+                                    <p:set>
+                                      <p:cBhvr>
+                                        <p:cTn id="22" dur="1" fill="hold">
+                                          <p:stCondLst>
+                                            <p:cond delay="0"/>
+                                          </p:stCondLst>
+                                        </p:cTn>
+                                        <p:tgtEl>
+                                          <p:spTgt spid="3">
+                                            <p:txEl>
+                                              <p:pRg st="8" end="8"/>
+                                            </p:txEl>
+                                          </p:spTgt>
+                                        </p:tgtEl>
+                                        <p:attrNameLst>
+                                          <p:attrName>style.visibility</p:attrName>
+                                        </p:attrNameLst>
+                                      </p:cBhvr>
+                                      <p:to>
+                                        <p:strVal val="visible"/>
+                                      </p:to>
+                                    </p:set>
+                                    <p:animEffect transition="in" filter="fade">
+                                      <p:cBhvr>
+                                        <p:cTn id="23" dur="500"/>
+                                        <p:tgtEl>
+                                          <p:spTgt spid="3">
+                                            <p:txEl>
+                                              <p:pRg st="8" end="8"/>
+                                            </p:txEl>
+                                          </p:spTgt>
+                                        </p:tgtEl>
+                                      </p:cBhvr>
+                                    </p:animEffect>
+                                  </p:childTnLst>
+                                </p:cTn>
+                              </p:par>
+                            </p:childTnLst>
+                          </p:cTn>
+                        </p:par>
+                      </p:childTnLst>
+                    </p:cTn>
+                  </p:par>
+                  <p:par>
+                    <p:cTn id="24" fill="hold">
+                      <p:stCondLst>
+                        <p:cond delay="indefinite"/>
+                      </p:stCondLst>
+                      <p:childTnLst>
+                        <p:par>
+                          <p:cTn id="25" fill="hold">
+                            <p:stCondLst>
+                              <p:cond delay="0"/>
+                            </p:stCondLst>
+                            <p:childTnLst>
+                              <p:par>
+                                <p:cTn id="26" presetID="10" presetClass="entr" presetSubtype="0" fill="hold" nodeType="clickEffect">
+                                  <p:stCondLst>
+                                    <p:cond delay="0"/>
+                                  </p:stCondLst>
+                                  <p:childTnLst>
+                                    <p:set>
+                                      <p:cBhvr>
+                                        <p:cTn id="27" dur="1" fill="hold">
+                                          <p:stCondLst>
+                                            <p:cond delay="0"/>
+                                          </p:stCondLst>
+                                        </p:cTn>
+                                        <p:tgtEl>
+                                          <p:spTgt spid="4">
+                                            <p:txEl>
+                                              <p:pRg st="0" end="0"/>
+                                            </p:txEl>
+                                          </p:spTgt>
+                                        </p:tgtEl>
+                                        <p:attrNameLst>
+                                          <p:attrName>style.visibility</p:attrName>
+                                        </p:attrNameLst>
+                                      </p:cBhvr>
+                                      <p:to>
+                                        <p:strVal val="visible"/>
+                                      </p:to>
+                                    </p:set>
+                                    <p:animEffect transition="in" filter="fade">
+                                      <p:cBhvr>
+                                        <p:cTn id="28" dur="500"/>
+                                        <p:tgtEl>
+                                          <p:spTgt spid="4">
+                                            <p:txEl>
+                                              <p:pRg st="0" end="0"/>
+                                            </p:txEl>
+                                          </p:spTgt>
+                                        </p:tgtEl>
+                                      </p:cBhvr>
+                                    </p:animEffect>
+                                  </p:childTnLst>
+                                </p:cTn>
+                              </p:par>
+                            </p:childTnLst>
+                          </p:cTn>
+                        </p:par>
+                        <p:par>
+                          <p:cTn id="29" fill="hold">
+                            <p:stCondLst>
+                              <p:cond delay="500"/>
+                            </p:stCondLst>
+                            <p:childTnLst>
+                              <p:par>
+                                <p:cTn id="30" presetID="10" presetClass="entr" presetSubtype="0" fill="hold" nodeType="afterEffect">
+                                  <p:stCondLst>
+                                    <p:cond delay="0"/>
+                                  </p:stCondLst>
+                                  <p:childTnLst>
+                                    <p:set>
+                                      <p:cBhvr>
+                                        <p:cTn id="31" dur="1" fill="hold">
+                                          <p:stCondLst>
+                                            <p:cond delay="0"/>
+                                          </p:stCondLst>
+                                        </p:cTn>
+                                        <p:tgtEl>
+                                          <p:spTgt spid="4">
+                                            <p:txEl>
+                                              <p:pRg st="2" end="2"/>
+                                            </p:txEl>
+                                          </p:spTgt>
+                                        </p:tgtEl>
+                                        <p:attrNameLst>
+                                          <p:attrName>style.visibility</p:attrName>
+                                        </p:attrNameLst>
+                                      </p:cBhvr>
+                                      <p:to>
+                                        <p:strVal val="visible"/>
+                                      </p:to>
+                                    </p:set>
+                                    <p:animEffect transition="in" filter="fade">
+                                      <p:cBhvr>
+                                        <p:cTn id="32" dur="500"/>
+                                        <p:tgtEl>
+                                          <p:spTgt spid="4">
+                                            <p:txEl>
+                                              <p:pRg st="2" end="2"/>
+                                            </p:txEl>
+                                          </p:spTgt>
+                                        </p:tgtEl>
+                                      </p:cBhvr>
+                                    </p:animEffect>
+                                  </p:childTnLst>
+                                </p:cTn>
+                              </p:par>
+                              <p:par>
+                                <p:cTn id="33" presetID="10" presetClass="entr" presetSubtype="0" fill="hold" nodeType="withEffect">
+                                  <p:stCondLst>
+                                    <p:cond delay="0"/>
+                                  </p:stCondLst>
+                                  <p:childTnLst>
+                                    <p:set>
+                                      <p:cBhvr>
+                                        <p:cTn id="34" dur="1" fill="hold">
+                                          <p:stCondLst>
+                                            <p:cond delay="0"/>
+                                          </p:stCondLst>
+                                        </p:cTn>
+                                        <p:tgtEl>
+                                          <p:spTgt spid="5"/>
+                                        </p:tgtEl>
+                                        <p:attrNameLst>
+                                          <p:attrName>style.visibility</p:attrName>
+                                        </p:attrNameLst>
+                                      </p:cBhvr>
+                                      <p:to>
+                                        <p:strVal val="visible"/>
+                                      </p:to>
+                                    </p:set>
+                                    <p:animEffect transition="in" filter="fade">
+                                      <p:cBhvr>
+                                        <p:cTn id="35" dur="500"/>
+                                        <p:tgtEl>
+                                          <p:spTgt spid="5"/>
+                                        </p:tgtEl>
+                                      </p:cBhvr>
+                                    </p:animEffect>
+                                  </p:childTnLst>
+                                </p:cTn>
+                              </p:par>
+                            </p:childTnLst>
+                          </p:cTn>
+                        </p:par>
+                        <p:par>
+                          <p:cTn id="36" fill="hold">
+                            <p:stCondLst>
+                              <p:cond delay="1000"/>
+                            </p:stCondLst>
+                            <p:childTnLst>
+                              <p:par>
+                                <p:cTn id="37" presetID="10" presetClass="entr" presetSubtype="0" fill="hold" nodeType="afterEffect">
+                                  <p:stCondLst>
+                                    <p:cond delay="0"/>
+                                  </p:stCondLst>
+                                  <p:childTnLst>
+                                    <p:set>
+                                      <p:cBhvr>
+                                        <p:cTn id="38" dur="1" fill="hold">
+                                          <p:stCondLst>
+                                            <p:cond delay="0"/>
+                                          </p:stCondLst>
+                                        </p:cTn>
+                                        <p:tgtEl>
+                                          <p:spTgt spid="4">
+                                            <p:txEl>
+                                              <p:pRg st="4" end="4"/>
+                                            </p:txEl>
+                                          </p:spTgt>
+                                        </p:tgtEl>
+                                        <p:attrNameLst>
+                                          <p:attrName>style.visibility</p:attrName>
+                                        </p:attrNameLst>
+                                      </p:cBhvr>
+                                      <p:to>
+                                        <p:strVal val="visible"/>
+                                      </p:to>
+                                    </p:set>
+                                    <p:animEffect transition="in" filter="fade">
+                                      <p:cBhvr>
+                                        <p:cTn id="39" dur="500"/>
+                                        <p:tgtEl>
+                                          <p:spTgt spid="4">
+                                            <p:txEl>
+                                              <p:pRg st="4" end="4"/>
+                                            </p:txEl>
+                                          </p:spTgt>
+                                        </p:tgtEl>
+                                      </p:cBhvr>
+                                    </p:animEffect>
+                                  </p:childTnLst>
+                                </p:cTn>
+                              </p:par>
+                            </p:childTnLst>
+                          </p:cTn>
+                        </p:par>
+                        <p:par>
+                          <p:cTn id="40" fill="hold">
+                            <p:stCondLst>
+                              <p:cond delay="1500"/>
+                            </p:stCondLst>
+                            <p:childTnLst>
+                              <p:par>
+                                <p:cTn id="41" presetID="10" presetClass="entr" presetSubtype="0" fill="hold" nodeType="afterEffect">
+                                  <p:stCondLst>
+                                    <p:cond delay="0"/>
+                                  </p:stCondLst>
+                                  <p:childTnLst>
+                                    <p:set>
+                                      <p:cBhvr>
+                                        <p:cTn id="42" dur="1" fill="hold">
+                                          <p:stCondLst>
+                                            <p:cond delay="0"/>
+                                          </p:stCondLst>
+                                        </p:cTn>
+                                        <p:tgtEl>
+                                          <p:spTgt spid="4">
+                                            <p:txEl>
+                                              <p:pRg st="6" end="6"/>
+                                            </p:txEl>
+                                          </p:spTgt>
+                                        </p:tgtEl>
+                                        <p:attrNameLst>
+                                          <p:attrName>style.visibility</p:attrName>
+                                        </p:attrNameLst>
+                                      </p:cBhvr>
+                                      <p:to>
+                                        <p:strVal val="visible"/>
+                                      </p:to>
+                                    </p:set>
+                                    <p:animEffect transition="in" filter="fade">
+                                      <p:cBhvr>
+                                        <p:cTn id="43" dur="500"/>
+                                        <p:tgtEl>
+                                          <p:spTgt spid="4">
+                                            <p:txEl>
+                                              <p:pRg st="6" end="6"/>
+                                            </p:txEl>
+                                          </p:spTgt>
+                                        </p:tgtEl>
+                                      </p:cBhvr>
+                                    </p:animEffect>
+                                  </p:childTnLst>
+                                </p:cTn>
+                              </p:par>
+                            </p:childTnLst>
+                          </p:cTn>
+                        </p:par>
+                      </p:childTnLst>
+                    </p:cTn>
+                  </p:par>
+                </p:childTnLst>
+              </p:cTn>
+              <p:prevCondLst>
+                <p:cond evt="onPrev" delay="0">
+                  <p:tgtEl>
+                    <p:sldTgt/>
+                  </p:tgtEl>
+                </p:cond>
+              </p:prevCondLst>
+              <p:nextCondLst>
+                <p:cond evt="onNext" delay="0">
+                  <p:tgtEl>
+                    <p:sldTgt/>
+                  </p:tgtEl>
+                </p:cond>
+              </p:nextCondLst>
+            </p:seq>
+          </p:childTnLst>
+        </p:cTn>
+      </p:par>
+    </p:tnLst>
+  </p:timing>
+</p:sld>
+</file>
+
+<file path=ppt/slides/slide9.xml><?xml version="1.0" encoding="utf-8"?>
 <p:sld xmlns:a="http://schemas.openxmlformats.org/drawingml/2006/main" xmlns:r="http://schemas.openxmlformats.org/officeDocument/2006/relationships" xmlns:p="http://schemas.openxmlformats.org/presentationml/2006/main">
   <p:cSld>
     <p:spTree>
@@ -11913,7 +14766,7 @@
           <p:cNvPr id="2" name="Picture 1">
             <a:extLst>
               <a:ext uri="{FF2B5EF4-FFF2-40B4-BE49-F238E27FC236}">
-                <a16:creationId xmlns:a16="http://schemas.microsoft.com/office/drawing/2014/main" id="{EEE0B5F7-BEC8-91D0-D176-C5D70CDEAE09}"/>
+                <a16:creationId xmlns:a16="http://schemas.microsoft.com/office/drawing/2014/main" id="{73A173C2-C271-A008-A3FF-2F825B5C24D3}"/>
               </a:ext>
             </a:extLst>
           </p:cNvPr>
@@ -11930,8 +14783,8 @@
         </p:blipFill>
         <p:spPr>
           <a:xfrm>
-            <a:off x="0" y="0"/>
-            <a:ext cx="12192000" cy="6933649"/>
+            <a:off x="-20606" y="-32787"/>
+            <a:ext cx="12233211" cy="6923574"/>
           </a:xfrm>
           <a:prstGeom prst="rect">
             <a:avLst/>
@@ -11941,7 +14794,7 @@
     </p:spTree>
     <p:extLst>
       <p:ext uri="{BB962C8B-B14F-4D97-AF65-F5344CB8AC3E}">
-        <p14:creationId xmlns:p14="http://schemas.microsoft.com/office/powerpoint/2010/main" val="960123975"/>
+        <p14:creationId xmlns:p14="http://schemas.microsoft.com/office/powerpoint/2010/main" val="3651997419"/>
       </p:ext>
     </p:extLst>
   </p:cSld>
@@ -12264,4 +15117,26 @@
     </a:ext>
   </a:extLst>
 </a:theme>
+</file>
+
+<file path=ppt/webextensions/taskpanes.xml><?xml version="1.0" encoding="utf-8"?>
+<wetp:taskpanes xmlns:wetp="http://schemas.microsoft.com/office/webextensions/taskpanes/2010/11">
+  <wetp:taskpane dockstate="right" visibility="0" width="350" row="0">
+    <wetp:webextensionref xmlns:r="http://schemas.openxmlformats.org/officeDocument/2006/relationships" r:id="rId1"/>
+  </wetp:taskpane>
+</wetp:taskpanes>
+</file>
+
+<file path=ppt/webextensions/webextension1.xml><?xml version="1.0" encoding="utf-8"?>
+<we:webextension xmlns:we="http://schemas.microsoft.com/office/webextensions/webextension/2010/11" id="{D8AB2FA6-8E16-A940-A901-EE92B47C3B1C}">
+  <we:reference id="wa200010001" version="1.0.0.1" store="en-US" storeType="OMEX"/>
+  <we:alternateReferences>
+    <we:reference id="WA200010001" version="1.0.0.1" store="" storeType="OMEX"/>
+  </we:alternateReferences>
+  <we:properties>
+    <we:property name="claude.fileId" value="&quot;63ee51b3-3071-4ec5-be99-3fd871e498a6&quot;"/>
+  </we:properties>
+  <we:bindings/>
+  <we:snapshot xmlns:r="http://schemas.openxmlformats.org/officeDocument/2006/relationships"/>
+</we:webextension>
 </file>